--- a/docs/exhibition/패널_B_최고성능.pptx
+++ b/docs/exhibition/패널_B_최고성능.pptx
@@ -107,7 +107,7 @@
   <p:extLst>
     <p:ext uri="{521415D9-36F7-43E2-AB2F-B90AF26B5E84}">
       <p14:sectionLst xmlns:p14="http://schemas.microsoft.com/office/powerpoint/2010/main">
-        <p14:section name="패널" id="{4188c35d-991c-aea4-b13e-9e43660032d4}">
+        <p14:section name="패널" id="{0123f2aa-f969-75c8-c9d9-b50b8276cad6}">
           <p14:sldIdLst>
             <p14:sldId id="256"/>
           </p14:sldIdLst>
@@ -1773,11 +1773,11 @@
         <p:spPr>
           <a:xfrm>
             <a:off x="548640" y="2926080"/>
-            <a:ext cx="6828282" cy="4389120"/>
+            <a:ext cx="6828282" cy="4343400"/>
           </a:xfrm>
           <a:prstGeom prst="roundRect">
             <a:avLst>
-              <a:gd name="adj" fmla="val 3750"/>
+              <a:gd name="adj" fmla="val 3789"/>
             </a:avLst>
           </a:prstGeom>
           <a:solidFill>
@@ -1897,7 +1897,7 @@
         <p:spPr>
           <a:xfrm>
             <a:off x="914400" y="4069080"/>
-            <a:ext cx="6096762" cy="2971800"/>
+            <a:ext cx="6096762" cy="2926080"/>
           </a:xfrm>
           <a:prstGeom prst="rect">
             <a:avLst/>
@@ -2058,12 +2058,12 @@
         </p:nvSpPr>
         <p:spPr>
           <a:xfrm>
-            <a:off x="7742682" y="2926080"/>
-            <a:ext cx="6828282" cy="4389120"/>
+            <a:off x="548640" y="7543800"/>
+            <a:ext cx="6828282" cy="5074920"/>
           </a:xfrm>
           <a:prstGeom prst="roundRect">
             <a:avLst>
-              <a:gd name="adj" fmla="val 3750"/>
+              <a:gd name="adj" fmla="val 3243"/>
             </a:avLst>
           </a:prstGeom>
           <a:solidFill>
@@ -2085,7 +2085,7 @@
         </p:nvSpPr>
         <p:spPr>
           <a:xfrm>
-            <a:off x="8062722" y="3200400"/>
+            <a:off x="868680" y="7818120"/>
             <a:ext cx="621792" cy="621792"/>
           </a:xfrm>
           <a:prstGeom prst="ellipse">
@@ -2110,7 +2110,7 @@
         </p:nvSpPr>
         <p:spPr>
           <a:xfrm>
-            <a:off x="8062722" y="3200400"/>
+            <a:off x="868680" y="7818120"/>
             <a:ext cx="621792" cy="621792"/>
           </a:xfrm>
           <a:prstGeom prst="rect">
@@ -2146,7 +2146,7 @@
         </p:nvSpPr>
         <p:spPr>
           <a:xfrm>
-            <a:off x="8839962" y="3200400"/>
+            <a:off x="1645920" y="7818120"/>
             <a:ext cx="5456682" cy="621792"/>
           </a:xfrm>
           <a:prstGeom prst="rect">
@@ -2182,8 +2182,8 @@
         </p:nvSpPr>
         <p:spPr>
           <a:xfrm>
-            <a:off x="8108442" y="4069080"/>
-            <a:ext cx="6096762" cy="2971800"/>
+            <a:off x="914400" y="8686800"/>
+            <a:ext cx="6096762" cy="3657600"/>
           </a:xfrm>
           <a:prstGeom prst="rect">
             <a:avLst/>
@@ -2203,12 +2203,12 @@
               <a:buChar char="•"/>
             </a:pPr>
             <a:r>
-              <a:rPr lang="en-US" sz="1800" b="1" dirty="0">
+              <a:rPr lang="en-US" sz="1700" b="1" dirty="0">
                 <a:solidFill>
                   <a:schemeClr val="accent1"/>
                 </a:solidFill>
               </a:rPr>
-              <a:t>① 주 신호  </a:t>
+              <a:t>① LLM 기반 주 신호  </a:t>
             </a:r>
             <a:pPr indent="0" marL="0">
               <a:lnSpc>
@@ -2220,14 +2220,14 @@
               <a:buNone/>
             </a:pPr>
             <a:r>
-              <a:rPr lang="en-US" sz="1800" dirty="0">
+              <a:rPr lang="en-US" sz="1700" dirty="0">
                 <a:solidFill>
                   <a:schemeClr val="tx1"/>
                 </a:solidFill>
               </a:rPr>
-              <a:t>GPT-4o-mini 요약·감성 + 임베딩(1536차원) → 512차원</a:t>
-            </a:r>
-            <a:endParaRPr lang="en-US" sz="1800" dirty="0"/>
+              <a:t>GPT-4o-mini 요약·감성 점수 + 요약문 임베딩(1536차원) → 완전연결층 → 512차원</a:t>
+            </a:r>
+            <a:endParaRPr lang="en-US" sz="1700" dirty="0"/>
           </a:p>
           <a:p>
             <a:pPr marL="228600" indent="-228600">
@@ -2238,12 +2238,12 @@
               <a:buChar char="•"/>
             </a:pPr>
             <a:r>
-              <a:rPr lang="en-US" sz="1800" b="1" dirty="0">
+              <a:rPr lang="en-US" sz="1700" b="1" dirty="0">
                 <a:solidFill>
                   <a:schemeClr val="accent1"/>
                 </a:solidFill>
               </a:rPr>
-              <a:t>② 보조 신호  </a:t>
+              <a:t>② TCN 기반 보조 벡터  </a:t>
             </a:r>
             <a:pPr indent="0" marL="0">
               <a:lnSpc>
@@ -2255,14 +2255,14 @@
               <a:buNone/>
             </a:pPr>
             <a:r>
-              <a:rPr lang="en-US" sz="1800" dirty="0">
+              <a:rPr lang="en-US" sz="1700" dirty="0">
                 <a:solidFill>
                   <a:schemeClr val="tx1"/>
                 </a:solidFill>
               </a:rPr>
-              <a:t>지표 9종 × 30일 → 인과적 TCN(미래 차단) → 30 × 512</a:t>
-            </a:r>
-            <a:endParaRPr lang="en-US" sz="1800" dirty="0"/>
+              <a:t>기술적 지표 9종 × 30일 → 인과적 TCN → 시점별 512차원</a:t>
+            </a:r>
+            <a:endParaRPr lang="en-US" sz="1700" dirty="0"/>
           </a:p>
           <a:p>
             <a:pPr marL="228600" indent="-228600">
@@ -2273,7 +2273,7 @@
               <a:buChar char="•"/>
             </a:pPr>
             <a:r>
-              <a:rPr lang="en-US" sz="1800" b="1" dirty="0">
+              <a:rPr lang="en-US" sz="1700" b="1" dirty="0">
                 <a:solidFill>
                   <a:schemeClr val="accent1"/>
                 </a:solidFill>
@@ -2290,14 +2290,14 @@
               <a:buNone/>
             </a:pPr>
             <a:r>
-              <a:rPr lang="en-US" sz="1800" dirty="0">
+              <a:rPr lang="en-US" sz="1700" dirty="0">
                 <a:solidFill>
                   <a:schemeClr val="tx1"/>
                 </a:solidFill>
               </a:rPr>
-              <a:t>뉴스(Q)가 30일 지표(K·V) 중 관련 시점을 가중 평균</a:t>
-            </a:r>
-            <a:endParaRPr lang="en-US" sz="1800" dirty="0"/>
+              <a:t>주 신호(Q)로 30개 보조 벡터(K·V)를 softmax 가중 평균</a:t>
+            </a:r>
+            <a:endParaRPr lang="en-US" sz="1700" dirty="0"/>
           </a:p>
           <a:p>
             <a:pPr marL="228600" indent="-228600">
@@ -2308,12 +2308,12 @@
               <a:buChar char="•"/>
             </a:pPr>
             <a:r>
-              <a:rPr lang="en-US" sz="1800" b="1" dirty="0">
+              <a:rPr lang="en-US" sz="1700" b="1" dirty="0">
                 <a:solidFill>
                   <a:schemeClr val="accent1"/>
                 </a:solidFill>
               </a:rPr>
-              <a:t>④ 게이트 잔차 결합  </a:t>
+              <a:t>④ 게이트 기반 잔차 결합  </a:t>
             </a:r>
             <a:pPr indent="0" marL="0">
               <a:lnSpc>
@@ -2325,14 +2325,14 @@
               <a:buNone/>
             </a:pPr>
             <a:r>
-              <a:rPr lang="en-US" sz="1800" dirty="0">
+              <a:rPr lang="en-US" sz="1700" dirty="0">
                 <a:solidFill>
                   <a:schemeClr val="tx1"/>
                 </a:solidFill>
               </a:rPr>
-              <a:t>h = p + σ(W[p; c]) ⊙ c → MLP로 등락률 예측</a:t>
-            </a:r>
-            <a:endParaRPr lang="en-US" sz="1800" dirty="0"/>
+              <a:t>h = p + σ(W[p; c]) ⊙ c, 보조 정보 반영 정도를 학습</a:t>
+            </a:r>
+            <a:endParaRPr lang="en-US" sz="1700" dirty="0"/>
           </a:p>
           <a:p>
             <a:pPr marL="228600" indent="-228600">
@@ -2343,12 +2343,12 @@
               <a:buChar char="•"/>
             </a:pPr>
             <a:r>
-              <a:rPr lang="en-US" sz="1800" b="1" dirty="0">
+              <a:rPr lang="en-US" sz="1700" b="1" dirty="0">
                 <a:solidFill>
                   <a:schemeClr val="accent1"/>
                 </a:solidFill>
               </a:rPr>
-              <a:t>⑤ 확장·앙상블  </a:t>
+              <a:t>⑤ 등락률 예측  </a:t>
             </a:r>
             <a:pPr indent="0" marL="0">
               <a:lnSpc>
@@ -2360,14 +2360,49 @@
               <a:buNone/>
             </a:pPr>
             <a:r>
-              <a:rPr lang="en-US" sz="1800" dirty="0">
+              <a:rPr lang="en-US" sz="1700" dirty="0">
                 <a:solidFill>
                   <a:schemeClr val="tx1"/>
                 </a:solidFill>
               </a:rPr>
-              <a:t>이벤트 27종·발행 시점 입력, 순위 손실, 12개 모델 앙상블</a:t>
-            </a:r>
-            <a:endParaRPr lang="en-US" sz="1800" dirty="0"/>
+              <a:t>MLP 512 → 256 → 64 → 1</a:t>
+            </a:r>
+            <a:endParaRPr lang="en-US" sz="1700" dirty="0"/>
+          </a:p>
+          <a:p>
+            <a:pPr marL="228600" indent="-228600">
+              <a:lnSpc>
+                <a:spcPct val="105000"/>
+              </a:lnSpc>
+              <a:buSzPct val="100000"/>
+              <a:buChar char="•"/>
+            </a:pPr>
+            <a:r>
+              <a:rPr lang="en-US" sz="1700" b="1" dirty="0">
+                <a:solidFill>
+                  <a:schemeClr val="accent1"/>
+                </a:solidFill>
+              </a:rPr>
+              <a:t>⑥ 확장·앙상블  </a:t>
+            </a:r>
+            <a:pPr indent="0" marL="0">
+              <a:lnSpc>
+                <a:spcPct val="105000"/>
+              </a:lnSpc>
+              <a:spcAft>
+                <a:spcPts val="400"/>
+              </a:spcAft>
+              <a:buNone/>
+            </a:pPr>
+            <a:r>
+              <a:rPr lang="en-US" sz="1700" dirty="0">
+                <a:solidFill>
+                  <a:schemeClr val="tx1"/>
+                </a:solidFill>
+              </a:rPr>
+              <a:t>이벤트 27종·순위 손실 추가, 12개 모델 검증 가중 앙상블</a:t>
+            </a:r>
+            <a:endParaRPr lang="en-US" sz="1700" dirty="0"/>
           </a:p>
         </p:txBody>
       </p:sp>
@@ -2379,12 +2414,12 @@
         </p:nvSpPr>
         <p:spPr>
           <a:xfrm>
-            <a:off x="548640" y="7589520"/>
-            <a:ext cx="14022324" cy="4937760"/>
+            <a:off x="7742682" y="2926080"/>
+            <a:ext cx="6828282" cy="9692640"/>
           </a:xfrm>
           <a:prstGeom prst="roundRect">
             <a:avLst>
-              <a:gd name="adj" fmla="val 3333"/>
+              <a:gd name="adj" fmla="val 2410"/>
             </a:avLst>
           </a:prstGeom>
           <a:solidFill>
@@ -2406,7 +2441,7 @@
         </p:nvSpPr>
         <p:spPr>
           <a:xfrm>
-            <a:off x="868680" y="7863840"/>
+            <a:off x="8062722" y="3200400"/>
             <a:ext cx="621792" cy="621792"/>
           </a:xfrm>
           <a:prstGeom prst="ellipse">
@@ -2431,7 +2466,7 @@
         </p:nvSpPr>
         <p:spPr>
           <a:xfrm>
-            <a:off x="868680" y="7863840"/>
+            <a:off x="8062722" y="3200400"/>
             <a:ext cx="621792" cy="621792"/>
           </a:xfrm>
           <a:prstGeom prst="rect">
@@ -2467,8 +2502,8 @@
         </p:nvSpPr>
         <p:spPr>
           <a:xfrm>
-            <a:off x="1645920" y="7863840"/>
-            <a:ext cx="12650724" cy="621792"/>
+            <a:off x="8839962" y="3200400"/>
+            <a:ext cx="5456682" cy="621792"/>
           </a:xfrm>
           <a:prstGeom prst="rect">
             <a:avLst/>
@@ -2489,7 +2524,7 @@
                   <a:schemeClr val="accent1"/>
                 </a:solidFill>
               </a:rPr>
-              <a:t>구조 (논문 모델 + 확장 · 앙상블)</a:t>
+              <a:t>구조 (논문 모델 + 앙상블)</a:t>
             </a:r>
             <a:endParaRPr lang="en-US" sz="3200" dirty="0"/>
           </a:p>
@@ -2497,41 +2532,68 @@
       </p:sp>
       <p:sp>
         <p:nvSpPr>
-          <p:cNvPr id="19" name="node-18"/>
+          <p:cNvPr id="19" name="group-18"/>
           <p:cNvSpPr/>
           <p:nvPr/>
         </p:nvSpPr>
         <p:spPr>
           <a:xfrm>
-            <a:off x="960120" y="8778240"/>
-            <a:ext cx="1600200" cy="960120"/>
+            <a:off x="8291345" y="4624251"/>
+            <a:ext cx="3353219" cy="2442754"/>
           </a:xfrm>
           <a:prstGeom prst="roundRect">
             <a:avLst>
-              <a:gd name="adj" fmla="val 9524"/>
+              <a:gd name="adj" fmla="val 2995"/>
             </a:avLst>
           </a:prstGeom>
           <a:solidFill>
-            <a:srgbClr val="DCE8F6"/>
+            <a:srgbClr val="EAF1FA"/>
           </a:solidFill>
-          <a:ln w="15875">
-            <a:solidFill>
-              <a:srgbClr val="DCE8F6"/>
-            </a:solidFill>
-            <a:prstDash val="solid"/>
-          </a:ln>
-        </p:spPr>
-      </p:sp>
-      <p:sp>
-        <p:nvSpPr>
-          <p:cNvPr id="20" name="text-19"/>
+          <a:ln w="19050">
+            <a:solidFill>
+              <a:srgbClr val="14233F"/>
+            </a:solidFill>
+            <a:prstDash val="solid"/>
+          </a:ln>
+        </p:spPr>
+      </p:sp>
+      <p:sp>
+        <p:nvSpPr>
+          <p:cNvPr id="20" name="group-19"/>
+          <p:cNvSpPr/>
+          <p:nvPr/>
+        </p:nvSpPr>
+        <p:spPr>
+          <a:xfrm>
+            <a:off x="12010370" y="5512526"/>
+            <a:ext cx="2011931" cy="1554480"/>
+          </a:xfrm>
+          <a:prstGeom prst="roundRect">
+            <a:avLst>
+              <a:gd name="adj" fmla="val 4706"/>
+            </a:avLst>
+          </a:prstGeom>
+          <a:solidFill>
+            <a:srgbClr val="E8F3EA"/>
+          </a:solidFill>
+          <a:ln w="19050">
+            <a:solidFill>
+              <a:srgbClr val="2E8B57"/>
+            </a:solidFill>
+            <a:prstDash val="solid"/>
+          </a:ln>
+        </p:spPr>
+      </p:sp>
+      <p:sp>
+        <p:nvSpPr>
+          <p:cNvPr id="21" name="text-20"/>
           <p:cNvSpPr txBox="1"/>
           <p:nvPr/>
         </p:nvSpPr>
         <p:spPr>
           <a:xfrm>
-            <a:off x="1033272" y="8778240"/>
-            <a:ext cx="1453896" cy="960120"/>
+            <a:off x="8291345" y="4661263"/>
+            <a:ext cx="3353219" cy="333103"/>
           </a:xfrm>
           <a:prstGeom prst="rect">
             <a:avLst/>
@@ -2544,66 +2606,19 @@
           <a:lstStyle/>
           <a:p>
             <a:pPr algn="ctr" indent="0" marL="0">
-              <a:lnSpc>
-                <a:spcPct val="95000"/>
-              </a:lnSpc>
-              <a:buNone/>
-            </a:pPr>
-            <a:r>
-              <a:rPr lang="en-US" sz="1700" dirty="0">
-                <a:solidFill>
-                  <a:schemeClr val="tx1"/>
-                </a:solidFill>
-              </a:rPr>
-              <a:t>뉴스 본문</a:t>
-            </a:r>
-            <a:endParaRPr lang="en-US" sz="1700" dirty="0"/>
-          </a:p>
-          <a:p>
-            <a:pPr algn="ctr" indent="0" marL="0">
-              <a:lnSpc>
-                <a:spcPct val="95000"/>
-              </a:lnSpc>
-              <a:buNone/>
-            </a:pPr>
-            <a:r>
-              <a:rPr lang="en-US" sz="1700" dirty="0">
-                <a:solidFill>
-                  <a:schemeClr val="tx1"/>
-                </a:solidFill>
-              </a:rPr>
-              <a:t>(발행 시각)</a:t>
-            </a:r>
-            <a:endParaRPr lang="en-US" sz="1700" dirty="0"/>
+              <a:buNone/>
+            </a:pPr>
+            <a:r>
+              <a:rPr lang="en-US" sz="1600" b="1" dirty="0">
+                <a:solidFill>
+                  <a:schemeClr val="accent1"/>
+                </a:solidFill>
+              </a:rPr>
+              <a:t>1. LLM 기반 주 신호 생성</a:t>
+            </a:r>
+            <a:endParaRPr lang="en-US" sz="1600" dirty="0"/>
           </a:p>
         </p:txBody>
-      </p:sp>
-      <p:sp>
-        <p:nvSpPr>
-          <p:cNvPr id="21" name="node-20"/>
-          <p:cNvSpPr/>
-          <p:nvPr/>
-        </p:nvSpPr>
-        <p:spPr>
-          <a:xfrm>
-            <a:off x="2862072" y="8778240"/>
-            <a:ext cx="1965960" cy="960120"/>
-          </a:xfrm>
-          <a:prstGeom prst="roundRect">
-            <a:avLst>
-              <a:gd name="adj" fmla="val 9524"/>
-            </a:avLst>
-          </a:prstGeom>
-          <a:solidFill>
-            <a:srgbClr val="DCE8F6"/>
-          </a:solidFill>
-          <a:ln w="15875">
-            <a:solidFill>
-              <a:srgbClr val="DCE8F6"/>
-            </a:solidFill>
-            <a:prstDash val="solid"/>
-          </a:ln>
-        </p:spPr>
       </p:sp>
       <p:sp>
         <p:nvSpPr>
@@ -2613,8 +2628,8 @@
         </p:nvSpPr>
         <p:spPr>
           <a:xfrm>
-            <a:off x="2935224" y="8778240"/>
-            <a:ext cx="1819656" cy="960120"/>
+            <a:off x="12010370" y="5549537"/>
+            <a:ext cx="2011931" cy="518160"/>
           </a:xfrm>
           <a:prstGeom prst="rect">
             <a:avLst/>
@@ -2633,14 +2648,14 @@
               <a:buNone/>
             </a:pPr>
             <a:r>
-              <a:rPr lang="en-US" sz="1700" dirty="0">
-                <a:solidFill>
-                  <a:schemeClr val="tx1"/>
-                </a:solidFill>
-              </a:rPr>
-              <a:t>GPT-4o-mini</a:t>
-            </a:r>
-            <a:endParaRPr lang="en-US" sz="1700" dirty="0"/>
+              <a:rPr lang="en-US" sz="1600" b="1" dirty="0">
+                <a:solidFill>
+                  <a:schemeClr val="accent1"/>
+                </a:solidFill>
+              </a:rPr>
+              <a:t>2. TCN 기반</a:t>
+            </a:r>
+            <a:endParaRPr lang="en-US" sz="1600" dirty="0"/>
           </a:p>
           <a:p>
             <a:pPr algn="ctr" indent="0" marL="0">
@@ -2650,14 +2665,14 @@
               <a:buNone/>
             </a:pPr>
             <a:r>
-              <a:rPr lang="en-US" sz="1700" dirty="0">
-                <a:solidFill>
-                  <a:schemeClr val="tx1"/>
-                </a:solidFill>
-              </a:rPr>
-              <a:t>요약·감성·이벤트</a:t>
-            </a:r>
-            <a:endParaRPr lang="en-US" sz="1700" dirty="0"/>
+              <a:rPr lang="en-US" sz="1600" b="1" dirty="0">
+                <a:solidFill>
+                  <a:schemeClr val="accent1"/>
+                </a:solidFill>
+              </a:rPr>
+              <a:t>보조 벡터 생성</a:t>
+            </a:r>
+            <a:endParaRPr lang="en-US" sz="1600" dirty="0"/>
           </a:p>
         </p:txBody>
       </p:sp>
@@ -2669,16 +2684,16 @@
         </p:nvSpPr>
         <p:spPr>
           <a:xfrm>
-            <a:off x="5129784" y="8778240"/>
-            <a:ext cx="1965960" cy="960120"/>
+            <a:off x="9083924" y="4069080"/>
+            <a:ext cx="1950964" cy="407126"/>
           </a:xfrm>
           <a:prstGeom prst="roundRect">
             <a:avLst>
-              <a:gd name="adj" fmla="val 9524"/>
+              <a:gd name="adj" fmla="val 22460"/>
             </a:avLst>
           </a:prstGeom>
           <a:solidFill>
-            <a:srgbClr val="DCE8F6"/>
+            <a:srgbClr val="FFFFFF"/>
           </a:solidFill>
           <a:ln w="15875">
             <a:solidFill>
@@ -2696,8 +2711,8 @@
         </p:nvSpPr>
         <p:spPr>
           <a:xfrm>
-            <a:off x="5202936" y="8778240"/>
-            <a:ext cx="1819656" cy="960120"/>
+            <a:off x="9157076" y="4069080"/>
+            <a:ext cx="1804660" cy="407126"/>
           </a:xfrm>
           <a:prstGeom prst="rect">
             <a:avLst/>
@@ -2716,71 +2731,78 @@
               <a:buNone/>
             </a:pPr>
             <a:r>
-              <a:rPr lang="en-US" sz="1700" b="1" dirty="0">
+              <a:rPr lang="en-US" sz="1550" dirty="0">
                 <a:solidFill>
                   <a:schemeClr val="tx1"/>
                 </a:solidFill>
               </a:rPr>
-              <a:t>주 신호 512</a:t>
-            </a:r>
-            <a:endParaRPr lang="en-US" sz="1700" dirty="0"/>
-          </a:p>
-          <a:p>
-            <a:pPr algn="ctr" indent="0" marL="0">
-              <a:lnSpc>
-                <a:spcPct val="95000"/>
-              </a:lnSpc>
-              <a:buNone/>
-            </a:pPr>
-            <a:r>
-              <a:rPr lang="en-US" sz="1700" b="1" dirty="0">
-                <a:solidFill>
-                  <a:schemeClr val="tx1"/>
-                </a:solidFill>
-              </a:rPr>
-              <a:t>임베딩·감성·이벤트</a:t>
-            </a:r>
-            <a:endParaRPr lang="en-US" sz="1700" dirty="0"/>
+              <a:t>이벤트 발생 (뉴스)</a:t>
+            </a:r>
+            <a:endParaRPr lang="en-US" sz="1550" dirty="0"/>
           </a:p>
         </p:txBody>
       </p:sp>
       <p:sp>
         <p:nvSpPr>
-          <p:cNvPr id="25" name="node-24"/>
+          <p:cNvPr id="25" name="arrow-24"/>
           <p:cNvSpPr/>
           <p:nvPr/>
         </p:nvSpPr>
         <p:spPr>
           <a:xfrm>
-            <a:off x="960120" y="10424160"/>
-            <a:ext cx="1600200" cy="960120"/>
+            <a:off x="10059406" y="4476206"/>
+            <a:ext cx="0" cy="148046"/>
+          </a:xfrm>
+          <a:prstGeom prst="line">
+            <a:avLst/>
+          </a:prstGeom>
+          <a:noFill/>
+          <a:ln w="22225">
+            <a:solidFill>
+              <a:srgbClr val="14233F"/>
+            </a:solidFill>
+            <a:prstDash val="solid"/>
+            <a:tailEnd type="triangle"/>
+          </a:ln>
+        </p:spPr>
+      </p:sp>
+      <p:sp>
+        <p:nvSpPr>
+          <p:cNvPr id="26" name="node-25"/>
+          <p:cNvSpPr/>
+          <p:nvPr/>
+        </p:nvSpPr>
+        <p:spPr>
+          <a:xfrm>
+            <a:off x="9388762" y="5031377"/>
+            <a:ext cx="1219352" cy="370114"/>
           </a:xfrm>
           <a:prstGeom prst="roundRect">
             <a:avLst>
-              <a:gd name="adj" fmla="val 9524"/>
+              <a:gd name="adj" fmla="val 24706"/>
             </a:avLst>
           </a:prstGeom>
           <a:solidFill>
-            <a:srgbClr val="E1F0E3"/>
+            <a:srgbClr val="FFFFFF"/>
           </a:solidFill>
           <a:ln w="15875">
             <a:solidFill>
-              <a:srgbClr val="E1F0E3"/>
-            </a:solidFill>
-            <a:prstDash val="solid"/>
-          </a:ln>
-        </p:spPr>
-      </p:sp>
-      <p:sp>
-        <p:nvSpPr>
-          <p:cNvPr id="26" name="text-25"/>
+              <a:srgbClr val="8A94A6"/>
+            </a:solidFill>
+            <a:prstDash val="solid"/>
+          </a:ln>
+        </p:spPr>
+      </p:sp>
+      <p:sp>
+        <p:nvSpPr>
+          <p:cNvPr id="27" name="text-26"/>
           <p:cNvSpPr txBox="1"/>
           <p:nvPr/>
         </p:nvSpPr>
         <p:spPr>
           <a:xfrm>
-            <a:off x="1033272" y="10424160"/>
-            <a:ext cx="1453896" cy="960120"/>
+            <a:off x="9461914" y="5031377"/>
+            <a:ext cx="1073048" cy="370114"/>
           </a:xfrm>
           <a:prstGeom prst="rect">
             <a:avLst/>
@@ -2799,71 +2821,148 @@
               <a:buNone/>
             </a:pPr>
             <a:r>
-              <a:rPr lang="en-US" sz="1700" dirty="0">
+              <a:rPr lang="en-US" sz="1550" dirty="0">
                 <a:solidFill>
                   <a:schemeClr val="tx1"/>
                 </a:solidFill>
               </a:rPr>
-              <a:t>기술적 지표</a:t>
-            </a:r>
-            <a:endParaRPr lang="en-US" sz="1700" dirty="0"/>
-          </a:p>
-          <a:p>
-            <a:pPr algn="ctr" indent="0" marL="0">
-              <a:lnSpc>
-                <a:spcPct val="95000"/>
-              </a:lnSpc>
-              <a:buNone/>
-            </a:pPr>
-            <a:r>
-              <a:rPr lang="en-US" sz="1700" dirty="0">
-                <a:solidFill>
-                  <a:schemeClr val="tx1"/>
-                </a:solidFill>
-              </a:rPr>
-              <a:t>9종 × 30일</a:t>
-            </a:r>
-            <a:endParaRPr lang="en-US" sz="1700" dirty="0"/>
+              <a:t>LLM</a:t>
+            </a:r>
+            <a:endParaRPr lang="en-US" sz="1550" dirty="0"/>
           </a:p>
         </p:txBody>
       </p:sp>
       <p:sp>
         <p:nvSpPr>
-          <p:cNvPr id="27" name="node-26"/>
+          <p:cNvPr id="28" name="arrow-27"/>
           <p:cNvSpPr/>
           <p:nvPr/>
         </p:nvSpPr>
         <p:spPr>
           <a:xfrm>
-            <a:off x="2862072" y="10424160"/>
-            <a:ext cx="1965960" cy="960120"/>
+            <a:off x="9998438" y="5401491"/>
+            <a:ext cx="0" cy="125839"/>
+          </a:xfrm>
+          <a:prstGeom prst="line">
+            <a:avLst/>
+          </a:prstGeom>
+          <a:noFill/>
+          <a:ln w="22225">
+            <a:solidFill>
+              <a:srgbClr val="14233F"/>
+            </a:solidFill>
+            <a:prstDash val="solid"/>
+          </a:ln>
+        </p:spPr>
+      </p:sp>
+      <p:sp>
+        <p:nvSpPr>
+          <p:cNvPr id="29" name="arrow-28"/>
+          <p:cNvSpPr/>
+          <p:nvPr/>
+        </p:nvSpPr>
+        <p:spPr>
+          <a:xfrm>
+            <a:off x="9266827" y="5527330"/>
+            <a:ext cx="1432739" cy="0"/>
+          </a:xfrm>
+          <a:prstGeom prst="line">
+            <a:avLst/>
+          </a:prstGeom>
+          <a:noFill/>
+          <a:ln w="22225">
+            <a:solidFill>
+              <a:srgbClr val="14233F"/>
+            </a:solidFill>
+            <a:prstDash val="solid"/>
+          </a:ln>
+        </p:spPr>
+      </p:sp>
+      <p:sp>
+        <p:nvSpPr>
+          <p:cNvPr id="30" name="arrow-29"/>
+          <p:cNvSpPr/>
+          <p:nvPr/>
+        </p:nvSpPr>
+        <p:spPr>
+          <a:xfrm>
+            <a:off x="9266827" y="5527330"/>
+            <a:ext cx="0" cy="133241"/>
+          </a:xfrm>
+          <a:prstGeom prst="line">
+            <a:avLst/>
+          </a:prstGeom>
+          <a:noFill/>
+          <a:ln w="22225">
+            <a:solidFill>
+              <a:srgbClr val="14233F"/>
+            </a:solidFill>
+            <a:prstDash val="solid"/>
+            <a:tailEnd type="triangle"/>
+          </a:ln>
+        </p:spPr>
+      </p:sp>
+      <p:sp>
+        <p:nvSpPr>
+          <p:cNvPr id="31" name="arrow-30"/>
+          <p:cNvSpPr/>
+          <p:nvPr/>
+        </p:nvSpPr>
+        <p:spPr>
+          <a:xfrm>
+            <a:off x="10699566" y="5527330"/>
+            <a:ext cx="0" cy="133241"/>
+          </a:xfrm>
+          <a:prstGeom prst="line">
+            <a:avLst/>
+          </a:prstGeom>
+          <a:noFill/>
+          <a:ln w="22225">
+            <a:solidFill>
+              <a:srgbClr val="14233F"/>
+            </a:solidFill>
+            <a:prstDash val="solid"/>
+            <a:tailEnd type="triangle"/>
+          </a:ln>
+        </p:spPr>
+      </p:sp>
+      <p:sp>
+        <p:nvSpPr>
+          <p:cNvPr id="32" name="node-31"/>
+          <p:cNvSpPr/>
+          <p:nvPr/>
+        </p:nvSpPr>
+        <p:spPr>
+          <a:xfrm>
+            <a:off x="8596183" y="5660571"/>
+            <a:ext cx="1341288" cy="370114"/>
           </a:xfrm>
           <a:prstGeom prst="roundRect">
             <a:avLst>
-              <a:gd name="adj" fmla="val 9524"/>
+              <a:gd name="adj" fmla="val 24706"/>
             </a:avLst>
           </a:prstGeom>
           <a:solidFill>
-            <a:srgbClr val="E1F0E3"/>
+            <a:srgbClr val="FFFFFF"/>
           </a:solidFill>
           <a:ln w="15875">
             <a:solidFill>
-              <a:srgbClr val="E1F0E3"/>
-            </a:solidFill>
-            <a:prstDash val="solid"/>
-          </a:ln>
-        </p:spPr>
-      </p:sp>
-      <p:sp>
-        <p:nvSpPr>
-          <p:cNvPr id="28" name="text-27"/>
+              <a:srgbClr val="8A94A6"/>
+            </a:solidFill>
+            <a:prstDash val="solid"/>
+          </a:ln>
+        </p:spPr>
+      </p:sp>
+      <p:sp>
+        <p:nvSpPr>
+          <p:cNvPr id="33" name="text-32"/>
           <p:cNvSpPr txBox="1"/>
           <p:nvPr/>
         </p:nvSpPr>
         <p:spPr>
           <a:xfrm>
-            <a:off x="2935224" y="10424160"/>
-            <a:ext cx="1819656" cy="960120"/>
+            <a:off x="8669335" y="5660571"/>
+            <a:ext cx="1194984" cy="370114"/>
           </a:xfrm>
           <a:prstGeom prst="rect">
             <a:avLst/>
@@ -2882,71 +2981,54 @@
               <a:buNone/>
             </a:pPr>
             <a:r>
-              <a:rPr lang="en-US" sz="1700" dirty="0">
+              <a:rPr lang="en-US" sz="1550" dirty="0">
                 <a:solidFill>
                   <a:schemeClr val="tx1"/>
                 </a:solidFill>
               </a:rPr>
-              <a:t>TCN</a:t>
-            </a:r>
-            <a:endParaRPr lang="en-US" sz="1700" dirty="0"/>
-          </a:p>
-          <a:p>
-            <a:pPr algn="ctr" indent="0" marL="0">
-              <a:lnSpc>
-                <a:spcPct val="95000"/>
-              </a:lnSpc>
-              <a:buNone/>
-            </a:pPr>
-            <a:r>
-              <a:rPr lang="en-US" sz="1700" dirty="0">
-                <a:solidFill>
-                  <a:schemeClr val="tx1"/>
-                </a:solidFill>
-              </a:rPr>
-              <a:t>(인과적 합성곱)</a:t>
-            </a:r>
-            <a:endParaRPr lang="en-US" sz="1700" dirty="0"/>
+              <a:t>뉴스 요약</a:t>
+            </a:r>
+            <a:endParaRPr lang="en-US" sz="1550" dirty="0"/>
           </a:p>
         </p:txBody>
       </p:sp>
       <p:sp>
         <p:nvSpPr>
-          <p:cNvPr id="29" name="node-28"/>
+          <p:cNvPr id="34" name="node-33"/>
           <p:cNvSpPr/>
           <p:nvPr/>
         </p:nvSpPr>
         <p:spPr>
           <a:xfrm>
-            <a:off x="5129784" y="10424160"/>
-            <a:ext cx="1965960" cy="960120"/>
+            <a:off x="10059406" y="5660571"/>
+            <a:ext cx="1280320" cy="370114"/>
           </a:xfrm>
           <a:prstGeom prst="roundRect">
             <a:avLst>
-              <a:gd name="adj" fmla="val 9524"/>
+              <a:gd name="adj" fmla="val 24706"/>
             </a:avLst>
           </a:prstGeom>
           <a:solidFill>
-            <a:srgbClr val="E1F0E3"/>
+            <a:srgbClr val="FFFFFF"/>
           </a:solidFill>
           <a:ln w="15875">
             <a:solidFill>
-              <a:srgbClr val="2E8B57"/>
-            </a:solidFill>
-            <a:prstDash val="solid"/>
-          </a:ln>
-        </p:spPr>
-      </p:sp>
-      <p:sp>
-        <p:nvSpPr>
-          <p:cNvPr id="30" name="text-29"/>
+              <a:srgbClr val="8A94A6"/>
+            </a:solidFill>
+            <a:prstDash val="solid"/>
+          </a:ln>
+        </p:spPr>
+      </p:sp>
+      <p:sp>
+        <p:nvSpPr>
+          <p:cNvPr id="35" name="text-34"/>
           <p:cNvSpPr txBox="1"/>
           <p:nvPr/>
         </p:nvSpPr>
         <p:spPr>
           <a:xfrm>
-            <a:off x="5202936" y="10424160"/>
-            <a:ext cx="1819656" cy="960120"/>
+            <a:off x="10132558" y="5660571"/>
+            <a:ext cx="1134016" cy="370114"/>
           </a:xfrm>
           <a:prstGeom prst="rect">
             <a:avLst/>
@@ -2965,48 +3047,681 @@
               <a:buNone/>
             </a:pPr>
             <a:r>
-              <a:rPr lang="en-US" sz="1700" b="1" dirty="0">
+              <a:rPr lang="en-US" sz="1550" dirty="0">
                 <a:solidFill>
                   <a:schemeClr val="tx1"/>
                 </a:solidFill>
               </a:rPr>
-              <a:t>보조 신호</a:t>
-            </a:r>
-            <a:endParaRPr lang="en-US" sz="1700" dirty="0"/>
-          </a:p>
-          <a:p>
-            <a:pPr algn="ctr" indent="0" marL="0">
-              <a:lnSpc>
-                <a:spcPct val="95000"/>
-              </a:lnSpc>
-              <a:buNone/>
-            </a:pPr>
-            <a:r>
-              <a:rPr lang="en-US" sz="1700" b="1" dirty="0">
-                <a:solidFill>
-                  <a:schemeClr val="tx1"/>
-                </a:solidFill>
-              </a:rPr>
-              <a:t>30 × 512</a:t>
-            </a:r>
-            <a:endParaRPr lang="en-US" sz="1700" dirty="0"/>
+              <a:t>감성 점수</a:t>
+            </a:r>
+            <a:endParaRPr lang="en-US" sz="1550" dirty="0"/>
           </a:p>
         </p:txBody>
       </p:sp>
       <p:sp>
         <p:nvSpPr>
-          <p:cNvPr id="31" name="node-30"/>
+          <p:cNvPr id="36" name="arrow-35"/>
           <p:cNvSpPr/>
           <p:nvPr/>
         </p:nvSpPr>
         <p:spPr>
           <a:xfrm>
-            <a:off x="7397496" y="9509760"/>
-            <a:ext cx="1920240" cy="1143000"/>
+            <a:off x="9266827" y="6030686"/>
+            <a:ext cx="0" cy="185057"/>
+          </a:xfrm>
+          <a:prstGeom prst="line">
+            <a:avLst/>
+          </a:prstGeom>
+          <a:noFill/>
+          <a:ln w="22225">
+            <a:solidFill>
+              <a:srgbClr val="14233F"/>
+            </a:solidFill>
+            <a:prstDash val="solid"/>
+            <a:tailEnd type="triangle"/>
+          </a:ln>
+        </p:spPr>
+      </p:sp>
+      <p:sp>
+        <p:nvSpPr>
+          <p:cNvPr id="37" name="node-36"/>
+          <p:cNvSpPr/>
+          <p:nvPr/>
+        </p:nvSpPr>
+        <p:spPr>
+          <a:xfrm>
+            <a:off x="8596183" y="6215743"/>
+            <a:ext cx="1341288" cy="296091"/>
           </a:xfrm>
           <a:prstGeom prst="roundRect">
             <a:avLst>
-              <a:gd name="adj" fmla="val 8000"/>
+              <a:gd name="adj" fmla="val 30882"/>
+            </a:avLst>
+          </a:prstGeom>
+          <a:solidFill>
+            <a:srgbClr val="FFFFFF"/>
+          </a:solidFill>
+          <a:ln w="15875">
+            <a:solidFill>
+              <a:srgbClr val="8A94A6"/>
+            </a:solidFill>
+            <a:prstDash val="solid"/>
+          </a:ln>
+        </p:spPr>
+      </p:sp>
+      <p:sp>
+        <p:nvSpPr>
+          <p:cNvPr id="38" name="text-37"/>
+          <p:cNvSpPr txBox="1"/>
+          <p:nvPr/>
+        </p:nvSpPr>
+        <p:spPr>
+          <a:xfrm>
+            <a:off x="8669335" y="6215743"/>
+            <a:ext cx="1194984" cy="296091"/>
+          </a:xfrm>
+          <a:prstGeom prst="rect">
+            <a:avLst/>
+          </a:prstGeom>
+          <a:noFill/>
+          <a:ln/>
+        </p:spPr>
+        <p:txBody>
+          <a:bodyPr wrap="square" lIns="0" tIns="0" rIns="0" bIns="0" rtlCol="0" anchor="ctr"/>
+          <a:lstStyle/>
+          <a:p>
+            <a:pPr algn="ctr" indent="0" marL="0">
+              <a:lnSpc>
+                <a:spcPct val="95000"/>
+              </a:lnSpc>
+              <a:buNone/>
+            </a:pPr>
+            <a:r>
+              <a:rPr lang="en-US" sz="1550" dirty="0">
+                <a:solidFill>
+                  <a:schemeClr val="tx1"/>
+                </a:solidFill>
+              </a:rPr>
+              <a:t>임베딩 생성</a:t>
+            </a:r>
+            <a:endParaRPr lang="en-US" sz="1550" dirty="0"/>
+          </a:p>
+        </p:txBody>
+      </p:sp>
+      <p:sp>
+        <p:nvSpPr>
+          <p:cNvPr id="39" name="arrow-38"/>
+          <p:cNvSpPr/>
+          <p:nvPr/>
+        </p:nvSpPr>
+        <p:spPr>
+          <a:xfrm>
+            <a:off x="9266827" y="6511834"/>
+            <a:ext cx="0" cy="148046"/>
+          </a:xfrm>
+          <a:prstGeom prst="line">
+            <a:avLst/>
+          </a:prstGeom>
+          <a:noFill/>
+          <a:ln w="22225">
+            <a:solidFill>
+              <a:srgbClr val="14233F"/>
+            </a:solidFill>
+            <a:prstDash val="solid"/>
+            <a:tailEnd type="triangle"/>
+          </a:ln>
+        </p:spPr>
+      </p:sp>
+      <p:sp>
+        <p:nvSpPr>
+          <p:cNvPr id="40" name="arrow-39"/>
+          <p:cNvSpPr/>
+          <p:nvPr/>
+        </p:nvSpPr>
+        <p:spPr>
+          <a:xfrm>
+            <a:off x="10699566" y="6030686"/>
+            <a:ext cx="0" cy="629194"/>
+          </a:xfrm>
+          <a:prstGeom prst="line">
+            <a:avLst/>
+          </a:prstGeom>
+          <a:noFill/>
+          <a:ln w="22225">
+            <a:solidFill>
+              <a:srgbClr val="14233F"/>
+            </a:solidFill>
+            <a:prstDash val="solid"/>
+            <a:tailEnd type="triangle"/>
+          </a:ln>
+        </p:spPr>
+      </p:sp>
+      <p:sp>
+        <p:nvSpPr>
+          <p:cNvPr id="41" name="node-40"/>
+          <p:cNvSpPr/>
+          <p:nvPr/>
+        </p:nvSpPr>
+        <p:spPr>
+          <a:xfrm>
+            <a:off x="8474248" y="6659880"/>
+            <a:ext cx="2987413" cy="296091"/>
+          </a:xfrm>
+          <a:prstGeom prst="roundRect">
+            <a:avLst>
+              <a:gd name="adj" fmla="val 30882"/>
+            </a:avLst>
+          </a:prstGeom>
+          <a:solidFill>
+            <a:srgbClr val="FFFFFF"/>
+          </a:solidFill>
+          <a:ln w="15875">
+            <a:solidFill>
+              <a:srgbClr val="8A94A6"/>
+            </a:solidFill>
+            <a:prstDash val="solid"/>
+          </a:ln>
+        </p:spPr>
+      </p:sp>
+      <p:sp>
+        <p:nvSpPr>
+          <p:cNvPr id="42" name="text-41"/>
+          <p:cNvSpPr txBox="1"/>
+          <p:nvPr/>
+        </p:nvSpPr>
+        <p:spPr>
+          <a:xfrm>
+            <a:off x="8547400" y="6659880"/>
+            <a:ext cx="2841109" cy="296091"/>
+          </a:xfrm>
+          <a:prstGeom prst="rect">
+            <a:avLst/>
+          </a:prstGeom>
+          <a:noFill/>
+          <a:ln/>
+        </p:spPr>
+        <p:txBody>
+          <a:bodyPr wrap="square" lIns="0" tIns="0" rIns="0" bIns="0" rtlCol="0" anchor="ctr"/>
+          <a:lstStyle/>
+          <a:p>
+            <a:pPr algn="ctr" indent="0" marL="0">
+              <a:lnSpc>
+                <a:spcPct val="95000"/>
+              </a:lnSpc>
+              <a:buNone/>
+            </a:pPr>
+            <a:r>
+              <a:rPr lang="en-US" sz="1550" dirty="0">
+                <a:solidFill>
+                  <a:schemeClr val="tx1"/>
+                </a:solidFill>
+              </a:rPr>
+              <a:t>완전 연결층</a:t>
+            </a:r>
+            <a:endParaRPr lang="en-US" sz="1550" dirty="0"/>
+          </a:p>
+        </p:txBody>
+      </p:sp>
+      <p:sp>
+        <p:nvSpPr>
+          <p:cNvPr id="43" name="node-42"/>
+          <p:cNvSpPr/>
+          <p:nvPr/>
+        </p:nvSpPr>
+        <p:spPr>
+          <a:xfrm>
+            <a:off x="12254240" y="6104709"/>
+            <a:ext cx="1524191" cy="296091"/>
+          </a:xfrm>
+          <a:prstGeom prst="roundRect">
+            <a:avLst>
+              <a:gd name="adj" fmla="val 30882"/>
+            </a:avLst>
+          </a:prstGeom>
+          <a:solidFill>
+            <a:srgbClr val="FFFFFF"/>
+          </a:solidFill>
+          <a:ln w="15875">
+            <a:solidFill>
+              <a:srgbClr val="8A94A6"/>
+            </a:solidFill>
+            <a:prstDash val="solid"/>
+          </a:ln>
+        </p:spPr>
+      </p:sp>
+      <p:sp>
+        <p:nvSpPr>
+          <p:cNvPr id="44" name="text-43"/>
+          <p:cNvSpPr txBox="1"/>
+          <p:nvPr/>
+        </p:nvSpPr>
+        <p:spPr>
+          <a:xfrm>
+            <a:off x="12327392" y="6104709"/>
+            <a:ext cx="1377887" cy="296091"/>
+          </a:xfrm>
+          <a:prstGeom prst="rect">
+            <a:avLst/>
+          </a:prstGeom>
+          <a:noFill/>
+          <a:ln/>
+        </p:spPr>
+        <p:txBody>
+          <a:bodyPr wrap="square" lIns="0" tIns="0" rIns="0" bIns="0" rtlCol="0" anchor="ctr"/>
+          <a:lstStyle/>
+          <a:p>
+            <a:pPr algn="ctr" indent="0" marL="0">
+              <a:lnSpc>
+                <a:spcPct val="95000"/>
+              </a:lnSpc>
+              <a:buNone/>
+            </a:pPr>
+            <a:r>
+              <a:rPr lang="en-US" sz="1550" dirty="0">
+                <a:solidFill>
+                  <a:schemeClr val="tx1"/>
+                </a:solidFill>
+              </a:rPr>
+              <a:t>기술적 지표</a:t>
+            </a:r>
+            <a:endParaRPr lang="en-US" sz="1550" dirty="0"/>
+          </a:p>
+        </p:txBody>
+      </p:sp>
+      <p:sp>
+        <p:nvSpPr>
+          <p:cNvPr id="45" name="arrow-44"/>
+          <p:cNvSpPr/>
+          <p:nvPr/>
+        </p:nvSpPr>
+        <p:spPr>
+          <a:xfrm>
+            <a:off x="13016335" y="6400800"/>
+            <a:ext cx="0" cy="222069"/>
+          </a:xfrm>
+          <a:prstGeom prst="line">
+            <a:avLst/>
+          </a:prstGeom>
+          <a:noFill/>
+          <a:ln w="22225">
+            <a:solidFill>
+              <a:srgbClr val="14233F"/>
+            </a:solidFill>
+            <a:prstDash val="solid"/>
+            <a:tailEnd type="triangle"/>
+          </a:ln>
+        </p:spPr>
+      </p:sp>
+      <p:sp>
+        <p:nvSpPr>
+          <p:cNvPr id="46" name="node-45"/>
+          <p:cNvSpPr/>
+          <p:nvPr/>
+        </p:nvSpPr>
+        <p:spPr>
+          <a:xfrm>
+            <a:off x="12254240" y="6622869"/>
+            <a:ext cx="1524191" cy="296091"/>
+          </a:xfrm>
+          <a:prstGeom prst="roundRect">
+            <a:avLst>
+              <a:gd name="adj" fmla="val 30882"/>
+            </a:avLst>
+          </a:prstGeom>
+          <a:solidFill>
+            <a:srgbClr val="FFFFFF"/>
+          </a:solidFill>
+          <a:ln w="15875">
+            <a:solidFill>
+              <a:srgbClr val="8A94A6"/>
+            </a:solidFill>
+            <a:prstDash val="solid"/>
+          </a:ln>
+        </p:spPr>
+      </p:sp>
+      <p:sp>
+        <p:nvSpPr>
+          <p:cNvPr id="47" name="text-46"/>
+          <p:cNvSpPr txBox="1"/>
+          <p:nvPr/>
+        </p:nvSpPr>
+        <p:spPr>
+          <a:xfrm>
+            <a:off x="12327392" y="6622869"/>
+            <a:ext cx="1377887" cy="296091"/>
+          </a:xfrm>
+          <a:prstGeom prst="rect">
+            <a:avLst/>
+          </a:prstGeom>
+          <a:noFill/>
+          <a:ln/>
+        </p:spPr>
+        <p:txBody>
+          <a:bodyPr wrap="square" lIns="0" tIns="0" rIns="0" bIns="0" rtlCol="0" anchor="ctr"/>
+          <a:lstStyle/>
+          <a:p>
+            <a:pPr algn="ctr" indent="0" marL="0">
+              <a:lnSpc>
+                <a:spcPct val="95000"/>
+              </a:lnSpc>
+              <a:buNone/>
+            </a:pPr>
+            <a:r>
+              <a:rPr lang="en-US" sz="1550" dirty="0">
+                <a:solidFill>
+                  <a:schemeClr val="tx1"/>
+                </a:solidFill>
+              </a:rPr>
+              <a:t>TCN</a:t>
+            </a:r>
+            <a:endParaRPr lang="en-US" sz="1550" dirty="0"/>
+          </a:p>
+        </p:txBody>
+      </p:sp>
+      <p:sp>
+        <p:nvSpPr>
+          <p:cNvPr id="48" name="arrow-47"/>
+          <p:cNvSpPr/>
+          <p:nvPr/>
+        </p:nvSpPr>
+        <p:spPr>
+          <a:xfrm>
+            <a:off x="9967954" y="7067006"/>
+            <a:ext cx="0" cy="185057"/>
+          </a:xfrm>
+          <a:prstGeom prst="line">
+            <a:avLst/>
+          </a:prstGeom>
+          <a:noFill/>
+          <a:ln w="22225">
+            <a:solidFill>
+              <a:srgbClr val="14233F"/>
+            </a:solidFill>
+            <a:prstDash val="solid"/>
+            <a:tailEnd type="triangle"/>
+          </a:ln>
+        </p:spPr>
+      </p:sp>
+      <p:sp>
+        <p:nvSpPr>
+          <p:cNvPr id="49" name="arrow-48"/>
+          <p:cNvSpPr/>
+          <p:nvPr/>
+        </p:nvSpPr>
+        <p:spPr>
+          <a:xfrm>
+            <a:off x="13016335" y="7067006"/>
+            <a:ext cx="0" cy="185057"/>
+          </a:xfrm>
+          <a:prstGeom prst="line">
+            <a:avLst/>
+          </a:prstGeom>
+          <a:noFill/>
+          <a:ln w="22225">
+            <a:solidFill>
+              <a:srgbClr val="14233F"/>
+            </a:solidFill>
+            <a:prstDash val="solid"/>
+            <a:tailEnd type="triangle"/>
+          </a:ln>
+        </p:spPr>
+      </p:sp>
+      <p:sp>
+        <p:nvSpPr>
+          <p:cNvPr id="50" name="node-49"/>
+          <p:cNvSpPr/>
+          <p:nvPr/>
+        </p:nvSpPr>
+        <p:spPr>
+          <a:xfrm>
+            <a:off x="8291345" y="7252063"/>
+            <a:ext cx="3353219" cy="444137"/>
+          </a:xfrm>
+          <a:prstGeom prst="roundRect">
+            <a:avLst>
+              <a:gd name="adj" fmla="val 20588"/>
+            </a:avLst>
+          </a:prstGeom>
+          <a:solidFill>
+            <a:srgbClr val="FFFFFF"/>
+          </a:solidFill>
+          <a:ln w="15875">
+            <a:solidFill>
+              <a:srgbClr val="14233F"/>
+            </a:solidFill>
+            <a:prstDash val="solid"/>
+          </a:ln>
+        </p:spPr>
+      </p:sp>
+      <p:sp>
+        <p:nvSpPr>
+          <p:cNvPr id="51" name="text-50"/>
+          <p:cNvSpPr txBox="1"/>
+          <p:nvPr/>
+        </p:nvSpPr>
+        <p:spPr>
+          <a:xfrm>
+            <a:off x="8364497" y="7252063"/>
+            <a:ext cx="3206915" cy="444137"/>
+          </a:xfrm>
+          <a:prstGeom prst="rect">
+            <a:avLst/>
+          </a:prstGeom>
+          <a:noFill/>
+          <a:ln/>
+        </p:spPr>
+        <p:txBody>
+          <a:bodyPr wrap="square" lIns="0" tIns="0" rIns="0" bIns="0" rtlCol="0" anchor="ctr"/>
+          <a:lstStyle/>
+          <a:p>
+            <a:pPr algn="ctr" indent="0" marL="0">
+              <a:lnSpc>
+                <a:spcPct val="95000"/>
+              </a:lnSpc>
+              <a:buNone/>
+            </a:pPr>
+            <a:r>
+              <a:rPr lang="en-US" sz="1550" b="1" dirty="0">
+                <a:solidFill>
+                  <a:schemeClr val="tx1"/>
+                </a:solidFill>
+              </a:rPr>
+              <a:t>주 신호: 512차원 벡터</a:t>
+            </a:r>
+            <a:endParaRPr lang="en-US" sz="1550" dirty="0"/>
+          </a:p>
+        </p:txBody>
+      </p:sp>
+      <p:sp>
+        <p:nvSpPr>
+          <p:cNvPr id="52" name="node-51"/>
+          <p:cNvSpPr/>
+          <p:nvPr/>
+        </p:nvSpPr>
+        <p:spPr>
+          <a:xfrm>
+            <a:off x="12010370" y="7252063"/>
+            <a:ext cx="2011931" cy="444137"/>
+          </a:xfrm>
+          <a:prstGeom prst="roundRect">
+            <a:avLst>
+              <a:gd name="adj" fmla="val 20588"/>
+            </a:avLst>
+          </a:prstGeom>
+          <a:solidFill>
+            <a:srgbClr val="FFFFFF"/>
+          </a:solidFill>
+          <a:ln w="15875">
+            <a:solidFill>
+              <a:srgbClr val="2E8B57"/>
+            </a:solidFill>
+            <a:prstDash val="solid"/>
+          </a:ln>
+        </p:spPr>
+      </p:sp>
+      <p:sp>
+        <p:nvSpPr>
+          <p:cNvPr id="53" name="text-52"/>
+          <p:cNvSpPr txBox="1"/>
+          <p:nvPr/>
+        </p:nvSpPr>
+        <p:spPr>
+          <a:xfrm>
+            <a:off x="12083522" y="7252063"/>
+            <a:ext cx="1865627" cy="444137"/>
+          </a:xfrm>
+          <a:prstGeom prst="rect">
+            <a:avLst/>
+          </a:prstGeom>
+          <a:noFill/>
+          <a:ln/>
+        </p:spPr>
+        <p:txBody>
+          <a:bodyPr wrap="square" lIns="0" tIns="0" rIns="0" bIns="0" rtlCol="0" anchor="ctr"/>
+          <a:lstStyle/>
+          <a:p>
+            <a:pPr algn="ctr" indent="0" marL="0">
+              <a:lnSpc>
+                <a:spcPct val="95000"/>
+              </a:lnSpc>
+              <a:buNone/>
+            </a:pPr>
+            <a:r>
+              <a:rPr lang="en-US" sz="1450" b="1" dirty="0">
+                <a:solidFill>
+                  <a:schemeClr val="tx1"/>
+                </a:solidFill>
+              </a:rPr>
+              <a:t>보조 신호:</a:t>
+            </a:r>
+            <a:endParaRPr lang="en-US" sz="1450" dirty="0"/>
+          </a:p>
+          <a:p>
+            <a:pPr algn="ctr" indent="0" marL="0">
+              <a:lnSpc>
+                <a:spcPct val="95000"/>
+              </a:lnSpc>
+              <a:buNone/>
+            </a:pPr>
+            <a:r>
+              <a:rPr lang="en-US" sz="1450" b="1" dirty="0">
+                <a:solidFill>
+                  <a:schemeClr val="tx1"/>
+                </a:solidFill>
+              </a:rPr>
+              <a:t>(T, 512)차원 벡터</a:t>
+            </a:r>
+            <a:endParaRPr lang="en-US" sz="1450" dirty="0"/>
+          </a:p>
+        </p:txBody>
+      </p:sp>
+      <p:sp>
+        <p:nvSpPr>
+          <p:cNvPr id="54" name="arrow-53"/>
+          <p:cNvSpPr/>
+          <p:nvPr/>
+        </p:nvSpPr>
+        <p:spPr>
+          <a:xfrm>
+            <a:off x="9967954" y="7696200"/>
+            <a:ext cx="0" cy="162850"/>
+          </a:xfrm>
+          <a:prstGeom prst="line">
+            <a:avLst/>
+          </a:prstGeom>
+          <a:noFill/>
+          <a:ln w="22225">
+            <a:solidFill>
+              <a:srgbClr val="14233F"/>
+            </a:solidFill>
+            <a:prstDash val="solid"/>
+          </a:ln>
+        </p:spPr>
+      </p:sp>
+      <p:sp>
+        <p:nvSpPr>
+          <p:cNvPr id="55" name="arrow-54"/>
+          <p:cNvSpPr/>
+          <p:nvPr/>
+        </p:nvSpPr>
+        <p:spPr>
+          <a:xfrm>
+            <a:off x="13016335" y="7696200"/>
+            <a:ext cx="0" cy="162850"/>
+          </a:xfrm>
+          <a:prstGeom prst="line">
+            <a:avLst/>
+          </a:prstGeom>
+          <a:noFill/>
+          <a:ln w="22225">
+            <a:solidFill>
+              <a:srgbClr val="14233F"/>
+            </a:solidFill>
+            <a:prstDash val="solid"/>
+          </a:ln>
+        </p:spPr>
+      </p:sp>
+      <p:sp>
+        <p:nvSpPr>
+          <p:cNvPr id="56" name="arrow-55"/>
+          <p:cNvSpPr/>
+          <p:nvPr/>
+        </p:nvSpPr>
+        <p:spPr>
+          <a:xfrm>
+            <a:off x="9967954" y="7859050"/>
+            <a:ext cx="3048381" cy="0"/>
+          </a:xfrm>
+          <a:prstGeom prst="line">
+            <a:avLst/>
+          </a:prstGeom>
+          <a:noFill/>
+          <a:ln w="22225">
+            <a:solidFill>
+              <a:srgbClr val="14233F"/>
+            </a:solidFill>
+            <a:prstDash val="solid"/>
+          </a:ln>
+        </p:spPr>
+      </p:sp>
+      <p:sp>
+        <p:nvSpPr>
+          <p:cNvPr id="57" name="arrow-56"/>
+          <p:cNvSpPr/>
+          <p:nvPr/>
+        </p:nvSpPr>
+        <p:spPr>
+          <a:xfrm>
+            <a:off x="11461661" y="7859050"/>
+            <a:ext cx="0" cy="207264"/>
+          </a:xfrm>
+          <a:prstGeom prst="line">
+            <a:avLst/>
+          </a:prstGeom>
+          <a:noFill/>
+          <a:ln w="22225">
+            <a:solidFill>
+              <a:srgbClr val="14233F"/>
+            </a:solidFill>
+            <a:prstDash val="solid"/>
+            <a:tailEnd type="triangle"/>
+          </a:ln>
+        </p:spPr>
+      </p:sp>
+      <p:sp>
+        <p:nvSpPr>
+          <p:cNvPr id="58" name="node-57"/>
+          <p:cNvSpPr/>
+          <p:nvPr/>
+        </p:nvSpPr>
+        <p:spPr>
+          <a:xfrm>
+            <a:off x="9266827" y="8066314"/>
+            <a:ext cx="4389669" cy="407126"/>
+          </a:xfrm>
+          <a:prstGeom prst="roundRect">
+            <a:avLst>
+              <a:gd name="adj" fmla="val 22460"/>
             </a:avLst>
           </a:prstGeom>
           <a:solidFill>
@@ -3022,14 +3737,14 @@
       </p:sp>
       <p:sp>
         <p:nvSpPr>
-          <p:cNvPr id="32" name="text-31"/>
+          <p:cNvPr id="59" name="text-58"/>
           <p:cNvSpPr txBox="1"/>
           <p:nvPr/>
         </p:nvSpPr>
         <p:spPr>
           <a:xfrm>
-            <a:off x="7470648" y="9509760"/>
-            <a:ext cx="1773936" cy="1143000"/>
+            <a:off x="9339979" y="8066314"/>
+            <a:ext cx="4243365" cy="407126"/>
           </a:xfrm>
           <a:prstGeom prst="rect">
             <a:avLst/>
@@ -3053,60 +3768,140 @@
                   <a:schemeClr val="tx1"/>
                 </a:solidFill>
               </a:rPr>
-              <a:t>비대칭</a:t>
+              <a:t>3. 비대칭 교차 어텐션</a:t>
             </a:r>
             <a:endParaRPr lang="en-US" sz="1700" dirty="0"/>
           </a:p>
-          <a:p>
-            <a:pPr algn="ctr" indent="0" marL="0">
-              <a:lnSpc>
-                <a:spcPct val="95000"/>
-              </a:lnSpc>
-              <a:buNone/>
-            </a:pPr>
-            <a:r>
-              <a:rPr lang="en-US" sz="1700" b="1" dirty="0">
-                <a:solidFill>
-                  <a:schemeClr val="tx1"/>
-                </a:solidFill>
-              </a:rPr>
-              <a:t>교차 어텐션</a:t>
-            </a:r>
-            <a:endParaRPr lang="en-US" sz="1700" dirty="0"/>
-          </a:p>
-          <a:p>
-            <a:pPr algn="ctr" indent="0" marL="0">
-              <a:lnSpc>
-                <a:spcPct val="95000"/>
-              </a:lnSpc>
-              <a:buNone/>
-            </a:pPr>
-            <a:r>
-              <a:rPr lang="en-US" sz="1700" b="1" dirty="0">
-                <a:solidFill>
-                  <a:schemeClr val="tx1"/>
-                </a:solidFill>
-              </a:rPr>
-              <a:t>Q=뉴스 K·V=지표</a:t>
-            </a:r>
-            <a:endParaRPr lang="en-US" sz="1700" dirty="0"/>
-          </a:p>
         </p:txBody>
       </p:sp>
       <p:sp>
         <p:nvSpPr>
-          <p:cNvPr id="33" name="node-32"/>
+          <p:cNvPr id="60" name="arrow-59"/>
           <p:cNvSpPr/>
           <p:nvPr/>
         </p:nvSpPr>
         <p:spPr>
           <a:xfrm>
-            <a:off x="9619488" y="9509760"/>
-            <a:ext cx="1645920" cy="1143000"/>
+            <a:off x="11461661" y="8473440"/>
+            <a:ext cx="0" cy="185057"/>
+          </a:xfrm>
+          <a:prstGeom prst="line">
+            <a:avLst/>
+          </a:prstGeom>
+          <a:noFill/>
+          <a:ln w="22225">
+            <a:solidFill>
+              <a:srgbClr val="14233F"/>
+            </a:solidFill>
+            <a:prstDash val="solid"/>
+            <a:tailEnd type="triangle"/>
+          </a:ln>
+        </p:spPr>
+      </p:sp>
+      <p:sp>
+        <p:nvSpPr>
+          <p:cNvPr id="61" name="node-60"/>
+          <p:cNvSpPr/>
+          <p:nvPr/>
+        </p:nvSpPr>
+        <p:spPr>
+          <a:xfrm>
+            <a:off x="9937471" y="8658497"/>
+            <a:ext cx="3048381" cy="296091"/>
           </a:xfrm>
           <a:prstGeom prst="roundRect">
             <a:avLst>
-              <a:gd name="adj" fmla="val 8000"/>
+              <a:gd name="adj" fmla="val 30882"/>
+            </a:avLst>
+          </a:prstGeom>
+          <a:solidFill>
+            <a:srgbClr val="FFFFFF"/>
+          </a:solidFill>
+          <a:ln w="15875">
+            <a:solidFill>
+              <a:srgbClr val="8A94A6"/>
+            </a:solidFill>
+            <a:prstDash val="solid"/>
+          </a:ln>
+        </p:spPr>
+      </p:sp>
+      <p:sp>
+        <p:nvSpPr>
+          <p:cNvPr id="62" name="text-61"/>
+          <p:cNvSpPr txBox="1"/>
+          <p:nvPr/>
+        </p:nvSpPr>
+        <p:spPr>
+          <a:xfrm>
+            <a:off x="10010623" y="8658497"/>
+            <a:ext cx="2902077" cy="296091"/>
+          </a:xfrm>
+          <a:prstGeom prst="rect">
+            <a:avLst/>
+          </a:prstGeom>
+          <a:noFill/>
+          <a:ln/>
+        </p:spPr>
+        <p:txBody>
+          <a:bodyPr wrap="square" lIns="0" tIns="0" rIns="0" bIns="0" rtlCol="0" anchor="ctr"/>
+          <a:lstStyle/>
+          <a:p>
+            <a:pPr algn="ctr" indent="0" marL="0">
+              <a:lnSpc>
+                <a:spcPct val="95000"/>
+              </a:lnSpc>
+              <a:buNone/>
+            </a:pPr>
+            <a:r>
+              <a:rPr lang="en-US" sz="1550" dirty="0">
+                <a:solidFill>
+                  <a:schemeClr val="tx1"/>
+                </a:solidFill>
+              </a:rPr>
+              <a:t>보조 문맥 벡터: 512차원</a:t>
+            </a:r>
+            <a:endParaRPr lang="en-US" sz="1550" dirty="0"/>
+          </a:p>
+        </p:txBody>
+      </p:sp>
+      <p:sp>
+        <p:nvSpPr>
+          <p:cNvPr id="63" name="arrow-62"/>
+          <p:cNvSpPr/>
+          <p:nvPr/>
+        </p:nvSpPr>
+        <p:spPr>
+          <a:xfrm>
+            <a:off x="11461661" y="8954589"/>
+            <a:ext cx="0" cy="185057"/>
+          </a:xfrm>
+          <a:prstGeom prst="line">
+            <a:avLst/>
+          </a:prstGeom>
+          <a:noFill/>
+          <a:ln w="22225">
+            <a:solidFill>
+              <a:srgbClr val="14233F"/>
+            </a:solidFill>
+            <a:prstDash val="solid"/>
+            <a:tailEnd type="triangle"/>
+          </a:ln>
+        </p:spPr>
+      </p:sp>
+      <p:sp>
+        <p:nvSpPr>
+          <p:cNvPr id="64" name="node-63"/>
+          <p:cNvSpPr/>
+          <p:nvPr/>
+        </p:nvSpPr>
+        <p:spPr>
+          <a:xfrm>
+            <a:off x="9266827" y="9139646"/>
+            <a:ext cx="4389669" cy="407126"/>
+          </a:xfrm>
+          <a:prstGeom prst="roundRect">
+            <a:avLst>
+              <a:gd name="adj" fmla="val 22460"/>
             </a:avLst>
           </a:prstGeom>
           <a:solidFill>
@@ -3122,14 +3917,14 @@
       </p:sp>
       <p:sp>
         <p:nvSpPr>
-          <p:cNvPr id="34" name="text-33"/>
+          <p:cNvPr id="65" name="text-64"/>
           <p:cNvSpPr txBox="1"/>
           <p:nvPr/>
         </p:nvSpPr>
         <p:spPr>
           <a:xfrm>
-            <a:off x="9692640" y="9509760"/>
-            <a:ext cx="1499616" cy="1143000"/>
+            <a:off x="9339979" y="9139646"/>
+            <a:ext cx="4243365" cy="407126"/>
           </a:xfrm>
           <a:prstGeom prst="rect">
             <a:avLst/>
@@ -3153,43 +3948,210 @@
                   <a:schemeClr val="tx1"/>
                 </a:solidFill>
               </a:rPr>
-              <a:t>게이트 기반</a:t>
+              <a:t>4. 게이트 기반 잔차 결합</a:t>
             </a:r>
             <a:endParaRPr lang="en-US" sz="1700" dirty="0"/>
           </a:p>
-          <a:p>
-            <a:pPr algn="ctr" indent="0" marL="0">
-              <a:lnSpc>
-                <a:spcPct val="95000"/>
-              </a:lnSpc>
-              <a:buNone/>
-            </a:pPr>
-            <a:r>
-              <a:rPr lang="en-US" sz="1700" b="1" dirty="0">
-                <a:solidFill>
-                  <a:schemeClr val="tx1"/>
-                </a:solidFill>
-              </a:rPr>
-              <a:t>잔차 결합</a:t>
-            </a:r>
-            <a:endParaRPr lang="en-US" sz="1700" dirty="0"/>
-          </a:p>
         </p:txBody>
       </p:sp>
       <p:sp>
         <p:nvSpPr>
-          <p:cNvPr id="35" name="node-34"/>
+          <p:cNvPr id="66" name="arrow-65"/>
           <p:cNvSpPr/>
           <p:nvPr/>
         </p:nvSpPr>
         <p:spPr>
           <a:xfrm>
-            <a:off x="11567160" y="9509760"/>
-            <a:ext cx="1371600" cy="1143000"/>
+            <a:off x="7925539" y="7474131"/>
+            <a:ext cx="365806" cy="0"/>
+          </a:xfrm>
+          <a:prstGeom prst="line">
+            <a:avLst/>
+          </a:prstGeom>
+          <a:noFill/>
+          <a:ln w="22225">
+            <a:solidFill>
+              <a:srgbClr val="14233F"/>
+            </a:solidFill>
+            <a:prstDash val="solid"/>
+          </a:ln>
+        </p:spPr>
+      </p:sp>
+      <p:sp>
+        <p:nvSpPr>
+          <p:cNvPr id="67" name="arrow-66"/>
+          <p:cNvSpPr/>
+          <p:nvPr/>
+        </p:nvSpPr>
+        <p:spPr>
+          <a:xfrm>
+            <a:off x="7925539" y="7474131"/>
+            <a:ext cx="0" cy="1869077"/>
+          </a:xfrm>
+          <a:prstGeom prst="line">
+            <a:avLst/>
+          </a:prstGeom>
+          <a:noFill/>
+          <a:ln w="22225">
+            <a:solidFill>
+              <a:srgbClr val="14233F"/>
+            </a:solidFill>
+            <a:prstDash val="solid"/>
+          </a:ln>
+        </p:spPr>
+      </p:sp>
+      <p:sp>
+        <p:nvSpPr>
+          <p:cNvPr id="68" name="arrow-67"/>
+          <p:cNvSpPr/>
+          <p:nvPr/>
+        </p:nvSpPr>
+        <p:spPr>
+          <a:xfrm>
+            <a:off x="7925539" y="9343209"/>
+            <a:ext cx="1341288" cy="0"/>
+          </a:xfrm>
+          <a:prstGeom prst="line">
+            <a:avLst/>
+          </a:prstGeom>
+          <a:noFill/>
+          <a:ln w="22225">
+            <a:solidFill>
+              <a:srgbClr val="14233F"/>
+            </a:solidFill>
+            <a:prstDash val="solid"/>
+            <a:tailEnd type="triangle"/>
+          </a:ln>
+        </p:spPr>
+      </p:sp>
+      <p:sp>
+        <p:nvSpPr>
+          <p:cNvPr id="69" name="arrow-68"/>
+          <p:cNvSpPr/>
+          <p:nvPr/>
+        </p:nvSpPr>
+        <p:spPr>
+          <a:xfrm>
+            <a:off x="11461661" y="9546771"/>
+            <a:ext cx="0" cy="185057"/>
+          </a:xfrm>
+          <a:prstGeom prst="line">
+            <a:avLst/>
+          </a:prstGeom>
+          <a:noFill/>
+          <a:ln w="22225">
+            <a:solidFill>
+              <a:srgbClr val="14233F"/>
+            </a:solidFill>
+            <a:prstDash val="solid"/>
+            <a:tailEnd type="triangle"/>
+          </a:ln>
+        </p:spPr>
+      </p:sp>
+      <p:sp>
+        <p:nvSpPr>
+          <p:cNvPr id="70" name="node-69"/>
+          <p:cNvSpPr/>
+          <p:nvPr/>
+        </p:nvSpPr>
+        <p:spPr>
+          <a:xfrm>
+            <a:off x="9937471" y="9731829"/>
+            <a:ext cx="3048381" cy="296091"/>
           </a:xfrm>
           <a:prstGeom prst="roundRect">
             <a:avLst>
-              <a:gd name="adj" fmla="val 8000"/>
+              <a:gd name="adj" fmla="val 30882"/>
+            </a:avLst>
+          </a:prstGeom>
+          <a:solidFill>
+            <a:srgbClr val="FFFFFF"/>
+          </a:solidFill>
+          <a:ln w="15875">
+            <a:solidFill>
+              <a:srgbClr val="8A94A6"/>
+            </a:solidFill>
+            <a:prstDash val="solid"/>
+          </a:ln>
+        </p:spPr>
+      </p:sp>
+      <p:sp>
+        <p:nvSpPr>
+          <p:cNvPr id="71" name="text-70"/>
+          <p:cNvSpPr txBox="1"/>
+          <p:nvPr/>
+        </p:nvSpPr>
+        <p:spPr>
+          <a:xfrm>
+            <a:off x="10010623" y="9731829"/>
+            <a:ext cx="2902077" cy="296091"/>
+          </a:xfrm>
+          <a:prstGeom prst="rect">
+            <a:avLst/>
+          </a:prstGeom>
+          <a:noFill/>
+          <a:ln/>
+        </p:spPr>
+        <p:txBody>
+          <a:bodyPr wrap="square" lIns="0" tIns="0" rIns="0" bIns="0" rtlCol="0" anchor="ctr"/>
+          <a:lstStyle/>
+          <a:p>
+            <a:pPr algn="ctr" indent="0" marL="0">
+              <a:lnSpc>
+                <a:spcPct val="95000"/>
+              </a:lnSpc>
+              <a:buNone/>
+            </a:pPr>
+            <a:r>
+              <a:rPr lang="en-US" sz="1550" dirty="0">
+                <a:solidFill>
+                  <a:schemeClr val="tx1"/>
+                </a:solidFill>
+              </a:rPr>
+              <a:t>통합 표현 벡터: 512차원</a:t>
+            </a:r>
+            <a:endParaRPr lang="en-US" sz="1550" dirty="0"/>
+          </a:p>
+        </p:txBody>
+      </p:sp>
+      <p:sp>
+        <p:nvSpPr>
+          <p:cNvPr id="72" name="arrow-71"/>
+          <p:cNvSpPr/>
+          <p:nvPr/>
+        </p:nvSpPr>
+        <p:spPr>
+          <a:xfrm>
+            <a:off x="11461661" y="10027920"/>
+            <a:ext cx="0" cy="185057"/>
+          </a:xfrm>
+          <a:prstGeom prst="line">
+            <a:avLst/>
+          </a:prstGeom>
+          <a:noFill/>
+          <a:ln w="22225">
+            <a:solidFill>
+              <a:srgbClr val="14233F"/>
+            </a:solidFill>
+            <a:prstDash val="solid"/>
+            <a:tailEnd type="triangle"/>
+          </a:ln>
+        </p:spPr>
+      </p:sp>
+      <p:sp>
+        <p:nvSpPr>
+          <p:cNvPr id="73" name="node-72"/>
+          <p:cNvSpPr/>
+          <p:nvPr/>
+        </p:nvSpPr>
+        <p:spPr>
+          <a:xfrm>
+            <a:off x="9266827" y="10212977"/>
+            <a:ext cx="4389669" cy="407126"/>
+          </a:xfrm>
+          <a:prstGeom prst="roundRect">
+            <a:avLst>
+              <a:gd name="adj" fmla="val 22460"/>
             </a:avLst>
           </a:prstGeom>
           <a:solidFill>
@@ -3197,22 +4159,22 @@
           </a:solidFill>
           <a:ln w="15875">
             <a:solidFill>
-              <a:srgbClr val="FBE8D0"/>
-            </a:solidFill>
-            <a:prstDash val="solid"/>
-          </a:ln>
-        </p:spPr>
-      </p:sp>
-      <p:sp>
-        <p:nvSpPr>
-          <p:cNvPr id="36" name="text-35"/>
+              <a:srgbClr val="E3A12F"/>
+            </a:solidFill>
+            <a:prstDash val="solid"/>
+          </a:ln>
+        </p:spPr>
+      </p:sp>
+      <p:sp>
+        <p:nvSpPr>
+          <p:cNvPr id="74" name="text-73"/>
           <p:cNvSpPr txBox="1"/>
           <p:nvPr/>
         </p:nvSpPr>
         <p:spPr>
           <a:xfrm>
-            <a:off x="11640312" y="9509760"/>
-            <a:ext cx="1225296" cy="1143000"/>
+            <a:off x="9339979" y="10212977"/>
+            <a:ext cx="4243365" cy="407126"/>
           </a:xfrm>
           <a:prstGeom prst="rect">
             <a:avLst/>
@@ -3231,48 +4193,55 @@
               <a:buNone/>
             </a:pPr>
             <a:r>
-              <a:rPr lang="en-US" sz="1700" dirty="0">
+              <a:rPr lang="en-US" sz="1700" b="1" dirty="0">
                 <a:solidFill>
                   <a:schemeClr val="tx1"/>
                 </a:solidFill>
               </a:rPr>
-              <a:t>MLP</a:t>
+              <a:t>5. 등락률 예측</a:t>
             </a:r>
             <a:endParaRPr lang="en-US" sz="1700" dirty="0"/>
           </a:p>
-          <a:p>
-            <a:pPr algn="ctr" indent="0" marL="0">
-              <a:lnSpc>
-                <a:spcPct val="95000"/>
-              </a:lnSpc>
-              <a:buNone/>
-            </a:pPr>
-            <a:r>
-              <a:rPr lang="en-US" sz="1700" dirty="0">
-                <a:solidFill>
-                  <a:schemeClr val="tx1"/>
-                </a:solidFill>
-              </a:rPr>
-              <a:t>순위 손실</a:t>
-            </a:r>
-            <a:endParaRPr lang="en-US" sz="1700" dirty="0"/>
-          </a:p>
         </p:txBody>
       </p:sp>
       <p:sp>
         <p:nvSpPr>
-          <p:cNvPr id="37" name="node-36"/>
+          <p:cNvPr id="75" name="arrow-74"/>
           <p:cNvSpPr/>
           <p:nvPr/>
         </p:nvSpPr>
         <p:spPr>
           <a:xfrm>
-            <a:off x="13240512" y="9509760"/>
-            <a:ext cx="1280160" cy="1143000"/>
+            <a:off x="11461661" y="10620103"/>
+            <a:ext cx="0" cy="148046"/>
+          </a:xfrm>
+          <a:prstGeom prst="line">
+            <a:avLst/>
+          </a:prstGeom>
+          <a:noFill/>
+          <a:ln w="22225">
+            <a:solidFill>
+              <a:srgbClr val="14233F"/>
+            </a:solidFill>
+            <a:prstDash val="solid"/>
+            <a:tailEnd type="triangle"/>
+          </a:ln>
+        </p:spPr>
+      </p:sp>
+      <p:sp>
+        <p:nvSpPr>
+          <p:cNvPr id="76" name="node-75"/>
+          <p:cNvSpPr/>
+          <p:nvPr/>
+        </p:nvSpPr>
+        <p:spPr>
+          <a:xfrm>
+            <a:off x="10181341" y="10768149"/>
+            <a:ext cx="2560640" cy="296091"/>
           </a:xfrm>
           <a:prstGeom prst="roundRect">
             <a:avLst>
-              <a:gd name="adj" fmla="val 8000"/>
+              <a:gd name="adj" fmla="val 30882"/>
             </a:avLst>
           </a:prstGeom>
           <a:solidFill>
@@ -3288,14 +4257,14 @@
       </p:sp>
       <p:sp>
         <p:nvSpPr>
-          <p:cNvPr id="38" name="text-37"/>
+          <p:cNvPr id="77" name="text-76"/>
           <p:cNvSpPr txBox="1"/>
           <p:nvPr/>
         </p:nvSpPr>
         <p:spPr>
           <a:xfrm>
-            <a:off x="13313664" y="9509760"/>
-            <a:ext cx="1133856" cy="1143000"/>
+            <a:off x="10254493" y="10768149"/>
+            <a:ext cx="2414336" cy="296091"/>
           </a:xfrm>
           <a:prstGeom prst="rect">
             <a:avLst/>
@@ -3314,379 +4283,27 @@
               <a:buNone/>
             </a:pPr>
             <a:r>
-              <a:rPr lang="en-US" sz="1700" b="1" dirty="0">
+              <a:rPr lang="en-US" sz="1550" b="1" dirty="0">
                 <a:solidFill>
                   <a:schemeClr val="bg1"/>
                 </a:solidFill>
               </a:rPr>
-              <a:t>개선 구조</a:t>
-            </a:r>
-            <a:endParaRPr lang="en-US" sz="1700" dirty="0"/>
-          </a:p>
-          <a:p>
-            <a:pPr algn="ctr" indent="0" marL="0">
-              <a:lnSpc>
-                <a:spcPct val="95000"/>
-              </a:lnSpc>
-              <a:buNone/>
-            </a:pPr>
-            <a:r>
-              <a:rPr lang="en-US" sz="1700" b="1" dirty="0">
-                <a:solidFill>
-                  <a:schemeClr val="bg1"/>
-                </a:solidFill>
-              </a:rPr>
-              <a:t>예측</a:t>
-            </a:r>
-            <a:endParaRPr lang="en-US" sz="1700" dirty="0"/>
+              <a:t>등락률 (개선 구조)</a:t>
+            </a:r>
+            <a:endParaRPr lang="en-US" sz="1550" dirty="0"/>
           </a:p>
         </p:txBody>
       </p:sp>
       <p:sp>
         <p:nvSpPr>
-          <p:cNvPr id="39" name="arrow-38"/>
-          <p:cNvSpPr/>
-          <p:nvPr/>
-        </p:nvSpPr>
-        <p:spPr>
-          <a:xfrm>
-            <a:off x="2560320" y="9258300"/>
-            <a:ext cx="301752" cy="0"/>
-          </a:xfrm>
-          <a:prstGeom prst="line">
-            <a:avLst/>
-          </a:prstGeom>
-          <a:noFill/>
-          <a:ln w="25400">
-            <a:solidFill>
-              <a:srgbClr val="14233F"/>
-            </a:solidFill>
-            <a:prstDash val="solid"/>
-            <a:tailEnd type="triangle"/>
-          </a:ln>
-        </p:spPr>
-      </p:sp>
-      <p:sp>
-        <p:nvSpPr>
-          <p:cNvPr id="40" name="arrow-39"/>
-          <p:cNvSpPr/>
-          <p:nvPr/>
-        </p:nvSpPr>
-        <p:spPr>
-          <a:xfrm>
-            <a:off x="4828032" y="9258300"/>
-            <a:ext cx="301752" cy="0"/>
-          </a:xfrm>
-          <a:prstGeom prst="line">
-            <a:avLst/>
-          </a:prstGeom>
-          <a:noFill/>
-          <a:ln w="25400">
-            <a:solidFill>
-              <a:srgbClr val="14233F"/>
-            </a:solidFill>
-            <a:prstDash val="solid"/>
-            <a:tailEnd type="triangle"/>
-          </a:ln>
-        </p:spPr>
-      </p:sp>
-      <p:sp>
-        <p:nvSpPr>
-          <p:cNvPr id="41" name="arrow-40"/>
-          <p:cNvSpPr/>
-          <p:nvPr/>
-        </p:nvSpPr>
-        <p:spPr>
-          <a:xfrm>
-            <a:off x="2560320" y="10904220"/>
-            <a:ext cx="301752" cy="0"/>
-          </a:xfrm>
-          <a:prstGeom prst="line">
-            <a:avLst/>
-          </a:prstGeom>
-          <a:noFill/>
-          <a:ln w="25400">
-            <a:solidFill>
-              <a:srgbClr val="14233F"/>
-            </a:solidFill>
-            <a:prstDash val="solid"/>
-            <a:tailEnd type="triangle"/>
-          </a:ln>
-        </p:spPr>
-      </p:sp>
-      <p:sp>
-        <p:nvSpPr>
-          <p:cNvPr id="42" name="arrow-41"/>
-          <p:cNvSpPr/>
-          <p:nvPr/>
-        </p:nvSpPr>
-        <p:spPr>
-          <a:xfrm>
-            <a:off x="4828032" y="10904220"/>
-            <a:ext cx="301752" cy="0"/>
-          </a:xfrm>
-          <a:prstGeom prst="line">
-            <a:avLst/>
-          </a:prstGeom>
-          <a:noFill/>
-          <a:ln w="25400">
-            <a:solidFill>
-              <a:srgbClr val="14233F"/>
-            </a:solidFill>
-            <a:prstDash val="solid"/>
-            <a:tailEnd type="triangle"/>
-          </a:ln>
-        </p:spPr>
-      </p:sp>
-      <p:sp>
-        <p:nvSpPr>
-          <p:cNvPr id="43" name="arrow-42"/>
-          <p:cNvSpPr/>
-          <p:nvPr/>
-        </p:nvSpPr>
-        <p:spPr>
-          <a:xfrm>
-            <a:off x="7095744" y="9258300"/>
-            <a:ext cx="301752" cy="571500"/>
-          </a:xfrm>
-          <a:prstGeom prst="line">
-            <a:avLst/>
-          </a:prstGeom>
-          <a:noFill/>
-          <a:ln w="25400">
-            <a:solidFill>
-              <a:srgbClr val="14233F"/>
-            </a:solidFill>
-            <a:prstDash val="solid"/>
-            <a:tailEnd type="triangle"/>
-          </a:ln>
-        </p:spPr>
-      </p:sp>
-      <p:sp>
-        <p:nvSpPr>
-          <p:cNvPr id="44" name="arrow-43"/>
-          <p:cNvSpPr/>
-          <p:nvPr/>
-        </p:nvSpPr>
-        <p:spPr>
-          <a:xfrm flipV="1">
-            <a:off x="7095744" y="10332720"/>
-            <a:ext cx="301752" cy="571500"/>
-          </a:xfrm>
-          <a:prstGeom prst="line">
-            <a:avLst/>
-          </a:prstGeom>
-          <a:noFill/>
-          <a:ln w="25400">
-            <a:solidFill>
-              <a:srgbClr val="14233F"/>
-            </a:solidFill>
-            <a:prstDash val="solid"/>
-            <a:tailEnd type="triangle"/>
-          </a:ln>
-        </p:spPr>
-      </p:sp>
-      <p:sp>
-        <p:nvSpPr>
-          <p:cNvPr id="45" name="arrow-44"/>
-          <p:cNvSpPr/>
-          <p:nvPr/>
-        </p:nvSpPr>
-        <p:spPr>
-          <a:xfrm>
-            <a:off x="9317736" y="10081260"/>
-            <a:ext cx="301752" cy="0"/>
-          </a:xfrm>
-          <a:prstGeom prst="line">
-            <a:avLst/>
-          </a:prstGeom>
-          <a:noFill/>
-          <a:ln w="25400">
-            <a:solidFill>
-              <a:srgbClr val="14233F"/>
-            </a:solidFill>
-            <a:prstDash val="solid"/>
-            <a:tailEnd type="triangle"/>
-          </a:ln>
-        </p:spPr>
-      </p:sp>
-      <p:sp>
-        <p:nvSpPr>
-          <p:cNvPr id="46" name="arrow-45"/>
-          <p:cNvSpPr/>
-          <p:nvPr/>
-        </p:nvSpPr>
-        <p:spPr>
-          <a:xfrm>
-            <a:off x="11265408" y="10081260"/>
-            <a:ext cx="301752" cy="0"/>
-          </a:xfrm>
-          <a:prstGeom prst="line">
-            <a:avLst/>
-          </a:prstGeom>
-          <a:noFill/>
-          <a:ln w="25400">
-            <a:solidFill>
-              <a:srgbClr val="14233F"/>
-            </a:solidFill>
-            <a:prstDash val="solid"/>
-            <a:tailEnd type="triangle"/>
-          </a:ln>
-        </p:spPr>
-      </p:sp>
-      <p:sp>
-        <p:nvSpPr>
-          <p:cNvPr id="47" name="arrow-46"/>
-          <p:cNvSpPr/>
-          <p:nvPr/>
-        </p:nvSpPr>
-        <p:spPr>
-          <a:xfrm>
-            <a:off x="12938760" y="10081260"/>
-            <a:ext cx="301752" cy="0"/>
-          </a:xfrm>
-          <a:prstGeom prst="line">
-            <a:avLst/>
-          </a:prstGeom>
-          <a:noFill/>
-          <a:ln w="25400">
-            <a:solidFill>
-              <a:srgbClr val="14233F"/>
-            </a:solidFill>
-            <a:prstDash val="solid"/>
-            <a:tailEnd type="triangle"/>
-          </a:ln>
-        </p:spPr>
-      </p:sp>
-      <p:sp>
-        <p:nvSpPr>
-          <p:cNvPr id="48" name="arrow-47"/>
-          <p:cNvSpPr/>
-          <p:nvPr/>
-        </p:nvSpPr>
-        <p:spPr>
-          <a:xfrm>
-            <a:off x="7095744" y="8979408"/>
-            <a:ext cx="3346704" cy="0"/>
-          </a:xfrm>
-          <a:prstGeom prst="line">
-            <a:avLst/>
-          </a:prstGeom>
-          <a:noFill/>
-          <a:ln w="22225">
-            <a:solidFill>
-              <a:srgbClr val="6B7686"/>
-            </a:solidFill>
-            <a:prstDash val="dash"/>
-          </a:ln>
-        </p:spPr>
-      </p:sp>
-      <p:sp>
-        <p:nvSpPr>
-          <p:cNvPr id="49" name="arrow-48"/>
-          <p:cNvSpPr/>
-          <p:nvPr/>
-        </p:nvSpPr>
-        <p:spPr>
-          <a:xfrm>
-            <a:off x="10442448" y="8979408"/>
-            <a:ext cx="0" cy="530352"/>
-          </a:xfrm>
-          <a:prstGeom prst="line">
-            <a:avLst/>
-          </a:prstGeom>
-          <a:noFill/>
-          <a:ln w="22225">
-            <a:solidFill>
-              <a:srgbClr val="6B7686"/>
-            </a:solidFill>
-            <a:prstDash val="dash"/>
-            <a:tailEnd type="triangle"/>
-          </a:ln>
-        </p:spPr>
-      </p:sp>
-      <p:sp>
-        <p:nvSpPr>
-          <p:cNvPr id="50" name="text-49"/>
+          <p:cNvPr id="78" name="text-77"/>
           <p:cNvSpPr txBox="1"/>
           <p:nvPr/>
         </p:nvSpPr>
         <p:spPr>
           <a:xfrm>
-            <a:off x="7488936" y="8595360"/>
-            <a:ext cx="2377440" cy="329184"/>
-          </a:xfrm>
-          <a:prstGeom prst="rect">
-            <a:avLst/>
-          </a:prstGeom>
-          <a:noFill/>
-          <a:ln/>
-        </p:spPr>
-        <p:txBody>
-          <a:bodyPr wrap="square" lIns="0" tIns="0" rIns="0" bIns="0" rtlCol="0" anchor="t"/>
-          <a:lstStyle/>
-          <a:p>
-            <a:pPr indent="0" marL="0">
-              <a:buNone/>
-            </a:pPr>
-            <a:r>
-              <a:rPr lang="en-US" sz="1500" dirty="0">
-                <a:solidFill>
-                  <a:srgbClr val="6B7686"/>
-                </a:solidFill>
-              </a:rPr>
-              <a:t>잔차: 주 신호 보존</a:t>
-            </a:r>
-            <a:endParaRPr lang="en-US" sz="1500" dirty="0"/>
-          </a:p>
-        </p:txBody>
-      </p:sp>
-      <p:sp>
-        <p:nvSpPr>
-          <p:cNvPr id="51" name="text-50"/>
-          <p:cNvSpPr txBox="1"/>
-          <p:nvPr/>
-        </p:nvSpPr>
-        <p:spPr>
-          <a:xfrm>
-            <a:off x="7397496" y="10762488"/>
-            <a:ext cx="4206240" cy="365760"/>
-          </a:xfrm>
-          <a:prstGeom prst="rect">
-            <a:avLst/>
-          </a:prstGeom>
-          <a:noFill/>
-          <a:ln/>
-        </p:spPr>
-        <p:txBody>
-          <a:bodyPr wrap="square" lIns="0" tIns="0" rIns="0" bIns="0" rtlCol="0" anchor="t"/>
-          <a:lstStyle/>
-          <a:p>
-            <a:pPr indent="0" marL="0">
-              <a:buNone/>
-            </a:pPr>
-            <a:r>
-              <a:rPr lang="en-US" sz="1500" dirty="0">
-                <a:solidFill>
-                  <a:srgbClr val="6B7686"/>
-                </a:solidFill>
-              </a:rPr>
-              <a:t>Q = 뉴스 1개, K·V = 30개 시점 (비대칭)</a:t>
-            </a:r>
-            <a:endParaRPr lang="en-US" sz="1500" dirty="0"/>
-          </a:p>
-        </p:txBody>
-      </p:sp>
-      <p:sp>
-        <p:nvSpPr>
-          <p:cNvPr id="52" name="text-51"/>
-          <p:cNvSpPr txBox="1"/>
-          <p:nvPr/>
-        </p:nvSpPr>
-        <p:spPr>
-          <a:xfrm>
-            <a:off x="960120" y="11658600"/>
-            <a:ext cx="1600200" cy="868680"/>
+            <a:off x="8108442" y="11201400"/>
+            <a:ext cx="6096762" cy="347472"/>
           </a:xfrm>
           <a:prstGeom prst="rect">
             <a:avLst/>
@@ -3702,54 +4319,54 @@
               <a:buNone/>
             </a:pPr>
             <a:r>
-              <a:rPr lang="en-US" sz="1900" b="1" dirty="0">
+              <a:rPr lang="en-US" sz="1500" b="1" dirty="0">
                 <a:solidFill>
                   <a:schemeClr val="accent1"/>
                 </a:solidFill>
               </a:rPr>
-              <a:t>최종 예측</a:t>
-            </a:r>
-            <a:endParaRPr lang="en-US" sz="1900" dirty="0"/>
+              <a:t>최종 예측: 위 신경망을 포함한 12개 모델의 앙상블</a:t>
+            </a:r>
+            <a:endParaRPr lang="en-US" sz="1500" dirty="0"/>
           </a:p>
         </p:txBody>
       </p:sp>
       <p:sp>
         <p:nvSpPr>
-          <p:cNvPr id="53" name="node-52"/>
+          <p:cNvPr id="79" name="node-78"/>
           <p:cNvSpPr/>
           <p:nvPr/>
         </p:nvSpPr>
         <p:spPr>
           <a:xfrm>
-            <a:off x="2606040" y="11658600"/>
-            <a:ext cx="2377440" cy="868680"/>
+            <a:off x="8108442" y="11640312"/>
+            <a:ext cx="1371600" cy="640080"/>
           </a:xfrm>
           <a:prstGeom prst="roundRect">
             <a:avLst>
-              <a:gd name="adj" fmla="val 10526"/>
+              <a:gd name="adj" fmla="val 14286"/>
             </a:avLst>
           </a:prstGeom>
           <a:solidFill>
-            <a:srgbClr val="DCE8F6"/>
+            <a:srgbClr val="FFFFFF"/>
           </a:solidFill>
           <a:ln w="15875">
             <a:solidFill>
-              <a:srgbClr val="DCE8F6"/>
-            </a:solidFill>
-            <a:prstDash val="solid"/>
-          </a:ln>
-        </p:spPr>
-      </p:sp>
-      <p:sp>
-        <p:nvSpPr>
-          <p:cNvPr id="54" name="text-53"/>
+              <a:srgbClr val="8A94A6"/>
+            </a:solidFill>
+            <a:prstDash val="solid"/>
+          </a:ln>
+        </p:spPr>
+      </p:sp>
+      <p:sp>
+        <p:nvSpPr>
+          <p:cNvPr id="80" name="text-79"/>
           <p:cNvSpPr txBox="1"/>
           <p:nvPr/>
         </p:nvSpPr>
         <p:spPr>
           <a:xfrm>
-            <a:off x="2679192" y="11658600"/>
-            <a:ext cx="2231136" cy="868680"/>
+            <a:off x="8181594" y="11640312"/>
+            <a:ext cx="1225296" cy="640080"/>
           </a:xfrm>
           <a:prstGeom prst="rect">
             <a:avLst/>
@@ -3768,44 +4385,27 @@
               <a:buNone/>
             </a:pPr>
             <a:r>
-              <a:rPr lang="en-US" sz="1600" dirty="0">
+              <a:rPr lang="en-US" sz="1450" dirty="0">
                 <a:solidFill>
                   <a:schemeClr val="tx1"/>
                 </a:solidFill>
               </a:rPr>
               <a:t>신경망 8종</a:t>
             </a:r>
-            <a:endParaRPr lang="en-US" sz="1600" dirty="0"/>
-          </a:p>
-          <a:p>
-            <a:pPr algn="ctr" indent="0" marL="0">
-              <a:lnSpc>
-                <a:spcPct val="95000"/>
-              </a:lnSpc>
-              <a:buNone/>
-            </a:pPr>
-            <a:r>
-              <a:rPr lang="en-US" sz="1600" dirty="0">
-                <a:solidFill>
-                  <a:schemeClr val="tx1"/>
-                </a:solidFill>
-              </a:rPr>
-              <a:t>(논문 구조 포함)</a:t>
-            </a:r>
-            <a:endParaRPr lang="en-US" sz="1600" dirty="0"/>
+            <a:endParaRPr lang="en-US" sz="1450" dirty="0"/>
           </a:p>
         </p:txBody>
       </p:sp>
       <p:sp>
         <p:nvSpPr>
-          <p:cNvPr id="55" name="text-54"/>
+          <p:cNvPr id="81" name="text-80"/>
           <p:cNvSpPr txBox="1"/>
           <p:nvPr/>
         </p:nvSpPr>
         <p:spPr>
           <a:xfrm>
-            <a:off x="4983480" y="11658600"/>
-            <a:ext cx="365760" cy="868680"/>
+            <a:off x="9480042" y="11640312"/>
+            <a:ext cx="256032" cy="640080"/>
           </a:xfrm>
           <a:prstGeom prst="rect">
             <a:avLst/>
@@ -3821,54 +4421,54 @@
               <a:buNone/>
             </a:pPr>
             <a:r>
-              <a:rPr lang="en-US" sz="2600" b="1" dirty="0">
+              <a:rPr lang="en-US" sz="2200" b="1" dirty="0">
                 <a:solidFill>
                   <a:schemeClr val="accent1"/>
                 </a:solidFill>
               </a:rPr>
               <a:t>+</a:t>
             </a:r>
-            <a:endParaRPr lang="en-US" sz="2600" dirty="0"/>
+            <a:endParaRPr lang="en-US" sz="2200" dirty="0"/>
           </a:p>
         </p:txBody>
       </p:sp>
       <p:sp>
         <p:nvSpPr>
-          <p:cNvPr id="56" name="node-55"/>
+          <p:cNvPr id="82" name="node-81"/>
           <p:cNvSpPr/>
           <p:nvPr/>
         </p:nvSpPr>
         <p:spPr>
           <a:xfrm>
-            <a:off x="5349240" y="11658600"/>
-            <a:ext cx="2011680" cy="868680"/>
+            <a:off x="9736074" y="11640312"/>
+            <a:ext cx="1417320" cy="640080"/>
           </a:xfrm>
           <a:prstGeom prst="roundRect">
             <a:avLst>
-              <a:gd name="adj" fmla="val 10526"/>
+              <a:gd name="adj" fmla="val 14286"/>
             </a:avLst>
           </a:prstGeom>
           <a:solidFill>
-            <a:srgbClr val="E1F0E3"/>
+            <a:srgbClr val="FFFFFF"/>
           </a:solidFill>
           <a:ln w="15875">
             <a:solidFill>
-              <a:srgbClr val="E1F0E3"/>
-            </a:solidFill>
-            <a:prstDash val="solid"/>
-          </a:ln>
-        </p:spPr>
-      </p:sp>
-      <p:sp>
-        <p:nvSpPr>
-          <p:cNvPr id="57" name="text-56"/>
+              <a:srgbClr val="8A94A6"/>
+            </a:solidFill>
+            <a:prstDash val="solid"/>
+          </a:ln>
+        </p:spPr>
+      </p:sp>
+      <p:sp>
+        <p:nvSpPr>
+          <p:cNvPr id="83" name="text-82"/>
           <p:cNvSpPr txBox="1"/>
           <p:nvPr/>
         </p:nvSpPr>
         <p:spPr>
           <a:xfrm>
-            <a:off x="5422392" y="11658600"/>
-            <a:ext cx="1865376" cy="868680"/>
+            <a:off x="9809226" y="11640312"/>
+            <a:ext cx="1271016" cy="640080"/>
           </a:xfrm>
           <a:prstGeom prst="rect">
             <a:avLst/>
@@ -3887,44 +4487,27 @@
               <a:buNone/>
             </a:pPr>
             <a:r>
-              <a:rPr lang="en-US" sz="1600" dirty="0">
+              <a:rPr lang="en-US" sz="1450" dirty="0">
                 <a:solidFill>
                   <a:schemeClr val="tx1"/>
                 </a:solidFill>
               </a:rPr>
               <a:t>LightGBM 4종</a:t>
             </a:r>
-            <a:endParaRPr lang="en-US" sz="1600" dirty="0"/>
-          </a:p>
-          <a:p>
-            <a:pPr algn="ctr" indent="0" marL="0">
-              <a:lnSpc>
-                <a:spcPct val="95000"/>
-              </a:lnSpc>
-              <a:buNone/>
-            </a:pPr>
-            <a:r>
-              <a:rPr lang="en-US" sz="1600" dirty="0">
-                <a:solidFill>
-                  <a:schemeClr val="tx1"/>
-                </a:solidFill>
-              </a:rPr>
-              <a:t>(임베딩 PCA 등)</a:t>
-            </a:r>
-            <a:endParaRPr lang="en-US" sz="1600" dirty="0"/>
+            <a:endParaRPr lang="en-US" sz="1450" dirty="0"/>
           </a:p>
         </p:txBody>
       </p:sp>
       <p:sp>
         <p:nvSpPr>
-          <p:cNvPr id="58" name="text-57"/>
+          <p:cNvPr id="84" name="text-83"/>
           <p:cNvSpPr txBox="1"/>
           <p:nvPr/>
         </p:nvSpPr>
         <p:spPr>
           <a:xfrm>
-            <a:off x="7360920" y="11658600"/>
-            <a:ext cx="365760" cy="868680"/>
+            <a:off x="11153394" y="11640312"/>
+            <a:ext cx="256032" cy="640080"/>
           </a:xfrm>
           <a:prstGeom prst="rect">
             <a:avLst/>
@@ -3940,54 +4523,54 @@
               <a:buNone/>
             </a:pPr>
             <a:r>
-              <a:rPr lang="en-US" sz="2600" b="1" dirty="0">
+              <a:rPr lang="en-US" sz="2200" b="1" dirty="0">
                 <a:solidFill>
                   <a:schemeClr val="accent1"/>
                 </a:solidFill>
               </a:rPr>
               <a:t>+</a:t>
             </a:r>
-            <a:endParaRPr lang="en-US" sz="2600" dirty="0"/>
+            <a:endParaRPr lang="en-US" sz="2200" dirty="0"/>
           </a:p>
         </p:txBody>
       </p:sp>
       <p:sp>
         <p:nvSpPr>
-          <p:cNvPr id="59" name="node-58"/>
+          <p:cNvPr id="85" name="node-84"/>
           <p:cNvSpPr/>
           <p:nvPr/>
         </p:nvSpPr>
         <p:spPr>
           <a:xfrm>
-            <a:off x="7726680" y="11658600"/>
-            <a:ext cx="1463040" cy="868680"/>
+            <a:off x="11409426" y="11640312"/>
+            <a:ext cx="868680" cy="640080"/>
           </a:xfrm>
           <a:prstGeom prst="roundRect">
             <a:avLst>
-              <a:gd name="adj" fmla="val 10526"/>
+              <a:gd name="adj" fmla="val 14286"/>
             </a:avLst>
           </a:prstGeom>
           <a:solidFill>
-            <a:srgbClr val="E1F0E3"/>
+            <a:srgbClr val="FFFFFF"/>
           </a:solidFill>
           <a:ln w="15875">
             <a:solidFill>
-              <a:srgbClr val="E1F0E3"/>
-            </a:solidFill>
-            <a:prstDash val="solid"/>
-          </a:ln>
-        </p:spPr>
-      </p:sp>
-      <p:sp>
-        <p:nvSpPr>
-          <p:cNvPr id="60" name="text-59"/>
+              <a:srgbClr val="8A94A6"/>
+            </a:solidFill>
+            <a:prstDash val="solid"/>
+          </a:ln>
+        </p:spPr>
+      </p:sp>
+      <p:sp>
+        <p:nvSpPr>
+          <p:cNvPr id="86" name="text-85"/>
           <p:cNvSpPr txBox="1"/>
           <p:nvPr/>
         </p:nvSpPr>
         <p:spPr>
           <a:xfrm>
-            <a:off x="7799832" y="11658600"/>
-            <a:ext cx="1316736" cy="868680"/>
+            <a:off x="11482578" y="11640312"/>
+            <a:ext cx="722376" cy="640080"/>
           </a:xfrm>
           <a:prstGeom prst="rect">
             <a:avLst/>
@@ -4006,44 +4589,27 @@
               <a:buNone/>
             </a:pPr>
             <a:r>
-              <a:rPr lang="en-US" sz="1600" dirty="0">
+              <a:rPr lang="en-US" sz="1450" dirty="0">
                 <a:solidFill>
                   <a:schemeClr val="tx1"/>
                 </a:solidFill>
               </a:rPr>
               <a:t>Ridge</a:t>
             </a:r>
-            <a:endParaRPr lang="en-US" sz="1600" dirty="0"/>
-          </a:p>
-          <a:p>
-            <a:pPr algn="ctr" indent="0" marL="0">
-              <a:lnSpc>
-                <a:spcPct val="95000"/>
-              </a:lnSpc>
-              <a:buNone/>
-            </a:pPr>
-            <a:r>
-              <a:rPr lang="en-US" sz="1600" dirty="0">
-                <a:solidFill>
-                  <a:schemeClr val="tx1"/>
-                </a:solidFill>
-              </a:rPr>
-              <a:t>선형 기준선</a:t>
-            </a:r>
-            <a:endParaRPr lang="en-US" sz="1600" dirty="0"/>
+            <a:endParaRPr lang="en-US" sz="1450" dirty="0"/>
           </a:p>
         </p:txBody>
       </p:sp>
       <p:sp>
         <p:nvSpPr>
-          <p:cNvPr id="61" name="arrow-60"/>
+          <p:cNvPr id="87" name="arrow-86"/>
           <p:cNvSpPr/>
           <p:nvPr/>
         </p:nvSpPr>
         <p:spPr>
           <a:xfrm>
-            <a:off x="9235440" y="12092940"/>
-            <a:ext cx="274320" cy="0"/>
+            <a:off x="12305538" y="11960352"/>
+            <a:ext cx="201168" cy="0"/>
           </a:xfrm>
           <a:prstGeom prst="line">
             <a:avLst/>
@@ -4060,125 +4626,18 @@
       </p:sp>
       <p:sp>
         <p:nvSpPr>
-          <p:cNvPr id="62" name="node-61"/>
+          <p:cNvPr id="88" name="node-87"/>
           <p:cNvSpPr/>
           <p:nvPr/>
         </p:nvSpPr>
         <p:spPr>
           <a:xfrm>
-            <a:off x="9555480" y="11658600"/>
-            <a:ext cx="2331720" cy="868680"/>
+            <a:off x="12534138" y="11640312"/>
+            <a:ext cx="1691640" cy="640080"/>
           </a:xfrm>
           <a:prstGeom prst="roundRect">
             <a:avLst>
-              <a:gd name="adj" fmla="val 10526"/>
-            </a:avLst>
-          </a:prstGeom>
-          <a:solidFill>
-            <a:srgbClr val="FBE8D0"/>
-          </a:solidFill>
-          <a:ln w="15875">
-            <a:solidFill>
-              <a:srgbClr val="E3A12F"/>
-            </a:solidFill>
-            <a:prstDash val="solid"/>
-          </a:ln>
-        </p:spPr>
-      </p:sp>
-      <p:sp>
-        <p:nvSpPr>
-          <p:cNvPr id="63" name="text-62"/>
-          <p:cNvSpPr txBox="1"/>
-          <p:nvPr/>
-        </p:nvSpPr>
-        <p:spPr>
-          <a:xfrm>
-            <a:off x="9628632" y="11658600"/>
-            <a:ext cx="2185416" cy="868680"/>
-          </a:xfrm>
-          <a:prstGeom prst="rect">
-            <a:avLst/>
-          </a:prstGeom>
-          <a:noFill/>
-          <a:ln/>
-        </p:spPr>
-        <p:txBody>
-          <a:bodyPr wrap="square" lIns="0" tIns="0" rIns="0" bIns="0" rtlCol="0" anchor="ctr"/>
-          <a:lstStyle/>
-          <a:p>
-            <a:pPr algn="ctr" indent="0" marL="0">
-              <a:lnSpc>
-                <a:spcPct val="95000"/>
-              </a:lnSpc>
-              <a:buNone/>
-            </a:pPr>
-            <a:r>
-              <a:rPr lang="en-US" sz="1600" b="1" dirty="0">
-                <a:solidFill>
-                  <a:schemeClr val="tx1"/>
-                </a:solidFill>
-              </a:rPr>
-              <a:t>검증 순위 IC 비례</a:t>
-            </a:r>
-            <a:endParaRPr lang="en-US" sz="1600" dirty="0"/>
-          </a:p>
-          <a:p>
-            <a:pPr algn="ctr" indent="0" marL="0">
-              <a:lnSpc>
-                <a:spcPct val="95000"/>
-              </a:lnSpc>
-              <a:buNone/>
-            </a:pPr>
-            <a:r>
-              <a:rPr lang="en-US" sz="1600" b="1" dirty="0">
-                <a:solidFill>
-                  <a:schemeClr val="tx1"/>
-                </a:solidFill>
-              </a:rPr>
-              <a:t>가중 순위 평균</a:t>
-            </a:r>
-            <a:endParaRPr lang="en-US" sz="1600" dirty="0"/>
-          </a:p>
-        </p:txBody>
-      </p:sp>
-      <p:sp>
-        <p:nvSpPr>
-          <p:cNvPr id="64" name="arrow-63"/>
-          <p:cNvSpPr/>
-          <p:nvPr/>
-        </p:nvSpPr>
-        <p:spPr>
-          <a:xfrm>
-            <a:off x="11932920" y="12092940"/>
-            <a:ext cx="274320" cy="0"/>
-          </a:xfrm>
-          <a:prstGeom prst="line">
-            <a:avLst/>
-          </a:prstGeom>
-          <a:noFill/>
-          <a:ln w="25400">
-            <a:solidFill>
-              <a:srgbClr val="14233F"/>
-            </a:solidFill>
-            <a:prstDash val="solid"/>
-            <a:tailEnd type="triangle"/>
-          </a:ln>
-        </p:spPr>
-      </p:sp>
-      <p:sp>
-        <p:nvSpPr>
-          <p:cNvPr id="65" name="node-64"/>
-          <p:cNvSpPr/>
-          <p:nvPr/>
-        </p:nvSpPr>
-        <p:spPr>
-          <a:xfrm>
-            <a:off x="12252960" y="11658600"/>
-            <a:ext cx="1691640" cy="868680"/>
-          </a:xfrm>
-          <a:prstGeom prst="roundRect">
-            <a:avLst>
-              <a:gd name="adj" fmla="val 10526"/>
+              <a:gd name="adj" fmla="val 14286"/>
             </a:avLst>
           </a:prstGeom>
           <a:solidFill>
@@ -4194,14 +4653,14 @@
       </p:sp>
       <p:sp>
         <p:nvSpPr>
-          <p:cNvPr id="66" name="text-65"/>
+          <p:cNvPr id="89" name="text-88"/>
           <p:cNvSpPr txBox="1"/>
           <p:nvPr/>
         </p:nvSpPr>
         <p:spPr>
           <a:xfrm>
-            <a:off x="12326112" y="11658600"/>
-            <a:ext cx="1545336" cy="868680"/>
+            <a:off x="12607290" y="11640312"/>
+            <a:ext cx="1545336" cy="640080"/>
           </a:xfrm>
           <a:prstGeom prst="rect">
             <a:avLst/>
@@ -4220,26 +4679,26 @@
               <a:buNone/>
             </a:pPr>
             <a:r>
-              <a:rPr lang="en-US" sz="1600" b="1" dirty="0">
+              <a:rPr lang="en-US" sz="1450" b="1" dirty="0">
                 <a:solidFill>
                   <a:schemeClr val="bg1"/>
                 </a:solidFill>
               </a:rPr>
-              <a:t>최종 예측 E6</a:t>
-            </a:r>
-            <a:endParaRPr lang="en-US" sz="1600" dirty="0"/>
+              <a:t>가중 순위 앙상블</a:t>
+            </a:r>
+            <a:endParaRPr lang="en-US" sz="1450" dirty="0"/>
           </a:p>
         </p:txBody>
       </p:sp>
       <p:sp>
         <p:nvSpPr>
-          <p:cNvPr id="67" name="card-66"/>
+          <p:cNvPr id="90" name="card-89"/>
           <p:cNvSpPr/>
           <p:nvPr/>
         </p:nvSpPr>
         <p:spPr>
           <a:xfrm>
-            <a:off x="548640" y="12801600"/>
+            <a:off x="7742682" y="12893040"/>
             <a:ext cx="6828282" cy="4526280"/>
           </a:xfrm>
           <a:prstGeom prst="roundRect">
@@ -4260,13 +4719,13 @@
       </p:sp>
       <p:sp>
         <p:nvSpPr>
-          <p:cNvPr id="68" name="badge-67"/>
+          <p:cNvPr id="91" name="badge-90"/>
           <p:cNvSpPr/>
           <p:nvPr/>
         </p:nvSpPr>
         <p:spPr>
           <a:xfrm>
-            <a:off x="868680" y="13075920"/>
+            <a:off x="8062722" y="13167360"/>
             <a:ext cx="621792" cy="621792"/>
           </a:xfrm>
           <a:prstGeom prst="ellipse">
@@ -4285,13 +4744,13 @@
       </p:sp>
       <p:sp>
         <p:nvSpPr>
-          <p:cNvPr id="69" name="text-68"/>
+          <p:cNvPr id="92" name="text-91"/>
           <p:cNvSpPr txBox="1"/>
           <p:nvPr/>
         </p:nvSpPr>
         <p:spPr>
           <a:xfrm>
-            <a:off x="868680" y="13075920"/>
+            <a:off x="8062722" y="13167360"/>
             <a:ext cx="621792" cy="621792"/>
           </a:xfrm>
           <a:prstGeom prst="rect">
@@ -4321,13 +4780,13 @@
       </p:sp>
       <p:sp>
         <p:nvSpPr>
-          <p:cNvPr id="70" name="text-69"/>
+          <p:cNvPr id="93" name="text-92"/>
           <p:cNvSpPr txBox="1"/>
           <p:nvPr/>
         </p:nvSpPr>
         <p:spPr>
           <a:xfrm>
-            <a:off x="1645920" y="13075920"/>
+            <a:off x="8839962" y="13167360"/>
             <a:ext cx="5456682" cy="621792"/>
           </a:xfrm>
           <a:prstGeom prst="rect">
@@ -4357,18 +4816,18 @@
       </p:sp>
       <p:sp>
         <p:nvSpPr>
-          <p:cNvPr id="71" name="code-bg-70"/>
+          <p:cNvPr id="94" name="code-bg-93"/>
           <p:cNvSpPr/>
           <p:nvPr/>
         </p:nvSpPr>
         <p:spPr>
           <a:xfrm>
-            <a:off x="914400" y="13944600"/>
-            <a:ext cx="6096762" cy="2057400"/>
+            <a:off x="8108442" y="14036040"/>
+            <a:ext cx="6096762" cy="2331720"/>
           </a:xfrm>
           <a:prstGeom prst="roundRect">
             <a:avLst>
-              <a:gd name="adj" fmla="val 3556"/>
+              <a:gd name="adj" fmla="val 3137"/>
             </a:avLst>
           </a:prstGeom>
           <a:solidFill>
@@ -4384,14 +4843,14 @@
       </p:sp>
       <p:sp>
         <p:nvSpPr>
-          <p:cNvPr id="72" name="text-71"/>
+          <p:cNvPr id="95" name="text-94"/>
           <p:cNvSpPr txBox="1"/>
           <p:nvPr/>
         </p:nvSpPr>
         <p:spPr>
           <a:xfrm>
-            <a:off x="1115568" y="14081760"/>
-            <a:ext cx="5731002" cy="1783080"/>
+            <a:off x="8309610" y="14145768"/>
+            <a:ext cx="5731002" cy="2112264"/>
           </a:xfrm>
           <a:prstGeom prst="rect">
             <a:avLst/>
@@ -4410,7 +4869,7 @@
               <a:buNone/>
             </a:pPr>
             <a:r>
-              <a:rPr lang="en-US" sz="1350" dirty="0">
+              <a:rPr lang="en-US" sz="1300" dirty="0">
                 <a:solidFill>
                   <a:srgbClr val="8FA3BF"/>
                 </a:solidFill>
@@ -4420,7 +4879,7 @@
               </a:rPr>
               <a:t># module 3: asymmetric cross-attention</a:t>
             </a:r>
-            <a:endParaRPr lang="en-US" sz="1350" dirty="0"/>
+            <a:endParaRPr lang="en-US" sz="1300" dirty="0"/>
           </a:p>
           <a:p>
             <a:pPr indent="0" marL="0">
@@ -4430,7 +4889,7 @@
               <a:buNone/>
             </a:pPr>
             <a:r>
-              <a:rPr lang="en-US" sz="1350" dirty="0">
+              <a:rPr lang="en-US" sz="1300" dirty="0">
                 <a:solidFill>
                   <a:srgbClr val="E8EDF4"/>
                 </a:solidFill>
@@ -4438,9 +4897,9 @@
                 <a:ea typeface="Courier New" pitchFamily="34" charset="-122"/>
                 <a:cs typeface="Courier New" pitchFamily="34" charset="-120"/>
               </a:rPr>
-              <a:t>q, k, v = Wq(news), Wk(market), Wv(market)</a:t>
-            </a:r>
-            <a:endParaRPr lang="en-US" sz="1350" dirty="0"/>
+              <a:t>q = self.query_proj(news)           # (B, 512)</a:t>
+            </a:r>
+            <a:endParaRPr lang="en-US" sz="1300" dirty="0"/>
           </a:p>
           <a:p>
             <a:pPr indent="0" marL="0">
@@ -4450,7 +4909,7 @@
               <a:buNone/>
             </a:pPr>
             <a:r>
-              <a:rPr lang="en-US" sz="1350" dirty="0">
+              <a:rPr lang="en-US" sz="1300" dirty="0">
                 <a:solidFill>
                   <a:srgbClr val="E8EDF4"/>
                 </a:solidFill>
@@ -4458,9 +4917,9 @@
                 <a:ea typeface="Courier New" pitchFamily="34" charset="-122"/>
                 <a:cs typeface="Courier New" pitchFamily="34" charset="-120"/>
               </a:rPr>
-              <a:t>w = softmax(einsum('bd,btd-&gt;bt', q, k) * scale)</a:t>
-            </a:r>
-            <a:endParaRPr lang="en-US" sz="1350" dirty="0"/>
+              <a:t>k = self.key_proj(market)           # (B, 30, 512)</a:t>
+            </a:r>
+            <a:endParaRPr lang="en-US" sz="1300" dirty="0"/>
           </a:p>
           <a:p>
             <a:pPr indent="0" marL="0">
@@ -4470,7 +4929,7 @@
               <a:buNone/>
             </a:pPr>
             <a:r>
-              <a:rPr lang="en-US" sz="1350" dirty="0">
+              <a:rPr lang="en-US" sz="1300" dirty="0">
                 <a:solidFill>
                   <a:srgbClr val="E8EDF4"/>
                 </a:solidFill>
@@ -4478,9 +4937,9 @@
                 <a:ea typeface="Courier New" pitchFamily="34" charset="-122"/>
                 <a:cs typeface="Courier New" pitchFamily="34" charset="-120"/>
               </a:rPr>
-              <a:t>c = einsum('bt,btd-&gt;bd', w, v)   # (B, 512)</a:t>
-            </a:r>
-            <a:endParaRPr lang="en-US" sz="1350" dirty="0"/>
+              <a:t>v = self.value_proj(market)</a:t>
+            </a:r>
+            <a:endParaRPr lang="en-US" sz="1300" dirty="0"/>
           </a:p>
           <a:p>
             <a:pPr indent="0" marL="0">
@@ -4490,17 +4949,17 @@
               <a:buNone/>
             </a:pPr>
             <a:r>
-              <a:rPr lang="en-US" sz="1350" dirty="0">
-                <a:solidFill>
-                  <a:srgbClr val="8FA3BF"/>
+              <a:rPr lang="en-US" sz="1300" dirty="0">
+                <a:solidFill>
+                  <a:srgbClr val="E8EDF4"/>
                 </a:solidFill>
                 <a:latin typeface="Courier New" pitchFamily="34" charset="0"/>
                 <a:ea typeface="Courier New" pitchFamily="34" charset="-122"/>
                 <a:cs typeface="Courier New" pitchFamily="34" charset="-120"/>
               </a:rPr>
-              <a:t># module 4: gated residual fusion</a:t>
-            </a:r>
-            <a:endParaRPr lang="en-US" sz="1350" dirty="0"/>
+              <a:t>w = softmax(einsum('bd,btd-&gt;bt', q, k) * scale)</a:t>
+            </a:r>
+            <a:endParaRPr lang="en-US" sz="1300" dirty="0"/>
           </a:p>
           <a:p>
             <a:pPr indent="0" marL="0">
@@ -4510,7 +4969,7 @@
               <a:buNone/>
             </a:pPr>
             <a:r>
-              <a:rPr lang="en-US" sz="1350" dirty="0">
+              <a:rPr lang="en-US" sz="1300" dirty="0">
                 <a:solidFill>
                   <a:srgbClr val="E8EDF4"/>
                 </a:solidFill>
@@ -4518,9 +4977,9 @@
                 <a:ea typeface="Courier New" pitchFamily="34" charset="-122"/>
                 <a:cs typeface="Courier New" pitchFamily="34" charset="-120"/>
               </a:rPr>
-              <a:t>h = news + sigmoid(gate([news, c])) * c</a:t>
-            </a:r>
-            <a:endParaRPr lang="en-US" sz="1350" dirty="0"/>
+              <a:t>c = einsum('bt,btd-&gt;bd', w, v)      # (B, 512)</a:t>
+            </a:r>
+            <a:endParaRPr lang="en-US" sz="1300" dirty="0"/>
           </a:p>
           <a:p>
             <a:pPr indent="0" marL="0">
@@ -4530,7 +4989,7 @@
               <a:buNone/>
             </a:pPr>
             <a:r>
-              <a:rPr lang="en-US" sz="1350" dirty="0">
+              <a:rPr lang="en-US" sz="1300" dirty="0">
                 <a:solidFill>
                   <a:srgbClr val="8FA3BF"/>
                 </a:solidFill>
@@ -4538,9 +4997,9 @@
                 <a:ea typeface="Courier New" pitchFamily="34" charset="-122"/>
                 <a:cs typeface="Courier New" pitchFamily="34" charset="-120"/>
               </a:rPr>
-              <a:t># final: validation-IC weighted rank ensemble</a:t>
-            </a:r>
-            <a:endParaRPr lang="en-US" sz="1350" dirty="0"/>
+              <a:t># module 4: gated residual fusion</a:t>
+            </a:r>
+            <a:endParaRPr lang="en-US" sz="1300" dirty="0"/>
           </a:p>
           <a:p>
             <a:pPr indent="0" marL="0">
@@ -4550,7 +5009,7 @@
               <a:buNone/>
             </a:pPr>
             <a:r>
-              <a:rPr lang="en-US" sz="1350" dirty="0">
+              <a:rPr lang="en-US" sz="1300" dirty="0">
                 <a:solidFill>
                   <a:srgbClr val="E8EDF4"/>
                 </a:solidFill>
@@ -4558,9 +5017,9 @@
                 <a:ea typeface="Courier New" pitchFamily="34" charset="-122"/>
                 <a:cs typeface="Courier New" pitchFamily="34" charset="-120"/>
               </a:rPr>
-              <a:t>wt = [max(ric(p_val[m], y_val), 0) for m in M]</a:t>
-            </a:r>
-            <a:endParaRPr lang="en-US" sz="1350" dirty="0"/>
+              <a:t>g = sigmoid(self.gate_net(cat([news, c], -1)))</a:t>
+            </a:r>
+            <a:endParaRPr lang="en-US" sz="1300" dirty="0"/>
           </a:p>
           <a:p>
             <a:pPr indent="0" marL="0">
@@ -4570,7 +5029,7 @@
               <a:buNone/>
             </a:pPr>
             <a:r>
-              <a:rPr lang="en-US" sz="1350" dirty="0">
+              <a:rPr lang="en-US" sz="1300" dirty="0">
                 <a:solidFill>
                   <a:srgbClr val="E8EDF4"/>
                 </a:solidFill>
@@ -4578,22 +5037,62 @@
                 <a:ea typeface="Courier New" pitchFamily="34" charset="-122"/>
                 <a:cs typeface="Courier New" pitchFamily="34" charset="-120"/>
               </a:rPr>
-              <a:t>final = sum(w * rank(p_test[m]) for w, m in zip(wt, M))</a:t>
-            </a:r>
-            <a:endParaRPr lang="en-US" sz="1350" dirty="0"/>
+              <a:t>h = news + g * c                    # (B, 512)</a:t>
+            </a:r>
+            <a:endParaRPr lang="en-US" sz="1300" dirty="0"/>
+          </a:p>
+          <a:p>
+            <a:pPr indent="0" marL="0">
+              <a:lnSpc>
+                <a:spcPct val="100000"/>
+              </a:lnSpc>
+              <a:buNone/>
+            </a:pPr>
+            <a:r>
+              <a:rPr lang="en-US" sz="1300" dirty="0">
+                <a:solidFill>
+                  <a:srgbClr val="8FA3BF"/>
+                </a:solidFill>
+                <a:latin typeface="Courier New" pitchFamily="34" charset="0"/>
+                <a:ea typeface="Courier New" pitchFamily="34" charset="-122"/>
+                <a:cs typeface="Courier New" pitchFamily="34" charset="-120"/>
+              </a:rPr>
+              <a:t># final: validation-IC weighted rank ensemble</a:t>
+            </a:r>
+            <a:endParaRPr lang="en-US" sz="1300" dirty="0"/>
+          </a:p>
+          <a:p>
+            <a:pPr indent="0" marL="0">
+              <a:lnSpc>
+                <a:spcPct val="100000"/>
+              </a:lnSpc>
+              <a:buNone/>
+            </a:pPr>
+            <a:r>
+              <a:rPr lang="en-US" sz="1300" dirty="0">
+                <a:solidFill>
+                  <a:srgbClr val="E8EDF4"/>
+                </a:solidFill>
+                <a:latin typeface="Courier New" pitchFamily="34" charset="0"/>
+                <a:ea typeface="Courier New" pitchFamily="34" charset="-122"/>
+                <a:cs typeface="Courier New" pitchFamily="34" charset="-120"/>
+              </a:rPr>
+              <a:t>final = sum(w[m] * rank(p_test[m]) for m in M)</a:t>
+            </a:r>
+            <a:endParaRPr lang="en-US" sz="1300" dirty="0"/>
           </a:p>
         </p:txBody>
       </p:sp>
       <p:sp>
         <p:nvSpPr>
-          <p:cNvPr id="73" name="text-72"/>
+          <p:cNvPr id="96" name="text-95"/>
           <p:cNvSpPr txBox="1"/>
           <p:nvPr/>
         </p:nvSpPr>
         <p:spPr>
           <a:xfrm>
-            <a:off x="914400" y="16184880"/>
-            <a:ext cx="6096762" cy="868680"/>
+            <a:off x="8108442" y="16504920"/>
+            <a:ext cx="6096762" cy="640080"/>
           </a:xfrm>
           <a:prstGeom prst="rect">
             <a:avLst/>
@@ -4681,62 +5180,22 @@
             </a:r>
             <a:endParaRPr lang="en-US" sz="1500" dirty="0"/>
           </a:p>
-          <a:p>
-            <a:pPr indent="0" marL="0">
-              <a:lnSpc>
-                <a:spcPct val="105000"/>
-              </a:lnSpc>
-              <a:spcAft>
-                <a:spcPts val="400"/>
-              </a:spcAft>
-              <a:buNone/>
-            </a:pPr>
-            <a:r>
-              <a:rPr lang="en-US" sz="1500" b="1" dirty="0">
-                <a:solidFill>
-                  <a:schemeClr val="accent1"/>
-                </a:solidFill>
-                <a:latin typeface="Courier New" pitchFamily="34" charset="0"/>
-                <a:ea typeface="Courier New" pitchFamily="34" charset="-122"/>
-                <a:cs typeface="Courier New" pitchFamily="34" charset="-120"/>
-              </a:rPr>
-              <a:t>run_edt_suite3.py  </a:t>
-            </a:r>
-            <a:pPr indent="0" marL="0">
-              <a:lnSpc>
-                <a:spcPct val="105000"/>
-              </a:lnSpc>
-              <a:spcAft>
-                <a:spcPts val="400"/>
-              </a:spcAft>
-              <a:buNone/>
-            </a:pPr>
-            <a:r>
-              <a:rPr lang="en-US" sz="1500" dirty="0">
-                <a:solidFill>
-                  <a:schemeClr val="tx1"/>
-                </a:solidFill>
-              </a:rPr>
-              <a:t>개선 구조 학습 · 앙상블 · 평가</a:t>
-            </a:r>
-            <a:endParaRPr lang="en-US" sz="1500" dirty="0"/>
-          </a:p>
         </p:txBody>
       </p:sp>
       <p:sp>
         <p:nvSpPr>
-          <p:cNvPr id="74" name="card-73"/>
+          <p:cNvPr id="97" name="card-96"/>
           <p:cNvSpPr/>
           <p:nvPr/>
         </p:nvSpPr>
         <p:spPr>
           <a:xfrm>
-            <a:off x="548640" y="17602200"/>
-            <a:ext cx="6828282" cy="3324758"/>
+            <a:off x="7742682" y="17693640"/>
+            <a:ext cx="6828282" cy="3233318"/>
           </a:xfrm>
           <a:prstGeom prst="roundRect">
             <a:avLst>
-              <a:gd name="adj" fmla="val 4950"/>
+              <a:gd name="adj" fmla="val 5090"/>
             </a:avLst>
           </a:prstGeom>
           <a:solidFill>
@@ -4752,13 +5211,13 @@
       </p:sp>
       <p:sp>
         <p:nvSpPr>
-          <p:cNvPr id="75" name="badge-74"/>
+          <p:cNvPr id="98" name="badge-97"/>
           <p:cNvSpPr/>
           <p:nvPr/>
         </p:nvSpPr>
         <p:spPr>
           <a:xfrm>
-            <a:off x="868680" y="17876520"/>
+            <a:off x="8062722" y="17967960"/>
             <a:ext cx="621792" cy="621792"/>
           </a:xfrm>
           <a:prstGeom prst="ellipse">
@@ -4777,13 +5236,13 @@
       </p:sp>
       <p:sp>
         <p:nvSpPr>
-          <p:cNvPr id="76" name="text-75"/>
+          <p:cNvPr id="99" name="text-98"/>
           <p:cNvSpPr txBox="1"/>
           <p:nvPr/>
         </p:nvSpPr>
         <p:spPr>
           <a:xfrm>
-            <a:off x="868680" y="17876520"/>
+            <a:off x="8062722" y="17967960"/>
             <a:ext cx="621792" cy="621792"/>
           </a:xfrm>
           <a:prstGeom prst="rect">
@@ -4813,13 +5272,13 @@
       </p:sp>
       <p:sp>
         <p:nvSpPr>
-          <p:cNvPr id="77" name="text-76"/>
+          <p:cNvPr id="100" name="text-99"/>
           <p:cNvSpPr txBox="1"/>
           <p:nvPr/>
         </p:nvSpPr>
         <p:spPr>
           <a:xfrm>
-            <a:off x="1645920" y="17876520"/>
+            <a:off x="8839962" y="17967960"/>
             <a:ext cx="5456682" cy="621792"/>
           </a:xfrm>
           <a:prstGeom prst="rect">
@@ -4849,14 +5308,14 @@
       </p:sp>
       <p:sp>
         <p:nvSpPr>
-          <p:cNvPr id="78" name="text-77"/>
+          <p:cNvPr id="101" name="text-100"/>
           <p:cNvSpPr txBox="1"/>
           <p:nvPr/>
         </p:nvSpPr>
         <p:spPr>
           <a:xfrm>
-            <a:off x="914400" y="18745200"/>
-            <a:ext cx="6096762" cy="1907438"/>
+            <a:off x="8108442" y="18836640"/>
+            <a:ext cx="6096762" cy="1815998"/>
           </a:xfrm>
           <a:prstGeom prst="rect">
             <a:avLst/>
@@ -4876,7 +5335,7 @@
               <a:buChar char="•"/>
             </a:pPr>
             <a:r>
-              <a:rPr lang="en-US" sz="1750" b="1" dirty="0">
+              <a:rPr lang="en-US" sz="1800" b="1" dirty="0">
                 <a:solidFill>
                   <a:schemeClr val="accent1"/>
                 </a:solidFill>
@@ -4888,19 +5347,19 @@
                 <a:spcPct val="105000"/>
               </a:lnSpc>
               <a:spcAft>
-                <a:spcPts val="500"/>
+                <a:spcPts val="600"/>
               </a:spcAft>
               <a:buNone/>
             </a:pPr>
             <a:r>
-              <a:rPr lang="en-US" sz="1750" dirty="0">
+              <a:rPr lang="en-US" sz="1800" dirty="0">
                 <a:solidFill>
                   <a:schemeClr val="tx1"/>
                 </a:solidFill>
               </a:rPr>
               <a:t>이벤트 정보·순위 손실·앙상블로 순위 IC 0.060 → 0.092 (차이 유의)</a:t>
             </a:r>
-            <a:endParaRPr lang="en-US" sz="1750" dirty="0"/>
+            <a:endParaRPr lang="en-US" sz="1800" dirty="0"/>
           </a:p>
           <a:p>
             <a:pPr marL="228600" indent="-228600">
@@ -4911,7 +5370,7 @@
               <a:buChar char="•"/>
             </a:pPr>
             <a:r>
-              <a:rPr lang="en-US" sz="1750" b="1" dirty="0">
+              <a:rPr lang="en-US" sz="1800" b="1" dirty="0">
                 <a:solidFill>
                   <a:schemeClr val="accent1"/>
                 </a:solidFill>
@@ -4923,19 +5382,19 @@
                 <a:spcPct val="105000"/>
               </a:lnSpc>
               <a:spcAft>
-                <a:spcPts val="500"/>
+                <a:spcPts val="600"/>
               </a:spcAft>
               <a:buNone/>
             </a:pPr>
             <a:r>
-              <a:rPr lang="en-US" sz="1750" dirty="0">
+              <a:rPr lang="en-US" sz="1800" dirty="0">
                 <a:solidFill>
                   <a:schemeClr val="tx1"/>
                 </a:solidFill>
               </a:rPr>
               <a:t>자사주 매입은 상승, 임상 승인·신규 계약 같은 홍보성 호재는 하락을 학습</a:t>
             </a:r>
-            <a:endParaRPr lang="en-US" sz="1750" dirty="0"/>
+            <a:endParaRPr lang="en-US" sz="1800" dirty="0"/>
           </a:p>
           <a:p>
             <a:pPr marL="228600" indent="-228600">
@@ -4946,7 +5405,7 @@
               <a:buChar char="•"/>
             </a:pPr>
             <a:r>
-              <a:rPr lang="en-US" sz="1750" b="1" dirty="0">
+              <a:rPr lang="en-US" sz="1800" b="1" dirty="0">
                 <a:solidFill>
                   <a:schemeClr val="accent1"/>
                 </a:solidFill>
@@ -4958,32 +5417,32 @@
                 <a:spcPct val="105000"/>
               </a:lnSpc>
               <a:spcAft>
-                <a:spcPts val="500"/>
+                <a:spcPts val="600"/>
               </a:spcAft>
               <a:buNone/>
             </a:pPr>
             <a:r>
-              <a:rPr lang="en-US" sz="1750" dirty="0">
+              <a:rPr lang="en-US" sz="1800" dirty="0">
                 <a:solidFill>
                   <a:schemeClr val="tx1"/>
                 </a:solidFill>
               </a:rPr>
               <a:t>거래비용 반영 시 수익 소멸, 일반 뉴스(FNSPID)에서는 비유의</a:t>
             </a:r>
-            <a:endParaRPr lang="en-US" sz="1750" dirty="0"/>
+            <a:endParaRPr lang="en-US" sz="1800" dirty="0"/>
           </a:p>
         </p:txBody>
       </p:sp>
       <p:sp>
         <p:nvSpPr>
-          <p:cNvPr id="79" name="card-78"/>
+          <p:cNvPr id="102" name="card-101"/>
           <p:cNvSpPr/>
           <p:nvPr/>
         </p:nvSpPr>
         <p:spPr>
           <a:xfrm>
-            <a:off x="7742682" y="12801600"/>
-            <a:ext cx="6828282" cy="8125358"/>
+            <a:off x="548640" y="12893040"/>
+            <a:ext cx="6828282" cy="8033918"/>
           </a:xfrm>
           <a:prstGeom prst="roundRect">
             <a:avLst>
@@ -5003,13 +5462,13 @@
       </p:sp>
       <p:sp>
         <p:nvSpPr>
-          <p:cNvPr id="80" name="badge-79"/>
+          <p:cNvPr id="103" name="badge-102"/>
           <p:cNvSpPr/>
           <p:nvPr/>
         </p:nvSpPr>
         <p:spPr>
           <a:xfrm>
-            <a:off x="8062722" y="13075920"/>
+            <a:off x="868680" y="13167360"/>
             <a:ext cx="621792" cy="621792"/>
           </a:xfrm>
           <a:prstGeom prst="ellipse">
@@ -5028,13 +5487,13 @@
       </p:sp>
       <p:sp>
         <p:nvSpPr>
-          <p:cNvPr id="81" name="text-80"/>
+          <p:cNvPr id="104" name="text-103"/>
           <p:cNvSpPr txBox="1"/>
           <p:nvPr/>
         </p:nvSpPr>
         <p:spPr>
           <a:xfrm>
-            <a:off x="8062722" y="13075920"/>
+            <a:off x="868680" y="13167360"/>
             <a:ext cx="621792" cy="621792"/>
           </a:xfrm>
           <a:prstGeom prst="rect">
@@ -5064,13 +5523,13 @@
       </p:sp>
       <p:sp>
         <p:nvSpPr>
-          <p:cNvPr id="82" name="text-81"/>
+          <p:cNvPr id="105" name="text-104"/>
           <p:cNvSpPr txBox="1"/>
           <p:nvPr/>
         </p:nvSpPr>
         <p:spPr>
           <a:xfrm>
-            <a:off x="8839962" y="13075920"/>
+            <a:off x="1645920" y="13167360"/>
             <a:ext cx="5456682" cy="621792"/>
           </a:xfrm>
           <a:prstGeom prst="rect">
@@ -5100,13 +5559,13 @@
       </p:sp>
       <p:sp>
         <p:nvSpPr>
-          <p:cNvPr id="83" name="text-82"/>
+          <p:cNvPr id="106" name="text-105"/>
           <p:cNvSpPr txBox="1"/>
           <p:nvPr/>
         </p:nvSpPr>
         <p:spPr>
           <a:xfrm>
-            <a:off x="8108442" y="13944600"/>
+            <a:off x="914400" y="14036040"/>
             <a:ext cx="6096762" cy="685800"/>
           </a:xfrm>
           <a:prstGeom prst="rect">
@@ -5184,13 +5643,13 @@
       </p:sp>
       <p:sp>
         <p:nvSpPr>
-          <p:cNvPr id="84" name="stat-83"/>
+          <p:cNvPr id="107" name="stat-106"/>
           <p:cNvSpPr/>
           <p:nvPr/>
         </p:nvSpPr>
         <p:spPr>
           <a:xfrm>
-            <a:off x="8108442" y="14767560"/>
+            <a:off x="914400" y="14859000"/>
             <a:ext cx="1910334" cy="1508760"/>
           </a:xfrm>
           <a:prstGeom prst="roundRect">
@@ -5211,13 +5670,13 @@
       </p:sp>
       <p:sp>
         <p:nvSpPr>
-          <p:cNvPr id="85" name="text-84"/>
+          <p:cNvPr id="108" name="text-107"/>
           <p:cNvSpPr txBox="1"/>
           <p:nvPr/>
         </p:nvSpPr>
         <p:spPr>
           <a:xfrm>
-            <a:off x="8108442" y="14877288"/>
+            <a:off x="914400" y="14968728"/>
             <a:ext cx="1910334" cy="731520"/>
           </a:xfrm>
           <a:prstGeom prst="rect">
@@ -5247,13 +5706,13 @@
       </p:sp>
       <p:sp>
         <p:nvSpPr>
-          <p:cNvPr id="86" name="text-85"/>
+          <p:cNvPr id="109" name="text-108"/>
           <p:cNvSpPr txBox="1"/>
           <p:nvPr/>
         </p:nvSpPr>
         <p:spPr>
           <a:xfrm>
-            <a:off x="8181594" y="15471648"/>
+            <a:off x="987552" y="15563088"/>
             <a:ext cx="1764030" cy="731520"/>
           </a:xfrm>
           <a:prstGeom prst="rect">
@@ -5297,13 +5756,13 @@
       </p:sp>
       <p:sp>
         <p:nvSpPr>
-          <p:cNvPr id="87" name="stat-86"/>
+          <p:cNvPr id="110" name="stat-109"/>
           <p:cNvSpPr/>
           <p:nvPr/>
         </p:nvSpPr>
         <p:spPr>
           <a:xfrm>
-            <a:off x="10201656" y="14767560"/>
+            <a:off x="3007614" y="14859000"/>
             <a:ext cx="1910334" cy="1508760"/>
           </a:xfrm>
           <a:prstGeom prst="roundRect">
@@ -5324,13 +5783,13 @@
       </p:sp>
       <p:sp>
         <p:nvSpPr>
-          <p:cNvPr id="88" name="text-87"/>
+          <p:cNvPr id="111" name="text-110"/>
           <p:cNvSpPr txBox="1"/>
           <p:nvPr/>
         </p:nvSpPr>
         <p:spPr>
           <a:xfrm>
-            <a:off x="10201656" y="14877288"/>
+            <a:off x="3007614" y="14968728"/>
             <a:ext cx="1910334" cy="731520"/>
           </a:xfrm>
           <a:prstGeom prst="rect">
@@ -5360,13 +5819,13 @@
       </p:sp>
       <p:sp>
         <p:nvSpPr>
-          <p:cNvPr id="89" name="text-88"/>
+          <p:cNvPr id="112" name="text-111"/>
           <p:cNvSpPr txBox="1"/>
           <p:nvPr/>
         </p:nvSpPr>
         <p:spPr>
           <a:xfrm>
-            <a:off x="10274808" y="15471648"/>
+            <a:off x="3080766" y="15563088"/>
             <a:ext cx="1764030" cy="731520"/>
           </a:xfrm>
           <a:prstGeom prst="rect">
@@ -5410,13 +5869,13 @@
       </p:sp>
       <p:sp>
         <p:nvSpPr>
-          <p:cNvPr id="90" name="stat-89"/>
+          <p:cNvPr id="113" name="stat-112"/>
           <p:cNvSpPr/>
           <p:nvPr/>
         </p:nvSpPr>
         <p:spPr>
           <a:xfrm>
-            <a:off x="12294870" y="14767560"/>
+            <a:off x="5100828" y="14859000"/>
             <a:ext cx="1910334" cy="1508760"/>
           </a:xfrm>
           <a:prstGeom prst="roundRect">
@@ -5437,13 +5896,13 @@
       </p:sp>
       <p:sp>
         <p:nvSpPr>
-          <p:cNvPr id="91" name="text-90"/>
+          <p:cNvPr id="114" name="text-113"/>
           <p:cNvSpPr txBox="1"/>
           <p:nvPr/>
         </p:nvSpPr>
         <p:spPr>
           <a:xfrm>
-            <a:off x="12294870" y="14877288"/>
+            <a:off x="5100828" y="14968728"/>
             <a:ext cx="1910334" cy="731520"/>
           </a:xfrm>
           <a:prstGeom prst="rect">
@@ -5473,13 +5932,13 @@
       </p:sp>
       <p:sp>
         <p:nvSpPr>
-          <p:cNvPr id="92" name="text-91"/>
+          <p:cNvPr id="115" name="text-114"/>
           <p:cNvSpPr txBox="1"/>
           <p:nvPr/>
         </p:nvSpPr>
         <p:spPr>
           <a:xfrm>
-            <a:off x="12368022" y="15471648"/>
+            <a:off x="5173980" y="15563088"/>
             <a:ext cx="1764030" cy="731520"/>
           </a:xfrm>
           <a:prstGeom prst="rect">
@@ -5523,13 +5982,13 @@
       </p:sp>
       <p:graphicFrame>
         <p:nvGraphicFramePr>
-          <p:cNvPr id="93" name="chart-ic" descr=""/>
+          <p:cNvPr id="116" name="chart-ic" descr=""/>
           <p:cNvGraphicFramePr/>
           <p:nvPr/>
         </p:nvGraphicFramePr>
         <p:xfrm>
-          <a:off x="8108442" y="16459200"/>
-          <a:ext cx="6096762" cy="2011680"/>
+          <a:off x="914400" y="16550640"/>
+          <a:ext cx="6096762" cy="2103120"/>
         </p:xfrm>
         <a:graphic xmlns:a="http://schemas.openxmlformats.org/drawingml/2006/main">
           <a:graphicData uri="http://schemas.openxmlformats.org/drawingml/2006/chart">
@@ -5539,13 +5998,13 @@
       </p:graphicFrame>
       <p:graphicFrame>
         <p:nvGraphicFramePr>
-          <p:cNvPr id="94" name="chart-window" descr=""/>
+          <p:cNvPr id="117" name="chart-window" descr=""/>
           <p:cNvGraphicFramePr/>
           <p:nvPr/>
         </p:nvGraphicFramePr>
         <p:xfrm>
-          <a:off x="8108442" y="18608040"/>
-          <a:ext cx="6096762" cy="2090318"/>
+          <a:off x="914400" y="18790920"/>
+          <a:ext cx="6096762" cy="1907438"/>
         </p:xfrm>
         <a:graphic xmlns:a="http://schemas.openxmlformats.org/drawingml/2006/main">
           <a:graphicData uri="http://schemas.openxmlformats.org/drawingml/2006/chart">

--- a/docs/exhibition/패널_B_최고성능.pptx
+++ b/docs/exhibition/패널_B_최고성능.pptx
@@ -107,7 +107,7 @@
   <p:extLst>
     <p:ext uri="{521415D9-36F7-43E2-AB2F-B90AF26B5E84}">
       <p14:sectionLst xmlns:p14="http://schemas.microsoft.com/office/powerpoint/2010/main">
-        <p14:section name="패널" id="{0123f2aa-f969-75c8-c9d9-b50b8276cad6}">
+        <p14:section name="패널" id="{6be07f60-6744-09f9-05ed-760c6243b3fd}">
           <p14:sldIdLst>
             <p14:sldId id="256"/>
           </p14:sldIdLst>
@@ -4699,11 +4699,11 @@
         <p:spPr>
           <a:xfrm>
             <a:off x="7742682" y="12893040"/>
-            <a:ext cx="6828282" cy="4526280"/>
+            <a:ext cx="6828282" cy="4663440"/>
           </a:xfrm>
           <a:prstGeom prst="roundRect">
             <a:avLst>
-              <a:gd name="adj" fmla="val 3636"/>
+              <a:gd name="adj" fmla="val 3529"/>
             </a:avLst>
           </a:prstGeom>
           <a:solidFill>
@@ -4814,43 +4814,40 @@
           </a:p>
         </p:txBody>
       </p:sp>
-      <p:sp>
-        <p:nvSpPr>
-          <p:cNvPr id="94" name="code-bg-93"/>
-          <p:cNvSpPr/>
-          <p:nvPr/>
-        </p:nvSpPr>
+      <p:pic>
+        <p:nvPicPr>
+          <p:cNvPr id="94" name="qr" descr="GitHub 저장소 QR 코드">    </p:cNvPr>
+          <p:cNvPicPr>
+            <a:picLocks noChangeAspect="1"/>
+          </p:cNvPicPr>
+          <p:nvPr/>
+        </p:nvPicPr>
+        <p:blipFill>
+          <a:blip r:embed="rId1"/>
+          <a:stretch>
+            <a:fillRect/>
+          </a:stretch>
+        </p:blipFill>
         <p:spPr>
           <a:xfrm>
             <a:off x="8108442" y="14036040"/>
-            <a:ext cx="6096762" cy="2331720"/>
-          </a:xfrm>
-          <a:prstGeom prst="roundRect">
-            <a:avLst>
-              <a:gd name="adj" fmla="val 3137"/>
-            </a:avLst>
-          </a:prstGeom>
-          <a:solidFill>
-            <a:srgbClr val="1E2533"/>
-          </a:solidFill>
-          <a:ln w="12700">
-            <a:solidFill>
-              <a:srgbClr val="1E2533"/>
-            </a:solidFill>
-            <a:prstDash val="solid"/>
-          </a:ln>
-        </p:spPr>
-      </p:sp>
-      <p:sp>
-        <p:nvSpPr>
-          <p:cNvPr id="95" name="text-94"/>
+            <a:ext cx="1371600" cy="1371600"/>
+          </a:xfrm>
+          <a:prstGeom prst="rect">
+            <a:avLst/>
+          </a:prstGeom>
+        </p:spPr>
+      </p:pic>
+      <p:sp>
+        <p:nvSpPr>
+          <p:cNvPr id="95" name="text-93"/>
           <p:cNvSpPr txBox="1"/>
           <p:nvPr/>
         </p:nvSpPr>
         <p:spPr>
           <a:xfrm>
-            <a:off x="8309610" y="14145768"/>
-            <a:ext cx="5731002" cy="2112264"/>
+            <a:off x="9754362" y="14036040"/>
+            <a:ext cx="4450842" cy="1371600"/>
           </a:xfrm>
           <a:prstGeom prst="rect">
             <a:avLst/>
@@ -4863,339 +4860,901 @@
           <a:lstStyle/>
           <a:p>
             <a:pPr indent="0" marL="0">
-              <a:lnSpc>
-                <a:spcPct val="100000"/>
-              </a:lnSpc>
-              <a:buNone/>
-            </a:pPr>
-            <a:r>
-              <a:rPr lang="en-US" sz="1300" dirty="0">
-                <a:solidFill>
-                  <a:srgbClr val="8FA3BF"/>
-                </a:solidFill>
-                <a:latin typeface="Courier New" pitchFamily="34" charset="0"/>
-                <a:ea typeface="Courier New" pitchFamily="34" charset="-122"/>
-                <a:cs typeface="Courier New" pitchFamily="34" charset="-120"/>
-              </a:rPr>
-              <a:t># module 3: asymmetric cross-attention</a:t>
-            </a:r>
-            <a:endParaRPr lang="en-US" sz="1300" dirty="0"/>
+              <a:spcAft>
+                <a:spcPts val="600"/>
+              </a:spcAft>
+              <a:buNone/>
+            </a:pPr>
+            <a:r>
+              <a:rPr lang="en-US" sz="1700" b="1" dirty="0">
+                <a:solidFill>
+                  <a:schemeClr val="accent1"/>
+                </a:solidFill>
+              </a:rPr>
+              <a:t>GitHub 저장소</a:t>
+            </a:r>
+            <a:endParaRPr lang="en-US" sz="1700" dirty="0"/>
           </a:p>
           <a:p>
             <a:pPr indent="0" marL="0">
-              <a:lnSpc>
-                <a:spcPct val="100000"/>
-              </a:lnSpc>
-              <a:buNone/>
-            </a:pPr>
-            <a:r>
-              <a:rPr lang="en-US" sz="1300" dirty="0">
-                <a:solidFill>
-                  <a:srgbClr val="E8EDF4"/>
-                </a:solidFill>
-                <a:latin typeface="Courier New" pitchFamily="34" charset="0"/>
-                <a:ea typeface="Courier New" pitchFamily="34" charset="-122"/>
-                <a:cs typeface="Courier New" pitchFamily="34" charset="-120"/>
-              </a:rPr>
-              <a:t>q = self.query_proj(news)           # (B, 512)</a:t>
-            </a:r>
-            <a:endParaRPr lang="en-US" sz="1300" dirty="0"/>
+              <a:spcAft>
+                <a:spcPts val="600"/>
+              </a:spcAft>
+              <a:buNone/>
+            </a:pPr>
+            <a:r>
+              <a:rPr lang="en-US" sz="1700" b="1" dirty="0">
+                <a:solidFill>
+                  <a:schemeClr val="accent3"/>
+                </a:solidFill>
+              </a:rPr>
+              <a:t>github.com/kimsangmin1234/jolup</a:t>
+            </a:r>
+            <a:endParaRPr lang="en-US" sz="1700" dirty="0"/>
           </a:p>
           <a:p>
             <a:pPr indent="0" marL="0">
-              <a:lnSpc>
-                <a:spcPct val="100000"/>
-              </a:lnSpc>
-              <a:buNone/>
-            </a:pPr>
-            <a:r>
-              <a:rPr lang="en-US" sz="1300" dirty="0">
-                <a:solidFill>
-                  <a:srgbClr val="E8EDF4"/>
-                </a:solidFill>
-                <a:latin typeface="Courier New" pitchFamily="34" charset="0"/>
-                <a:ea typeface="Courier New" pitchFamily="34" charset="-122"/>
-                <a:cs typeface="Courier New" pitchFamily="34" charset="-120"/>
-              </a:rPr>
-              <a:t>k = self.key_proj(market)           # (B, 30, 512)</a:t>
-            </a:r>
-            <a:endParaRPr lang="en-US" sz="1300" dirty="0"/>
-          </a:p>
-          <a:p>
+              <a:spcAft>
+                <a:spcPts val="600"/>
+              </a:spcAft>
+              <a:buNone/>
+            </a:pPr>
+            <a:r>
+              <a:rPr lang="en-US" sz="1500" b="1" dirty="0">
+                <a:solidFill>
+                  <a:schemeClr val="accent1"/>
+                </a:solidFill>
+              </a:rPr>
+              <a:t>개발 환경  </a:t>
+            </a:r>
             <a:pPr indent="0" marL="0">
-              <a:lnSpc>
-                <a:spcPct val="100000"/>
-              </a:lnSpc>
-              <a:buNone/>
-            </a:pPr>
-            <a:r>
-              <a:rPr lang="en-US" sz="1300" dirty="0">
-                <a:solidFill>
-                  <a:srgbClr val="E8EDF4"/>
-                </a:solidFill>
-                <a:latin typeface="Courier New" pitchFamily="34" charset="0"/>
-                <a:ea typeface="Courier New" pitchFamily="34" charset="-122"/>
-                <a:cs typeface="Courier New" pitchFamily="34" charset="-120"/>
-              </a:rPr>
-              <a:t>v = self.value_proj(market)</a:t>
-            </a:r>
-            <a:endParaRPr lang="en-US" sz="1300" dirty="0"/>
-          </a:p>
-          <a:p>
-            <a:pPr indent="0" marL="0">
-              <a:lnSpc>
-                <a:spcPct val="100000"/>
-              </a:lnSpc>
-              <a:buNone/>
-            </a:pPr>
-            <a:r>
-              <a:rPr lang="en-US" sz="1300" dirty="0">
-                <a:solidFill>
-                  <a:srgbClr val="E8EDF4"/>
-                </a:solidFill>
-                <a:latin typeface="Courier New" pitchFamily="34" charset="0"/>
-                <a:ea typeface="Courier New" pitchFamily="34" charset="-122"/>
-                <a:cs typeface="Courier New" pitchFamily="34" charset="-120"/>
-              </a:rPr>
-              <a:t>w = softmax(einsum('bd,btd-&gt;bt', q, k) * scale)</a:t>
-            </a:r>
-            <a:endParaRPr lang="en-US" sz="1300" dirty="0"/>
-          </a:p>
-          <a:p>
-            <a:pPr indent="0" marL="0">
-              <a:lnSpc>
-                <a:spcPct val="100000"/>
-              </a:lnSpc>
-              <a:buNone/>
-            </a:pPr>
-            <a:r>
-              <a:rPr lang="en-US" sz="1300" dirty="0">
-                <a:solidFill>
-                  <a:srgbClr val="E8EDF4"/>
-                </a:solidFill>
-                <a:latin typeface="Courier New" pitchFamily="34" charset="0"/>
-                <a:ea typeface="Courier New" pitchFamily="34" charset="-122"/>
-                <a:cs typeface="Courier New" pitchFamily="34" charset="-120"/>
-              </a:rPr>
-              <a:t>c = einsum('bt,btd-&gt;bd', w, v)      # (B, 512)</a:t>
-            </a:r>
-            <a:endParaRPr lang="en-US" sz="1300" dirty="0"/>
-          </a:p>
-          <a:p>
-            <a:pPr indent="0" marL="0">
-              <a:lnSpc>
-                <a:spcPct val="100000"/>
-              </a:lnSpc>
-              <a:buNone/>
-            </a:pPr>
-            <a:r>
-              <a:rPr lang="en-US" sz="1300" dirty="0">
-                <a:solidFill>
-                  <a:srgbClr val="8FA3BF"/>
-                </a:solidFill>
-                <a:latin typeface="Courier New" pitchFamily="34" charset="0"/>
-                <a:ea typeface="Courier New" pitchFamily="34" charset="-122"/>
-                <a:cs typeface="Courier New" pitchFamily="34" charset="-120"/>
-              </a:rPr>
-              <a:t># module 4: gated residual fusion</a:t>
-            </a:r>
-            <a:endParaRPr lang="en-US" sz="1300" dirty="0"/>
-          </a:p>
-          <a:p>
-            <a:pPr indent="0" marL="0">
-              <a:lnSpc>
-                <a:spcPct val="100000"/>
-              </a:lnSpc>
-              <a:buNone/>
-            </a:pPr>
-            <a:r>
-              <a:rPr lang="en-US" sz="1300" dirty="0">
-                <a:solidFill>
-                  <a:srgbClr val="E8EDF4"/>
-                </a:solidFill>
-                <a:latin typeface="Courier New" pitchFamily="34" charset="0"/>
-                <a:ea typeface="Courier New" pitchFamily="34" charset="-122"/>
-                <a:cs typeface="Courier New" pitchFamily="34" charset="-120"/>
-              </a:rPr>
-              <a:t>g = sigmoid(self.gate_net(cat([news, c], -1)))</a:t>
-            </a:r>
-            <a:endParaRPr lang="en-US" sz="1300" dirty="0"/>
-          </a:p>
-          <a:p>
-            <a:pPr indent="0" marL="0">
-              <a:lnSpc>
-                <a:spcPct val="100000"/>
-              </a:lnSpc>
-              <a:buNone/>
-            </a:pPr>
-            <a:r>
-              <a:rPr lang="en-US" sz="1300" dirty="0">
-                <a:solidFill>
-                  <a:srgbClr val="E8EDF4"/>
-                </a:solidFill>
-                <a:latin typeface="Courier New" pitchFamily="34" charset="0"/>
-                <a:ea typeface="Courier New" pitchFamily="34" charset="-122"/>
-                <a:cs typeface="Courier New" pitchFamily="34" charset="-120"/>
-              </a:rPr>
-              <a:t>h = news + g * c                    # (B, 512)</a:t>
-            </a:r>
-            <a:endParaRPr lang="en-US" sz="1300" dirty="0"/>
-          </a:p>
-          <a:p>
-            <a:pPr indent="0" marL="0">
-              <a:lnSpc>
-                <a:spcPct val="100000"/>
-              </a:lnSpc>
-              <a:buNone/>
-            </a:pPr>
-            <a:r>
-              <a:rPr lang="en-US" sz="1300" dirty="0">
-                <a:solidFill>
-                  <a:srgbClr val="8FA3BF"/>
-                </a:solidFill>
-                <a:latin typeface="Courier New" pitchFamily="34" charset="0"/>
-                <a:ea typeface="Courier New" pitchFamily="34" charset="-122"/>
-                <a:cs typeface="Courier New" pitchFamily="34" charset="-120"/>
-              </a:rPr>
-              <a:t># final: validation-IC weighted rank ensemble</a:t>
-            </a:r>
-            <a:endParaRPr lang="en-US" sz="1300" dirty="0"/>
-          </a:p>
-          <a:p>
-            <a:pPr indent="0" marL="0">
-              <a:lnSpc>
-                <a:spcPct val="100000"/>
-              </a:lnSpc>
-              <a:buNone/>
-            </a:pPr>
-            <a:r>
-              <a:rPr lang="en-US" sz="1300" dirty="0">
-                <a:solidFill>
-                  <a:srgbClr val="E8EDF4"/>
-                </a:solidFill>
-                <a:latin typeface="Courier New" pitchFamily="34" charset="0"/>
-                <a:ea typeface="Courier New" pitchFamily="34" charset="-122"/>
-                <a:cs typeface="Courier New" pitchFamily="34" charset="-120"/>
-              </a:rPr>
-              <a:t>final = sum(w[m] * rank(p_test[m]) for m in M)</a:t>
-            </a:r>
-            <a:endParaRPr lang="en-US" sz="1300" dirty="0"/>
+              <a:spcAft>
+                <a:spcPts val="600"/>
+              </a:spcAft>
+              <a:buNone/>
+            </a:pPr>
+            <a:r>
+              <a:rPr lang="en-US" sz="1500" dirty="0">
+                <a:solidFill>
+                  <a:schemeClr val="tx1"/>
+                </a:solidFill>
+              </a:rPr>
+              <a:t>Python · PyTorch · LightGBM · OpenAI API</a:t>
+            </a:r>
+            <a:endParaRPr lang="en-US" sz="1700" dirty="0"/>
           </a:p>
         </p:txBody>
       </p:sp>
-      <p:sp>
-        <p:nvSpPr>
-          <p:cNvPr id="96" name="text-95"/>
-          <p:cNvSpPr txBox="1"/>
-          <p:nvPr/>
-        </p:nvSpPr>
-        <p:spPr>
-          <a:xfrm>
-            <a:off x="8108442" y="16504920"/>
-            <a:ext cx="6096762" cy="640080"/>
-          </a:xfrm>
-          <a:prstGeom prst="rect">
-            <a:avLst/>
-          </a:prstGeom>
-          <a:noFill/>
-          <a:ln/>
-        </p:spPr>
-        <p:txBody>
-          <a:bodyPr wrap="square" lIns="0" tIns="0" rIns="0" bIns="0" rtlCol="0" anchor="t"/>
-          <a:lstStyle/>
-          <a:p>
-            <a:pPr indent="0" marL="0">
-              <a:lnSpc>
-                <a:spcPct val="105000"/>
-              </a:lnSpc>
-              <a:spcAft>
-                <a:spcPts val="400"/>
-              </a:spcAft>
-              <a:buNone/>
-            </a:pPr>
-            <a:r>
-              <a:rPr lang="en-US" sz="1500" b="1" dirty="0">
-                <a:solidFill>
-                  <a:schemeClr val="accent1"/>
-                </a:solidFill>
-              </a:rPr>
-              <a:t>GitHub  </a:t>
-            </a:r>
-            <a:pPr indent="0" marL="0">
-              <a:lnSpc>
-                <a:spcPct val="105000"/>
-              </a:lnSpc>
-              <a:spcAft>
-                <a:spcPts val="400"/>
-              </a:spcAft>
-              <a:buNone/>
-            </a:pPr>
-            <a:r>
-              <a:rPr lang="en-US" sz="1500" dirty="0">
-                <a:solidFill>
-                  <a:schemeClr val="accent3"/>
-                </a:solidFill>
-              </a:rPr>
-              <a:t>github.com/kimsangmin1234/jolup</a:t>
-            </a:r>
-            <a:endParaRPr lang="en-US" sz="1500" dirty="0"/>
-          </a:p>
-          <a:p>
-            <a:pPr indent="0" marL="0">
-              <a:lnSpc>
-                <a:spcPct val="105000"/>
-              </a:lnSpc>
-              <a:spcAft>
-                <a:spcPts val="400"/>
-              </a:spcAft>
-              <a:buNone/>
-            </a:pPr>
-            <a:r>
-              <a:rPr lang="en-US" sz="1500" b="1" dirty="0">
-                <a:solidFill>
-                  <a:schemeClr val="accent1"/>
-                </a:solidFill>
-                <a:latin typeface="Courier New" pitchFamily="34" charset="0"/>
-                <a:ea typeface="Courier New" pitchFamily="34" charset="-122"/>
-                <a:cs typeface="Courier New" pitchFamily="34" charset="-120"/>
-              </a:rPr>
-              <a:t>modules/  </a:t>
-            </a:r>
-            <a:pPr indent="0" marL="0">
-              <a:lnSpc>
-                <a:spcPct val="105000"/>
-              </a:lnSpc>
-              <a:spcAft>
-                <a:spcPts val="400"/>
-              </a:spcAft>
-              <a:buNone/>
-            </a:pPr>
-            <a:r>
-              <a:rPr lang="en-US" sz="1500" dirty="0">
-                <a:solidFill>
-                  <a:schemeClr val="tx1"/>
-                </a:solidFill>
-              </a:rPr>
-              <a:t>논문 모듈 1~5 (news_encoder, tcn_encoder, cross_attention, gated_fusion, return_predictor)</a:t>
-            </a:r>
-            <a:endParaRPr lang="en-US" sz="1500" dirty="0"/>
-          </a:p>
-        </p:txBody>
-      </p:sp>
-      <p:sp>
-        <p:nvSpPr>
-          <p:cNvPr id="97" name="card-96"/>
+      <p:graphicFrame>
+        <p:nvGraphicFramePr>
+          <p:cNvPr id="2" name="src-table"/>
+          <p:cNvGraphicFramePr>
+            <a:graphicFrameLocks noGrp="1"/>
+          </p:cNvGraphicFramePr>
+          <p:nvPr>
+            <p:extLst>
+              <p:ext uri="{D42A27DB-BD31-4B8C-83A1-F6EECF244321}">
+                <p14:modId xmlns:p14="http://schemas.microsoft.com/office/powerpoint/2010/main" val="1579011935"/>
+              </p:ext>
+            </p:extLst>
+          </p:nvPr>
+        </p:nvGraphicFramePr>
+        <p:xfrm>
+          <a:off x="8108442" y="15544800"/>
+          <a:ext cx="6096762" cy="914400"/>
+        </p:xfrm>
+        <a:graphic>
+          <a:graphicData uri="http://schemas.openxmlformats.org/drawingml/2006/table">
+            <a:tbl>
+              <a:tblPr/>
+              <a:tblGrid>
+                <a:gridCol w="2971800"/>
+                <a:gridCol w="3124962"/>
+              </a:tblGrid>
+              <a:tr h="292608">
+                <a:tc>
+                  <a:txBody>
+                    <a:bodyPr/>
+                    <a:lstStyle/>
+                    <a:p>
+                      <a:pPr indent="0" marL="0">
+                        <a:buNone/>
+                      </a:pPr>
+                      <a:r>
+                        <a:rPr lang="en-US" sz="1300" b="1" dirty="0">
+                          <a:solidFill>
+                            <a:schemeClr val="accent1"/>
+                          </a:solidFill>
+                          <a:latin typeface="Courier New" pitchFamily="34" charset="0"/>
+                          <a:ea typeface="Courier New" pitchFamily="34" charset="-122"/>
+                          <a:cs typeface="Courier New" pitchFamily="34" charset="-120"/>
+                        </a:rPr>
+                        <a:t>modules/news_encoder.py</a:t>
+                      </a:r>
+                      <a:endParaRPr lang="en-US" sz="1300" dirty="0">
+                        <a:latin typeface="Courier New" charset="0"/>
+                        <a:ea typeface="Courier New" charset="0"/>
+                        <a:cs typeface="Courier New" charset="0"/>
+                      </a:endParaRPr>
+                    </a:p>
+                  </a:txBody>
+                  <a:tcPr marL="73152" marR="73152" marT="0" marB="0" anchor="ctr">
+                    <a:lnL w="9525" cap="flat" cmpd="sng" algn="ctr">
+                      <a:solidFill>
+                        <a:srgbClr val="D9DEE6"/>
+                      </a:solidFill>
+                      <a:prstDash val="solid"/>
+                      <a:round/>
+                      <a:headEnd type="none" w="med" len="med"/>
+                      <a:tailEnd type="none" w="med" len="med"/>
+                    </a:lnL>
+                    <a:lnR w="9525" cap="flat" cmpd="sng" algn="ctr">
+                      <a:solidFill>
+                        <a:srgbClr val="D9DEE6"/>
+                      </a:solidFill>
+                      <a:prstDash val="solid"/>
+                      <a:round/>
+                      <a:headEnd type="none" w="med" len="med"/>
+                      <a:tailEnd type="none" w="med" len="med"/>
+                    </a:lnR>
+                    <a:lnT w="9525" cap="flat" cmpd="sng" algn="ctr">
+                      <a:solidFill>
+                        <a:srgbClr val="D9DEE6"/>
+                      </a:solidFill>
+                      <a:prstDash val="solid"/>
+                      <a:round/>
+                      <a:headEnd type="none" w="med" len="med"/>
+                      <a:tailEnd type="none" w="med" len="med"/>
+                    </a:lnT>
+                    <a:lnB w="9525" cap="flat" cmpd="sng" algn="ctr">
+                      <a:solidFill>
+                        <a:srgbClr val="D9DEE6"/>
+                      </a:solidFill>
+                      <a:prstDash val="solid"/>
+                      <a:round/>
+                      <a:headEnd type="none" w="med" len="med"/>
+                      <a:tailEnd type="none" w="med" len="med"/>
+                    </a:lnB>
+                    <a:solidFill>
+                      <a:srgbClr val="FFFFFF"/>
+                    </a:solidFill>
+                  </a:tcPr>
+                </a:tc>
+                <a:tc>
+                  <a:txBody>
+                    <a:bodyPr/>
+                    <a:lstStyle/>
+                    <a:p>
+                      <a:pPr indent="0" marL="0">
+                        <a:buNone/>
+                      </a:pPr>
+                      <a:r>
+                        <a:rPr lang="en-US" sz="1450" dirty="0">
+                          <a:solidFill>
+                            <a:schemeClr val="tx1"/>
+                          </a:solidFill>
+                        </a:rPr>
+                        <a:t>① LLM 기반 주 신호</a:t>
+                      </a:r>
+                      <a:endParaRPr lang="en-US" sz="1450" dirty="0"/>
+                    </a:p>
+                  </a:txBody>
+                  <a:tcPr marL="73152" marR="73152" marT="0" marB="0" anchor="ctr">
+                    <a:lnL w="9525" cap="flat" cmpd="sng" algn="ctr">
+                      <a:solidFill>
+                        <a:srgbClr val="D9DEE6"/>
+                      </a:solidFill>
+                      <a:prstDash val="solid"/>
+                      <a:round/>
+                      <a:headEnd type="none" w="med" len="med"/>
+                      <a:tailEnd type="none" w="med" len="med"/>
+                    </a:lnL>
+                    <a:lnR w="9525" cap="flat" cmpd="sng" algn="ctr">
+                      <a:solidFill>
+                        <a:srgbClr val="D9DEE6"/>
+                      </a:solidFill>
+                      <a:prstDash val="solid"/>
+                      <a:round/>
+                      <a:headEnd type="none" w="med" len="med"/>
+                      <a:tailEnd type="none" w="med" len="med"/>
+                    </a:lnR>
+                    <a:lnT w="9525" cap="flat" cmpd="sng" algn="ctr">
+                      <a:solidFill>
+                        <a:srgbClr val="D9DEE6"/>
+                      </a:solidFill>
+                      <a:prstDash val="solid"/>
+                      <a:round/>
+                      <a:headEnd type="none" w="med" len="med"/>
+                      <a:tailEnd type="none" w="med" len="med"/>
+                    </a:lnT>
+                    <a:lnB w="9525" cap="flat" cmpd="sng" algn="ctr">
+                      <a:solidFill>
+                        <a:srgbClr val="D9DEE6"/>
+                      </a:solidFill>
+                      <a:prstDash val="solid"/>
+                      <a:round/>
+                      <a:headEnd type="none" w="med" len="med"/>
+                      <a:tailEnd type="none" w="med" len="med"/>
+                    </a:lnB>
+                    <a:solidFill>
+                      <a:srgbClr val="FFFFFF"/>
+                    </a:solidFill>
+                  </a:tcPr>
+                </a:tc>
+              </a:tr>
+              <a:tr h="292608">
+                <a:tc>
+                  <a:txBody>
+                    <a:bodyPr/>
+                    <a:lstStyle/>
+                    <a:p>
+                      <a:pPr indent="0" marL="0">
+                        <a:buNone/>
+                      </a:pPr>
+                      <a:r>
+                        <a:rPr lang="en-US" sz="1300" b="1" dirty="0">
+                          <a:solidFill>
+                            <a:schemeClr val="accent1"/>
+                          </a:solidFill>
+                          <a:latin typeface="Courier New" pitchFamily="34" charset="0"/>
+                          <a:ea typeface="Courier New" pitchFamily="34" charset="-122"/>
+                          <a:cs typeface="Courier New" pitchFamily="34" charset="-120"/>
+                        </a:rPr>
+                        <a:t>modules/tcn_encoder.py</a:t>
+                      </a:r>
+                      <a:endParaRPr lang="en-US" sz="1300" dirty="0">
+                        <a:latin typeface="Courier New" charset="0"/>
+                        <a:ea typeface="Courier New" charset="0"/>
+                        <a:cs typeface="Courier New" charset="0"/>
+                      </a:endParaRPr>
+                    </a:p>
+                  </a:txBody>
+                  <a:tcPr marL="73152" marR="73152" marT="0" marB="0" anchor="ctr">
+                    <a:lnL w="9525" cap="flat" cmpd="sng" algn="ctr">
+                      <a:solidFill>
+                        <a:srgbClr val="D9DEE6"/>
+                      </a:solidFill>
+                      <a:prstDash val="solid"/>
+                      <a:round/>
+                      <a:headEnd type="none" w="med" len="med"/>
+                      <a:tailEnd type="none" w="med" len="med"/>
+                    </a:lnL>
+                    <a:lnR w="9525" cap="flat" cmpd="sng" algn="ctr">
+                      <a:solidFill>
+                        <a:srgbClr val="D9DEE6"/>
+                      </a:solidFill>
+                      <a:prstDash val="solid"/>
+                      <a:round/>
+                      <a:headEnd type="none" w="med" len="med"/>
+                      <a:tailEnd type="none" w="med" len="med"/>
+                    </a:lnR>
+                    <a:lnT w="9525" cap="flat" cmpd="sng" algn="ctr">
+                      <a:solidFill>
+                        <a:srgbClr val="D9DEE6"/>
+                      </a:solidFill>
+                      <a:prstDash val="solid"/>
+                      <a:round/>
+                      <a:headEnd type="none" w="med" len="med"/>
+                      <a:tailEnd type="none" w="med" len="med"/>
+                    </a:lnT>
+                    <a:lnB w="9525" cap="flat" cmpd="sng" algn="ctr">
+                      <a:solidFill>
+                        <a:srgbClr val="D9DEE6"/>
+                      </a:solidFill>
+                      <a:prstDash val="solid"/>
+                      <a:round/>
+                      <a:headEnd type="none" w="med" len="med"/>
+                      <a:tailEnd type="none" w="med" len="med"/>
+                    </a:lnB>
+                    <a:solidFill>
+                      <a:srgbClr val="FFFFFF"/>
+                    </a:solidFill>
+                  </a:tcPr>
+                </a:tc>
+                <a:tc>
+                  <a:txBody>
+                    <a:bodyPr/>
+                    <a:lstStyle/>
+                    <a:p>
+                      <a:pPr indent="0" marL="0">
+                        <a:buNone/>
+                      </a:pPr>
+                      <a:r>
+                        <a:rPr lang="en-US" sz="1450" dirty="0">
+                          <a:solidFill>
+                            <a:schemeClr val="tx1"/>
+                          </a:solidFill>
+                        </a:rPr>
+                        <a:t>② TCN 기반 보조 벡터</a:t>
+                      </a:r>
+                      <a:endParaRPr lang="en-US" sz="1450" dirty="0"/>
+                    </a:p>
+                  </a:txBody>
+                  <a:tcPr marL="73152" marR="73152" marT="0" marB="0" anchor="ctr">
+                    <a:lnL w="9525" cap="flat" cmpd="sng" algn="ctr">
+                      <a:solidFill>
+                        <a:srgbClr val="D9DEE6"/>
+                      </a:solidFill>
+                      <a:prstDash val="solid"/>
+                      <a:round/>
+                      <a:headEnd type="none" w="med" len="med"/>
+                      <a:tailEnd type="none" w="med" len="med"/>
+                    </a:lnL>
+                    <a:lnR w="9525" cap="flat" cmpd="sng" algn="ctr">
+                      <a:solidFill>
+                        <a:srgbClr val="D9DEE6"/>
+                      </a:solidFill>
+                      <a:prstDash val="solid"/>
+                      <a:round/>
+                      <a:headEnd type="none" w="med" len="med"/>
+                      <a:tailEnd type="none" w="med" len="med"/>
+                    </a:lnR>
+                    <a:lnT w="9525" cap="flat" cmpd="sng" algn="ctr">
+                      <a:solidFill>
+                        <a:srgbClr val="D9DEE6"/>
+                      </a:solidFill>
+                      <a:prstDash val="solid"/>
+                      <a:round/>
+                      <a:headEnd type="none" w="med" len="med"/>
+                      <a:tailEnd type="none" w="med" len="med"/>
+                    </a:lnT>
+                    <a:lnB w="9525" cap="flat" cmpd="sng" algn="ctr">
+                      <a:solidFill>
+                        <a:srgbClr val="D9DEE6"/>
+                      </a:solidFill>
+                      <a:prstDash val="solid"/>
+                      <a:round/>
+                      <a:headEnd type="none" w="med" len="med"/>
+                      <a:tailEnd type="none" w="med" len="med"/>
+                    </a:lnB>
+                    <a:solidFill>
+                      <a:srgbClr val="FFFFFF"/>
+                    </a:solidFill>
+                  </a:tcPr>
+                </a:tc>
+              </a:tr>
+              <a:tr h="292608">
+                <a:tc>
+                  <a:txBody>
+                    <a:bodyPr/>
+                    <a:lstStyle/>
+                    <a:p>
+                      <a:pPr indent="0" marL="0">
+                        <a:buNone/>
+                      </a:pPr>
+                      <a:r>
+                        <a:rPr lang="en-US" sz="1300" b="1" dirty="0">
+                          <a:solidFill>
+                            <a:schemeClr val="accent1"/>
+                          </a:solidFill>
+                          <a:latin typeface="Courier New" pitchFamily="34" charset="0"/>
+                          <a:ea typeface="Courier New" pitchFamily="34" charset="-122"/>
+                          <a:cs typeface="Courier New" pitchFamily="34" charset="-120"/>
+                        </a:rPr>
+                        <a:t>modules/cross_attention.py</a:t>
+                      </a:r>
+                      <a:endParaRPr lang="en-US" sz="1300" dirty="0">
+                        <a:latin typeface="Courier New" charset="0"/>
+                        <a:ea typeface="Courier New" charset="0"/>
+                        <a:cs typeface="Courier New" charset="0"/>
+                      </a:endParaRPr>
+                    </a:p>
+                  </a:txBody>
+                  <a:tcPr marL="73152" marR="73152" marT="0" marB="0" anchor="ctr">
+                    <a:lnL w="9525" cap="flat" cmpd="sng" algn="ctr">
+                      <a:solidFill>
+                        <a:srgbClr val="D9DEE6"/>
+                      </a:solidFill>
+                      <a:prstDash val="solid"/>
+                      <a:round/>
+                      <a:headEnd type="none" w="med" len="med"/>
+                      <a:tailEnd type="none" w="med" len="med"/>
+                    </a:lnL>
+                    <a:lnR w="9525" cap="flat" cmpd="sng" algn="ctr">
+                      <a:solidFill>
+                        <a:srgbClr val="D9DEE6"/>
+                      </a:solidFill>
+                      <a:prstDash val="solid"/>
+                      <a:round/>
+                      <a:headEnd type="none" w="med" len="med"/>
+                      <a:tailEnd type="none" w="med" len="med"/>
+                    </a:lnR>
+                    <a:lnT w="9525" cap="flat" cmpd="sng" algn="ctr">
+                      <a:solidFill>
+                        <a:srgbClr val="D9DEE6"/>
+                      </a:solidFill>
+                      <a:prstDash val="solid"/>
+                      <a:round/>
+                      <a:headEnd type="none" w="med" len="med"/>
+                      <a:tailEnd type="none" w="med" len="med"/>
+                    </a:lnT>
+                    <a:lnB w="9525" cap="flat" cmpd="sng" algn="ctr">
+                      <a:solidFill>
+                        <a:srgbClr val="D9DEE6"/>
+                      </a:solidFill>
+                      <a:prstDash val="solid"/>
+                      <a:round/>
+                      <a:headEnd type="none" w="med" len="med"/>
+                      <a:tailEnd type="none" w="med" len="med"/>
+                    </a:lnB>
+                    <a:solidFill>
+                      <a:srgbClr val="FFFFFF"/>
+                    </a:solidFill>
+                  </a:tcPr>
+                </a:tc>
+                <a:tc>
+                  <a:txBody>
+                    <a:bodyPr/>
+                    <a:lstStyle/>
+                    <a:p>
+                      <a:pPr indent="0" marL="0">
+                        <a:buNone/>
+                      </a:pPr>
+                      <a:r>
+                        <a:rPr lang="en-US" sz="1450" dirty="0">
+                          <a:solidFill>
+                            <a:schemeClr val="tx1"/>
+                          </a:solidFill>
+                        </a:rPr>
+                        <a:t>③ 비대칭 교차 어텐션</a:t>
+                      </a:r>
+                      <a:endParaRPr lang="en-US" sz="1450" dirty="0"/>
+                    </a:p>
+                  </a:txBody>
+                  <a:tcPr marL="73152" marR="73152" marT="0" marB="0" anchor="ctr">
+                    <a:lnL w="9525" cap="flat" cmpd="sng" algn="ctr">
+                      <a:solidFill>
+                        <a:srgbClr val="D9DEE6"/>
+                      </a:solidFill>
+                      <a:prstDash val="solid"/>
+                      <a:round/>
+                      <a:headEnd type="none" w="med" len="med"/>
+                      <a:tailEnd type="none" w="med" len="med"/>
+                    </a:lnL>
+                    <a:lnR w="9525" cap="flat" cmpd="sng" algn="ctr">
+                      <a:solidFill>
+                        <a:srgbClr val="D9DEE6"/>
+                      </a:solidFill>
+                      <a:prstDash val="solid"/>
+                      <a:round/>
+                      <a:headEnd type="none" w="med" len="med"/>
+                      <a:tailEnd type="none" w="med" len="med"/>
+                    </a:lnR>
+                    <a:lnT w="9525" cap="flat" cmpd="sng" algn="ctr">
+                      <a:solidFill>
+                        <a:srgbClr val="D9DEE6"/>
+                      </a:solidFill>
+                      <a:prstDash val="solid"/>
+                      <a:round/>
+                      <a:headEnd type="none" w="med" len="med"/>
+                      <a:tailEnd type="none" w="med" len="med"/>
+                    </a:lnT>
+                    <a:lnB w="9525" cap="flat" cmpd="sng" algn="ctr">
+                      <a:solidFill>
+                        <a:srgbClr val="D9DEE6"/>
+                      </a:solidFill>
+                      <a:prstDash val="solid"/>
+                      <a:round/>
+                      <a:headEnd type="none" w="med" len="med"/>
+                      <a:tailEnd type="none" w="med" len="med"/>
+                    </a:lnB>
+                    <a:solidFill>
+                      <a:srgbClr val="FFFFFF"/>
+                    </a:solidFill>
+                  </a:tcPr>
+                </a:tc>
+              </a:tr>
+              <a:tr h="292608">
+                <a:tc>
+                  <a:txBody>
+                    <a:bodyPr/>
+                    <a:lstStyle/>
+                    <a:p>
+                      <a:pPr indent="0" marL="0">
+                        <a:buNone/>
+                      </a:pPr>
+                      <a:r>
+                        <a:rPr lang="en-US" sz="1300" b="1" dirty="0">
+                          <a:solidFill>
+                            <a:schemeClr val="accent1"/>
+                          </a:solidFill>
+                          <a:latin typeface="Courier New" pitchFamily="34" charset="0"/>
+                          <a:ea typeface="Courier New" pitchFamily="34" charset="-122"/>
+                          <a:cs typeface="Courier New" pitchFamily="34" charset="-120"/>
+                        </a:rPr>
+                        <a:t>modules/gated_fusion.py</a:t>
+                      </a:r>
+                      <a:endParaRPr lang="en-US" sz="1300" dirty="0">
+                        <a:latin typeface="Courier New" charset="0"/>
+                        <a:ea typeface="Courier New" charset="0"/>
+                        <a:cs typeface="Courier New" charset="0"/>
+                      </a:endParaRPr>
+                    </a:p>
+                  </a:txBody>
+                  <a:tcPr marL="73152" marR="73152" marT="0" marB="0" anchor="ctr">
+                    <a:lnL w="9525" cap="flat" cmpd="sng" algn="ctr">
+                      <a:solidFill>
+                        <a:srgbClr val="D9DEE6"/>
+                      </a:solidFill>
+                      <a:prstDash val="solid"/>
+                      <a:round/>
+                      <a:headEnd type="none" w="med" len="med"/>
+                      <a:tailEnd type="none" w="med" len="med"/>
+                    </a:lnL>
+                    <a:lnR w="9525" cap="flat" cmpd="sng" algn="ctr">
+                      <a:solidFill>
+                        <a:srgbClr val="D9DEE6"/>
+                      </a:solidFill>
+                      <a:prstDash val="solid"/>
+                      <a:round/>
+                      <a:headEnd type="none" w="med" len="med"/>
+                      <a:tailEnd type="none" w="med" len="med"/>
+                    </a:lnR>
+                    <a:lnT w="9525" cap="flat" cmpd="sng" algn="ctr">
+                      <a:solidFill>
+                        <a:srgbClr val="D9DEE6"/>
+                      </a:solidFill>
+                      <a:prstDash val="solid"/>
+                      <a:round/>
+                      <a:headEnd type="none" w="med" len="med"/>
+                      <a:tailEnd type="none" w="med" len="med"/>
+                    </a:lnT>
+                    <a:lnB w="9525" cap="flat" cmpd="sng" algn="ctr">
+                      <a:solidFill>
+                        <a:srgbClr val="D9DEE6"/>
+                      </a:solidFill>
+                      <a:prstDash val="solid"/>
+                      <a:round/>
+                      <a:headEnd type="none" w="med" len="med"/>
+                      <a:tailEnd type="none" w="med" len="med"/>
+                    </a:lnB>
+                    <a:solidFill>
+                      <a:srgbClr val="FFFFFF"/>
+                    </a:solidFill>
+                  </a:tcPr>
+                </a:tc>
+                <a:tc>
+                  <a:txBody>
+                    <a:bodyPr/>
+                    <a:lstStyle/>
+                    <a:p>
+                      <a:pPr indent="0" marL="0">
+                        <a:buNone/>
+                      </a:pPr>
+                      <a:r>
+                        <a:rPr lang="en-US" sz="1450" dirty="0">
+                          <a:solidFill>
+                            <a:schemeClr val="tx1"/>
+                          </a:solidFill>
+                        </a:rPr>
+                        <a:t>④ 게이트 기반 잔차 결합</a:t>
+                      </a:r>
+                      <a:endParaRPr lang="en-US" sz="1450" dirty="0"/>
+                    </a:p>
+                  </a:txBody>
+                  <a:tcPr marL="73152" marR="73152" marT="0" marB="0" anchor="ctr">
+                    <a:lnL w="9525" cap="flat" cmpd="sng" algn="ctr">
+                      <a:solidFill>
+                        <a:srgbClr val="D9DEE6"/>
+                      </a:solidFill>
+                      <a:prstDash val="solid"/>
+                      <a:round/>
+                      <a:headEnd type="none" w="med" len="med"/>
+                      <a:tailEnd type="none" w="med" len="med"/>
+                    </a:lnL>
+                    <a:lnR w="9525" cap="flat" cmpd="sng" algn="ctr">
+                      <a:solidFill>
+                        <a:srgbClr val="D9DEE6"/>
+                      </a:solidFill>
+                      <a:prstDash val="solid"/>
+                      <a:round/>
+                      <a:headEnd type="none" w="med" len="med"/>
+                      <a:tailEnd type="none" w="med" len="med"/>
+                    </a:lnR>
+                    <a:lnT w="9525" cap="flat" cmpd="sng" algn="ctr">
+                      <a:solidFill>
+                        <a:srgbClr val="D9DEE6"/>
+                      </a:solidFill>
+                      <a:prstDash val="solid"/>
+                      <a:round/>
+                      <a:headEnd type="none" w="med" len="med"/>
+                      <a:tailEnd type="none" w="med" len="med"/>
+                    </a:lnT>
+                    <a:lnB w="9525" cap="flat" cmpd="sng" algn="ctr">
+                      <a:solidFill>
+                        <a:srgbClr val="D9DEE6"/>
+                      </a:solidFill>
+                      <a:prstDash val="solid"/>
+                      <a:round/>
+                      <a:headEnd type="none" w="med" len="med"/>
+                      <a:tailEnd type="none" w="med" len="med"/>
+                    </a:lnB>
+                    <a:solidFill>
+                      <a:srgbClr val="FFFFFF"/>
+                    </a:solidFill>
+                  </a:tcPr>
+                </a:tc>
+              </a:tr>
+              <a:tr h="292608">
+                <a:tc>
+                  <a:txBody>
+                    <a:bodyPr/>
+                    <a:lstStyle/>
+                    <a:p>
+                      <a:pPr indent="0" marL="0">
+                        <a:buNone/>
+                      </a:pPr>
+                      <a:r>
+                        <a:rPr lang="en-US" sz="1300" b="1" dirty="0">
+                          <a:solidFill>
+                            <a:schemeClr val="accent1"/>
+                          </a:solidFill>
+                          <a:latin typeface="Courier New" pitchFamily="34" charset="0"/>
+                          <a:ea typeface="Courier New" pitchFamily="34" charset="-122"/>
+                          <a:cs typeface="Courier New" pitchFamily="34" charset="-120"/>
+                        </a:rPr>
+                        <a:t>modules/return_predictor.py</a:t>
+                      </a:r>
+                      <a:endParaRPr lang="en-US" sz="1300" dirty="0">
+                        <a:latin typeface="Courier New" charset="0"/>
+                        <a:ea typeface="Courier New" charset="0"/>
+                        <a:cs typeface="Courier New" charset="0"/>
+                      </a:endParaRPr>
+                    </a:p>
+                  </a:txBody>
+                  <a:tcPr marL="73152" marR="73152" marT="0" marB="0" anchor="ctr">
+                    <a:lnL w="9525" cap="flat" cmpd="sng" algn="ctr">
+                      <a:solidFill>
+                        <a:srgbClr val="D9DEE6"/>
+                      </a:solidFill>
+                      <a:prstDash val="solid"/>
+                      <a:round/>
+                      <a:headEnd type="none" w="med" len="med"/>
+                      <a:tailEnd type="none" w="med" len="med"/>
+                    </a:lnL>
+                    <a:lnR w="9525" cap="flat" cmpd="sng" algn="ctr">
+                      <a:solidFill>
+                        <a:srgbClr val="D9DEE6"/>
+                      </a:solidFill>
+                      <a:prstDash val="solid"/>
+                      <a:round/>
+                      <a:headEnd type="none" w="med" len="med"/>
+                      <a:tailEnd type="none" w="med" len="med"/>
+                    </a:lnR>
+                    <a:lnT w="9525" cap="flat" cmpd="sng" algn="ctr">
+                      <a:solidFill>
+                        <a:srgbClr val="D9DEE6"/>
+                      </a:solidFill>
+                      <a:prstDash val="solid"/>
+                      <a:round/>
+                      <a:headEnd type="none" w="med" len="med"/>
+                      <a:tailEnd type="none" w="med" len="med"/>
+                    </a:lnT>
+                    <a:lnB w="9525" cap="flat" cmpd="sng" algn="ctr">
+                      <a:solidFill>
+                        <a:srgbClr val="D9DEE6"/>
+                      </a:solidFill>
+                      <a:prstDash val="solid"/>
+                      <a:round/>
+                      <a:headEnd type="none" w="med" len="med"/>
+                      <a:tailEnd type="none" w="med" len="med"/>
+                    </a:lnB>
+                    <a:solidFill>
+                      <a:srgbClr val="FFFFFF"/>
+                    </a:solidFill>
+                  </a:tcPr>
+                </a:tc>
+                <a:tc>
+                  <a:txBody>
+                    <a:bodyPr/>
+                    <a:lstStyle/>
+                    <a:p>
+                      <a:pPr indent="0" marL="0">
+                        <a:buNone/>
+                      </a:pPr>
+                      <a:r>
+                        <a:rPr lang="en-US" sz="1450" dirty="0">
+                          <a:solidFill>
+                            <a:schemeClr val="tx1"/>
+                          </a:solidFill>
+                        </a:rPr>
+                        <a:t>⑤ 등락률 예측</a:t>
+                      </a:r>
+                      <a:endParaRPr lang="en-US" sz="1450" dirty="0"/>
+                    </a:p>
+                  </a:txBody>
+                  <a:tcPr marL="73152" marR="73152" marT="0" marB="0" anchor="ctr">
+                    <a:lnL w="9525" cap="flat" cmpd="sng" algn="ctr">
+                      <a:solidFill>
+                        <a:srgbClr val="D9DEE6"/>
+                      </a:solidFill>
+                      <a:prstDash val="solid"/>
+                      <a:round/>
+                      <a:headEnd type="none" w="med" len="med"/>
+                      <a:tailEnd type="none" w="med" len="med"/>
+                    </a:lnL>
+                    <a:lnR w="9525" cap="flat" cmpd="sng" algn="ctr">
+                      <a:solidFill>
+                        <a:srgbClr val="D9DEE6"/>
+                      </a:solidFill>
+                      <a:prstDash val="solid"/>
+                      <a:round/>
+                      <a:headEnd type="none" w="med" len="med"/>
+                      <a:tailEnd type="none" w="med" len="med"/>
+                    </a:lnR>
+                    <a:lnT w="9525" cap="flat" cmpd="sng" algn="ctr">
+                      <a:solidFill>
+                        <a:srgbClr val="D9DEE6"/>
+                      </a:solidFill>
+                      <a:prstDash val="solid"/>
+                      <a:round/>
+                      <a:headEnd type="none" w="med" len="med"/>
+                      <a:tailEnd type="none" w="med" len="med"/>
+                    </a:lnT>
+                    <a:lnB w="9525" cap="flat" cmpd="sng" algn="ctr">
+                      <a:solidFill>
+                        <a:srgbClr val="D9DEE6"/>
+                      </a:solidFill>
+                      <a:prstDash val="solid"/>
+                      <a:round/>
+                      <a:headEnd type="none" w="med" len="med"/>
+                      <a:tailEnd type="none" w="med" len="med"/>
+                    </a:lnB>
+                    <a:solidFill>
+                      <a:srgbClr val="FFFFFF"/>
+                    </a:solidFill>
+                  </a:tcPr>
+                </a:tc>
+              </a:tr>
+              <a:tr h="292608">
+                <a:tc>
+                  <a:txBody>
+                    <a:bodyPr/>
+                    <a:lstStyle/>
+                    <a:p>
+                      <a:pPr indent="0" marL="0">
+                        <a:buNone/>
+                      </a:pPr>
+                      <a:r>
+                        <a:rPr lang="en-US" sz="1300" b="1" dirty="0">
+                          <a:solidFill>
+                            <a:schemeClr val="accent1"/>
+                          </a:solidFill>
+                          <a:latin typeface="Courier New" pitchFamily="34" charset="0"/>
+                          <a:ea typeface="Courier New" pitchFamily="34" charset="-122"/>
+                          <a:cs typeface="Courier New" pitchFamily="34" charset="-120"/>
+                        </a:rPr>
+                        <a:t>run_edt_suite3.py</a:t>
+                      </a:r>
+                      <a:endParaRPr lang="en-US" sz="1300" dirty="0">
+                        <a:latin typeface="Courier New" charset="0"/>
+                        <a:ea typeface="Courier New" charset="0"/>
+                        <a:cs typeface="Courier New" charset="0"/>
+                      </a:endParaRPr>
+                    </a:p>
+                  </a:txBody>
+                  <a:tcPr marL="73152" marR="73152" marT="0" marB="0" anchor="ctr">
+                    <a:lnL w="9525" cap="flat" cmpd="sng" algn="ctr">
+                      <a:solidFill>
+                        <a:srgbClr val="D9DEE6"/>
+                      </a:solidFill>
+                      <a:prstDash val="solid"/>
+                      <a:round/>
+                      <a:headEnd type="none" w="med" len="med"/>
+                      <a:tailEnd type="none" w="med" len="med"/>
+                    </a:lnL>
+                    <a:lnR w="9525" cap="flat" cmpd="sng" algn="ctr">
+                      <a:solidFill>
+                        <a:srgbClr val="D9DEE6"/>
+                      </a:solidFill>
+                      <a:prstDash val="solid"/>
+                      <a:round/>
+                      <a:headEnd type="none" w="med" len="med"/>
+                      <a:tailEnd type="none" w="med" len="med"/>
+                    </a:lnR>
+                    <a:lnT w="9525" cap="flat" cmpd="sng" algn="ctr">
+                      <a:solidFill>
+                        <a:srgbClr val="D9DEE6"/>
+                      </a:solidFill>
+                      <a:prstDash val="solid"/>
+                      <a:round/>
+                      <a:headEnd type="none" w="med" len="med"/>
+                      <a:tailEnd type="none" w="med" len="med"/>
+                    </a:lnT>
+                    <a:lnB w="9525" cap="flat" cmpd="sng" algn="ctr">
+                      <a:solidFill>
+                        <a:srgbClr val="D9DEE6"/>
+                      </a:solidFill>
+                      <a:prstDash val="solid"/>
+                      <a:round/>
+                      <a:headEnd type="none" w="med" len="med"/>
+                      <a:tailEnd type="none" w="med" len="med"/>
+                    </a:lnB>
+                    <a:solidFill>
+                      <a:srgbClr val="FFFFFF"/>
+                    </a:solidFill>
+                  </a:tcPr>
+                </a:tc>
+                <a:tc>
+                  <a:txBody>
+                    <a:bodyPr/>
+                    <a:lstStyle/>
+                    <a:p>
+                      <a:pPr indent="0" marL="0">
+                        <a:buNone/>
+                      </a:pPr>
+                      <a:r>
+                        <a:rPr lang="en-US" sz="1450" dirty="0">
+                          <a:solidFill>
+                            <a:schemeClr val="tx1"/>
+                          </a:solidFill>
+                        </a:rPr>
+                        <a:t>학습 · 앙상블 · 평가</a:t>
+                      </a:r>
+                      <a:endParaRPr lang="en-US" sz="1450" dirty="0"/>
+                    </a:p>
+                  </a:txBody>
+                  <a:tcPr marL="73152" marR="73152" marT="0" marB="0" anchor="ctr">
+                    <a:lnL w="9525" cap="flat" cmpd="sng" algn="ctr">
+                      <a:solidFill>
+                        <a:srgbClr val="D9DEE6"/>
+                      </a:solidFill>
+                      <a:prstDash val="solid"/>
+                      <a:round/>
+                      <a:headEnd type="none" w="med" len="med"/>
+                      <a:tailEnd type="none" w="med" len="med"/>
+                    </a:lnL>
+                    <a:lnR w="9525" cap="flat" cmpd="sng" algn="ctr">
+                      <a:solidFill>
+                        <a:srgbClr val="D9DEE6"/>
+                      </a:solidFill>
+                      <a:prstDash val="solid"/>
+                      <a:round/>
+                      <a:headEnd type="none" w="med" len="med"/>
+                      <a:tailEnd type="none" w="med" len="med"/>
+                    </a:lnR>
+                    <a:lnT w="9525" cap="flat" cmpd="sng" algn="ctr">
+                      <a:solidFill>
+                        <a:srgbClr val="D9DEE6"/>
+                      </a:solidFill>
+                      <a:prstDash val="solid"/>
+                      <a:round/>
+                      <a:headEnd type="none" w="med" len="med"/>
+                      <a:tailEnd type="none" w="med" len="med"/>
+                    </a:lnT>
+                    <a:lnB w="9525" cap="flat" cmpd="sng" algn="ctr">
+                      <a:solidFill>
+                        <a:srgbClr val="D9DEE6"/>
+                      </a:solidFill>
+                      <a:prstDash val="solid"/>
+                      <a:round/>
+                      <a:headEnd type="none" w="med" len="med"/>
+                      <a:tailEnd type="none" w="med" len="med"/>
+                    </a:lnB>
+                    <a:solidFill>
+                      <a:srgbClr val="FFFFFF"/>
+                    </a:solidFill>
+                  </a:tcPr>
+                </a:tc>
+              </a:tr>
+            </a:tbl>
+          </a:graphicData>
+        </a:graphic>
+      </p:graphicFrame>
+      <p:sp>
+        <p:nvSpPr>
+          <p:cNvPr id="97" name="card-94"/>
           <p:cNvSpPr/>
           <p:nvPr/>
         </p:nvSpPr>
         <p:spPr>
           <a:xfrm>
-            <a:off x="7742682" y="17693640"/>
-            <a:ext cx="6828282" cy="3233318"/>
+            <a:off x="7742682" y="17830800"/>
+            <a:ext cx="6828282" cy="3096158"/>
           </a:xfrm>
           <a:prstGeom prst="roundRect">
             <a:avLst>
-              <a:gd name="adj" fmla="val 5090"/>
+              <a:gd name="adj" fmla="val 5316"/>
             </a:avLst>
           </a:prstGeom>
           <a:solidFill>
@@ -5211,13 +5770,13 @@
       </p:sp>
       <p:sp>
         <p:nvSpPr>
-          <p:cNvPr id="98" name="badge-97"/>
+          <p:cNvPr id="98" name="badge-95"/>
           <p:cNvSpPr/>
           <p:nvPr/>
         </p:nvSpPr>
         <p:spPr>
           <a:xfrm>
-            <a:off x="8062722" y="17967960"/>
+            <a:off x="8062722" y="18105120"/>
             <a:ext cx="621792" cy="621792"/>
           </a:xfrm>
           <a:prstGeom prst="ellipse">
@@ -5236,13 +5795,13 @@
       </p:sp>
       <p:sp>
         <p:nvSpPr>
-          <p:cNvPr id="99" name="text-98"/>
+          <p:cNvPr id="99" name="text-96"/>
           <p:cNvSpPr txBox="1"/>
           <p:nvPr/>
         </p:nvSpPr>
         <p:spPr>
           <a:xfrm>
-            <a:off x="8062722" y="17967960"/>
+            <a:off x="8062722" y="18105120"/>
             <a:ext cx="621792" cy="621792"/>
           </a:xfrm>
           <a:prstGeom prst="rect">
@@ -5272,13 +5831,13 @@
       </p:sp>
       <p:sp>
         <p:nvSpPr>
-          <p:cNvPr id="100" name="text-99"/>
+          <p:cNvPr id="100" name="text-97"/>
           <p:cNvSpPr txBox="1"/>
           <p:nvPr/>
         </p:nvSpPr>
         <p:spPr>
           <a:xfrm>
-            <a:off x="8839962" y="17967960"/>
+            <a:off x="8839962" y="18105120"/>
             <a:ext cx="5456682" cy="621792"/>
           </a:xfrm>
           <a:prstGeom prst="rect">
@@ -5308,14 +5867,14 @@
       </p:sp>
       <p:sp>
         <p:nvSpPr>
-          <p:cNvPr id="101" name="text-100"/>
+          <p:cNvPr id="101" name="text-98"/>
           <p:cNvSpPr txBox="1"/>
           <p:nvPr/>
         </p:nvSpPr>
         <p:spPr>
           <a:xfrm>
-            <a:off x="8108442" y="18836640"/>
-            <a:ext cx="6096762" cy="1815998"/>
+            <a:off x="8108442" y="18973800"/>
+            <a:ext cx="6096762" cy="1678838"/>
           </a:xfrm>
           <a:prstGeom prst="rect">
             <a:avLst/>
@@ -5335,7 +5894,7 @@
               <a:buChar char="•"/>
             </a:pPr>
             <a:r>
-              <a:rPr lang="en-US" sz="1800" b="1" dirty="0">
+              <a:rPr lang="en-US" sz="1700" b="1" dirty="0">
                 <a:solidFill>
                   <a:schemeClr val="accent1"/>
                 </a:solidFill>
@@ -5347,19 +5906,19 @@
                 <a:spcPct val="105000"/>
               </a:lnSpc>
               <a:spcAft>
-                <a:spcPts val="600"/>
+                <a:spcPts val="400"/>
               </a:spcAft>
               <a:buNone/>
             </a:pPr>
             <a:r>
-              <a:rPr lang="en-US" sz="1800" dirty="0">
+              <a:rPr lang="en-US" sz="1700" dirty="0">
                 <a:solidFill>
                   <a:schemeClr val="tx1"/>
                 </a:solidFill>
               </a:rPr>
               <a:t>이벤트 정보·순위 손실·앙상블로 순위 IC 0.060 → 0.092 (차이 유의)</a:t>
             </a:r>
-            <a:endParaRPr lang="en-US" sz="1800" dirty="0"/>
+            <a:endParaRPr lang="en-US" sz="1700" dirty="0"/>
           </a:p>
           <a:p>
             <a:pPr marL="228600" indent="-228600">
@@ -5370,7 +5929,7 @@
               <a:buChar char="•"/>
             </a:pPr>
             <a:r>
-              <a:rPr lang="en-US" sz="1800" b="1" dirty="0">
+              <a:rPr lang="en-US" sz="1700" b="1" dirty="0">
                 <a:solidFill>
                   <a:schemeClr val="accent1"/>
                 </a:solidFill>
@@ -5382,19 +5941,19 @@
                 <a:spcPct val="105000"/>
               </a:lnSpc>
               <a:spcAft>
-                <a:spcPts val="600"/>
+                <a:spcPts val="400"/>
               </a:spcAft>
               <a:buNone/>
             </a:pPr>
             <a:r>
-              <a:rPr lang="en-US" sz="1800" dirty="0">
+              <a:rPr lang="en-US" sz="1700" dirty="0">
                 <a:solidFill>
                   <a:schemeClr val="tx1"/>
                 </a:solidFill>
               </a:rPr>
               <a:t>자사주 매입은 상승, 임상 승인·신규 계약 같은 홍보성 호재는 하락을 학습</a:t>
             </a:r>
-            <a:endParaRPr lang="en-US" sz="1800" dirty="0"/>
+            <a:endParaRPr lang="en-US" sz="1700" dirty="0"/>
           </a:p>
           <a:p>
             <a:pPr marL="228600" indent="-228600">
@@ -5405,7 +5964,7 @@
               <a:buChar char="•"/>
             </a:pPr>
             <a:r>
-              <a:rPr lang="en-US" sz="1800" b="1" dirty="0">
+              <a:rPr lang="en-US" sz="1700" b="1" dirty="0">
                 <a:solidFill>
                   <a:schemeClr val="accent1"/>
                 </a:solidFill>
@@ -5417,25 +5976,25 @@
                 <a:spcPct val="105000"/>
               </a:lnSpc>
               <a:spcAft>
-                <a:spcPts val="600"/>
+                <a:spcPts val="400"/>
               </a:spcAft>
               <a:buNone/>
             </a:pPr>
             <a:r>
-              <a:rPr lang="en-US" sz="1800" dirty="0">
+              <a:rPr lang="en-US" sz="1700" dirty="0">
                 <a:solidFill>
                   <a:schemeClr val="tx1"/>
                 </a:solidFill>
               </a:rPr>
               <a:t>거래비용 반영 시 수익 소멸, 일반 뉴스(FNSPID)에서는 비유의</a:t>
             </a:r>
-            <a:endParaRPr lang="en-US" sz="1800" dirty="0"/>
+            <a:endParaRPr lang="en-US" sz="1700" dirty="0"/>
           </a:p>
         </p:txBody>
       </p:sp>
       <p:sp>
         <p:nvSpPr>
-          <p:cNvPr id="102" name="card-101"/>
+          <p:cNvPr id="102" name="card-99"/>
           <p:cNvSpPr/>
           <p:nvPr/>
         </p:nvSpPr>
@@ -5462,7 +6021,7 @@
       </p:sp>
       <p:sp>
         <p:nvSpPr>
-          <p:cNvPr id="103" name="badge-102"/>
+          <p:cNvPr id="103" name="badge-100"/>
           <p:cNvSpPr/>
           <p:nvPr/>
         </p:nvSpPr>
@@ -5487,7 +6046,7 @@
       </p:sp>
       <p:sp>
         <p:nvSpPr>
-          <p:cNvPr id="104" name="text-103"/>
+          <p:cNvPr id="104" name="text-101"/>
           <p:cNvSpPr txBox="1"/>
           <p:nvPr/>
         </p:nvSpPr>
@@ -5523,7 +6082,7 @@
       </p:sp>
       <p:sp>
         <p:nvSpPr>
-          <p:cNvPr id="105" name="text-104"/>
+          <p:cNvPr id="105" name="text-102"/>
           <p:cNvSpPr txBox="1"/>
           <p:nvPr/>
         </p:nvSpPr>
@@ -5559,7 +6118,7 @@
       </p:sp>
       <p:sp>
         <p:nvSpPr>
-          <p:cNvPr id="106" name="text-105"/>
+          <p:cNvPr id="106" name="text-103"/>
           <p:cNvSpPr txBox="1"/>
           <p:nvPr/>
         </p:nvSpPr>
@@ -5643,7 +6202,7 @@
       </p:sp>
       <p:sp>
         <p:nvSpPr>
-          <p:cNvPr id="107" name="stat-106"/>
+          <p:cNvPr id="107" name="stat-104"/>
           <p:cNvSpPr/>
           <p:nvPr/>
         </p:nvSpPr>
@@ -5670,7 +6229,7 @@
       </p:sp>
       <p:sp>
         <p:nvSpPr>
-          <p:cNvPr id="108" name="text-107"/>
+          <p:cNvPr id="108" name="text-105"/>
           <p:cNvSpPr txBox="1"/>
           <p:nvPr/>
         </p:nvSpPr>
@@ -5706,7 +6265,7 @@
       </p:sp>
       <p:sp>
         <p:nvSpPr>
-          <p:cNvPr id="109" name="text-108"/>
+          <p:cNvPr id="109" name="text-106"/>
           <p:cNvSpPr txBox="1"/>
           <p:nvPr/>
         </p:nvSpPr>
@@ -5756,7 +6315,7 @@
       </p:sp>
       <p:sp>
         <p:nvSpPr>
-          <p:cNvPr id="110" name="stat-109"/>
+          <p:cNvPr id="110" name="stat-107"/>
           <p:cNvSpPr/>
           <p:nvPr/>
         </p:nvSpPr>
@@ -5783,7 +6342,7 @@
       </p:sp>
       <p:sp>
         <p:nvSpPr>
-          <p:cNvPr id="111" name="text-110"/>
+          <p:cNvPr id="111" name="text-108"/>
           <p:cNvSpPr txBox="1"/>
           <p:nvPr/>
         </p:nvSpPr>
@@ -5819,7 +6378,7 @@
       </p:sp>
       <p:sp>
         <p:nvSpPr>
-          <p:cNvPr id="112" name="text-111"/>
+          <p:cNvPr id="112" name="text-109"/>
           <p:cNvSpPr txBox="1"/>
           <p:nvPr/>
         </p:nvSpPr>
@@ -5869,7 +6428,7 @@
       </p:sp>
       <p:sp>
         <p:nvSpPr>
-          <p:cNvPr id="113" name="stat-112"/>
+          <p:cNvPr id="113" name="stat-110"/>
           <p:cNvSpPr/>
           <p:nvPr/>
         </p:nvSpPr>
@@ -5896,7 +6455,7 @@
       </p:sp>
       <p:sp>
         <p:nvSpPr>
-          <p:cNvPr id="114" name="text-113"/>
+          <p:cNvPr id="114" name="text-111"/>
           <p:cNvSpPr txBox="1"/>
           <p:nvPr/>
         </p:nvSpPr>
@@ -5932,7 +6491,7 @@
       </p:sp>
       <p:sp>
         <p:nvSpPr>
-          <p:cNvPr id="115" name="text-114"/>
+          <p:cNvPr id="115" name="text-112"/>
           <p:cNvSpPr txBox="1"/>
           <p:nvPr/>
         </p:nvSpPr>
@@ -5992,7 +6551,7 @@
         </p:xfrm>
         <a:graphic xmlns:a="http://schemas.openxmlformats.org/drawingml/2006/main">
           <a:graphicData uri="http://schemas.openxmlformats.org/drawingml/2006/chart">
-            <c:chart xmlns:c="http://schemas.openxmlformats.org/drawingml/2006/chart" r:id="rId1"/>
+            <c:chart xmlns:c="http://schemas.openxmlformats.org/drawingml/2006/chart" r:id="rId2"/>
           </a:graphicData>
         </a:graphic>
       </p:graphicFrame>
@@ -6008,7 +6567,7 @@
         </p:xfrm>
         <a:graphic xmlns:a="http://schemas.openxmlformats.org/drawingml/2006/main">
           <a:graphicData uri="http://schemas.openxmlformats.org/drawingml/2006/chart">
-            <c:chart xmlns:c="http://schemas.openxmlformats.org/drawingml/2006/chart" r:id="rId2"/>
+            <c:chart xmlns:c="http://schemas.openxmlformats.org/drawingml/2006/chart" r:id="rId3"/>
           </a:graphicData>
         </a:graphic>
       </p:graphicFrame>

--- a/docs/exhibition/패널_B_최고성능.pptx
+++ b/docs/exhibition/패널_B_최고성능.pptx
@@ -107,7 +107,7 @@
   <p:extLst>
     <p:ext uri="{521415D9-36F7-43E2-AB2F-B90AF26B5E84}">
       <p14:sectionLst xmlns:p14="http://schemas.microsoft.com/office/powerpoint/2010/main">
-        <p14:section name="패널" id="{6be07f60-6744-09f9-05ed-760c6243b3fd}">
+        <p14:section name="패널" id="{6c02d763-1f0a-9a23-c9ca-e129d5c59e29}">
           <p14:sldIdLst>
             <p14:sldId id="256"/>
           </p14:sldIdLst>
@@ -4699,11 +4699,11 @@
         <p:spPr>
           <a:xfrm>
             <a:off x="7742682" y="12893040"/>
-            <a:ext cx="6828282" cy="4663440"/>
+            <a:ext cx="6828282" cy="4297680"/>
           </a:xfrm>
           <a:prstGeom prst="roundRect">
             <a:avLst>
-              <a:gd name="adj" fmla="val 3529"/>
+              <a:gd name="adj" fmla="val 3830"/>
             </a:avLst>
           </a:prstGeom>
           <a:solidFill>
@@ -4814,40 +4814,16 @@
           </a:p>
         </p:txBody>
       </p:sp>
-      <p:pic>
-        <p:nvPicPr>
-          <p:cNvPr id="94" name="qr" descr="GitHub 저장소 QR 코드">    </p:cNvPr>
-          <p:cNvPicPr>
-            <a:picLocks noChangeAspect="1"/>
-          </p:cNvPicPr>
-          <p:nvPr/>
-        </p:nvPicPr>
-        <p:blipFill>
-          <a:blip r:embed="rId1"/>
-          <a:stretch>
-            <a:fillRect/>
-          </a:stretch>
-        </p:blipFill>
+      <p:sp>
+        <p:nvSpPr>
+          <p:cNvPr id="94" name="text-93"/>
+          <p:cNvSpPr txBox="1"/>
+          <p:nvPr/>
+        </p:nvSpPr>
         <p:spPr>
           <a:xfrm>
             <a:off x="8108442" y="14036040"/>
-            <a:ext cx="1371600" cy="1371600"/>
-          </a:xfrm>
-          <a:prstGeom prst="rect">
-            <a:avLst/>
-          </a:prstGeom>
-        </p:spPr>
-      </p:pic>
-      <p:sp>
-        <p:nvSpPr>
-          <p:cNvPr id="95" name="text-93"/>
-          <p:cNvSpPr txBox="1"/>
-          <p:nvPr/>
-        </p:nvSpPr>
-        <p:spPr>
-          <a:xfrm>
-            <a:off x="9754362" y="14036040"/>
-            <a:ext cx="4450842" cy="1371600"/>
+            <a:ext cx="6096762" cy="1005840"/>
           </a:xfrm>
           <a:prstGeom prst="rect">
             <a:avLst/>
@@ -4871,11 +4847,8 @@
                   <a:schemeClr val="accent1"/>
                 </a:solidFill>
               </a:rPr>
-              <a:t>GitHub 저장소</a:t>
-            </a:r>
-            <a:endParaRPr lang="en-US" sz="1700" dirty="0"/>
-          </a:p>
-          <a:p>
+              <a:t>GitHub  </a:t>
+            </a:r>
             <a:pPr indent="0" marL="0">
               <a:spcAft>
                 <a:spcPts val="600"/>
@@ -4940,7 +4913,7 @@
           </p:nvPr>
         </p:nvGraphicFramePr>
         <p:xfrm>
-          <a:off x="8108442" y="15544800"/>
+          <a:off x="8108442" y="15179040"/>
           <a:ext cx="6096762" cy="914400"/>
         </p:xfrm>
         <a:graphic>
@@ -5743,18 +5716,18 @@
       </p:graphicFrame>
       <p:sp>
         <p:nvSpPr>
-          <p:cNvPr id="97" name="card-94"/>
+          <p:cNvPr id="96" name="card-94"/>
           <p:cNvSpPr/>
           <p:nvPr/>
         </p:nvSpPr>
         <p:spPr>
           <a:xfrm>
-            <a:off x="7742682" y="17830800"/>
-            <a:ext cx="6828282" cy="3096158"/>
+            <a:off x="7742682" y="17465040"/>
+            <a:ext cx="6828282" cy="3461918"/>
           </a:xfrm>
           <a:prstGeom prst="roundRect">
             <a:avLst>
-              <a:gd name="adj" fmla="val 5316"/>
+              <a:gd name="adj" fmla="val 4754"/>
             </a:avLst>
           </a:prstGeom>
           <a:solidFill>
@@ -5770,13 +5743,13 @@
       </p:sp>
       <p:sp>
         <p:nvSpPr>
-          <p:cNvPr id="98" name="badge-95"/>
+          <p:cNvPr id="97" name="badge-95"/>
           <p:cNvSpPr/>
           <p:nvPr/>
         </p:nvSpPr>
         <p:spPr>
           <a:xfrm>
-            <a:off x="8062722" y="18105120"/>
+            <a:off x="8062722" y="17739360"/>
             <a:ext cx="621792" cy="621792"/>
           </a:xfrm>
           <a:prstGeom prst="ellipse">
@@ -5795,13 +5768,13 @@
       </p:sp>
       <p:sp>
         <p:nvSpPr>
-          <p:cNvPr id="99" name="text-96"/>
+          <p:cNvPr id="98" name="text-96"/>
           <p:cNvSpPr txBox="1"/>
           <p:nvPr/>
         </p:nvSpPr>
         <p:spPr>
           <a:xfrm>
-            <a:off x="8062722" y="18105120"/>
+            <a:off x="8062722" y="17739360"/>
             <a:ext cx="621792" cy="621792"/>
           </a:xfrm>
           <a:prstGeom prst="rect">
@@ -5831,13 +5804,13 @@
       </p:sp>
       <p:sp>
         <p:nvSpPr>
-          <p:cNvPr id="100" name="text-97"/>
+          <p:cNvPr id="99" name="text-97"/>
           <p:cNvSpPr txBox="1"/>
           <p:nvPr/>
         </p:nvSpPr>
         <p:spPr>
           <a:xfrm>
-            <a:off x="8839962" y="18105120"/>
+            <a:off x="8839962" y="17739360"/>
             <a:ext cx="5456682" cy="621792"/>
           </a:xfrm>
           <a:prstGeom prst="rect">
@@ -5867,14 +5840,14 @@
       </p:sp>
       <p:sp>
         <p:nvSpPr>
-          <p:cNvPr id="101" name="text-98"/>
+          <p:cNvPr id="100" name="text-98"/>
           <p:cNvSpPr txBox="1"/>
           <p:nvPr/>
         </p:nvSpPr>
         <p:spPr>
           <a:xfrm>
-            <a:off x="8108442" y="18973800"/>
-            <a:ext cx="6096762" cy="1678838"/>
+            <a:off x="8108442" y="18608040"/>
+            <a:ext cx="6096762" cy="2044598"/>
           </a:xfrm>
           <a:prstGeom prst="rect">
             <a:avLst/>
@@ -5894,7 +5867,7 @@
               <a:buChar char="•"/>
             </a:pPr>
             <a:r>
-              <a:rPr lang="en-US" sz="1700" b="1" dirty="0">
+              <a:rPr lang="en-US" sz="1800" b="1" dirty="0">
                 <a:solidFill>
                   <a:schemeClr val="accent1"/>
                 </a:solidFill>
@@ -5906,19 +5879,19 @@
                 <a:spcPct val="105000"/>
               </a:lnSpc>
               <a:spcAft>
-                <a:spcPts val="400"/>
+                <a:spcPts val="600"/>
               </a:spcAft>
               <a:buNone/>
             </a:pPr>
             <a:r>
-              <a:rPr lang="en-US" sz="1700" dirty="0">
+              <a:rPr lang="en-US" sz="1800" dirty="0">
                 <a:solidFill>
                   <a:schemeClr val="tx1"/>
                 </a:solidFill>
               </a:rPr>
               <a:t>이벤트 정보·순위 손실·앙상블로 순위 IC 0.060 → 0.092 (차이 유의)</a:t>
             </a:r>
-            <a:endParaRPr lang="en-US" sz="1700" dirty="0"/>
+            <a:endParaRPr lang="en-US" sz="1800" dirty="0"/>
           </a:p>
           <a:p>
             <a:pPr marL="228600" indent="-228600">
@@ -5929,7 +5902,7 @@
               <a:buChar char="•"/>
             </a:pPr>
             <a:r>
-              <a:rPr lang="en-US" sz="1700" b="1" dirty="0">
+              <a:rPr lang="en-US" sz="1800" b="1" dirty="0">
                 <a:solidFill>
                   <a:schemeClr val="accent1"/>
                 </a:solidFill>
@@ -5941,19 +5914,19 @@
                 <a:spcPct val="105000"/>
               </a:lnSpc>
               <a:spcAft>
-                <a:spcPts val="400"/>
+                <a:spcPts val="600"/>
               </a:spcAft>
               <a:buNone/>
             </a:pPr>
             <a:r>
-              <a:rPr lang="en-US" sz="1700" dirty="0">
+              <a:rPr lang="en-US" sz="1800" dirty="0">
                 <a:solidFill>
                   <a:schemeClr val="tx1"/>
                 </a:solidFill>
               </a:rPr>
               <a:t>자사주 매입은 상승, 임상 승인·신규 계약 같은 홍보성 호재는 하락을 학습</a:t>
             </a:r>
-            <a:endParaRPr lang="en-US" sz="1700" dirty="0"/>
+            <a:endParaRPr lang="en-US" sz="1800" dirty="0"/>
           </a:p>
           <a:p>
             <a:pPr marL="228600" indent="-228600">
@@ -5964,7 +5937,7 @@
               <a:buChar char="•"/>
             </a:pPr>
             <a:r>
-              <a:rPr lang="en-US" sz="1700" b="1" dirty="0">
+              <a:rPr lang="en-US" sz="1800" b="1" dirty="0">
                 <a:solidFill>
                   <a:schemeClr val="accent1"/>
                 </a:solidFill>
@@ -5976,25 +5949,25 @@
                 <a:spcPct val="105000"/>
               </a:lnSpc>
               <a:spcAft>
-                <a:spcPts val="400"/>
+                <a:spcPts val="600"/>
               </a:spcAft>
               <a:buNone/>
             </a:pPr>
             <a:r>
-              <a:rPr lang="en-US" sz="1700" dirty="0">
+              <a:rPr lang="en-US" sz="1800" dirty="0">
                 <a:solidFill>
                   <a:schemeClr val="tx1"/>
                 </a:solidFill>
               </a:rPr>
               <a:t>거래비용 반영 시 수익 소멸, 일반 뉴스(FNSPID)에서는 비유의</a:t>
             </a:r>
-            <a:endParaRPr lang="en-US" sz="1700" dirty="0"/>
+            <a:endParaRPr lang="en-US" sz="1800" dirty="0"/>
           </a:p>
         </p:txBody>
       </p:sp>
       <p:sp>
         <p:nvSpPr>
-          <p:cNvPr id="102" name="card-99"/>
+          <p:cNvPr id="101" name="card-99"/>
           <p:cNvSpPr/>
           <p:nvPr/>
         </p:nvSpPr>
@@ -6021,7 +5994,7 @@
       </p:sp>
       <p:sp>
         <p:nvSpPr>
-          <p:cNvPr id="103" name="badge-100"/>
+          <p:cNvPr id="102" name="badge-100"/>
           <p:cNvSpPr/>
           <p:nvPr/>
         </p:nvSpPr>
@@ -6046,7 +6019,7 @@
       </p:sp>
       <p:sp>
         <p:nvSpPr>
-          <p:cNvPr id="104" name="text-101"/>
+          <p:cNvPr id="103" name="text-101"/>
           <p:cNvSpPr txBox="1"/>
           <p:nvPr/>
         </p:nvSpPr>
@@ -6082,7 +6055,7 @@
       </p:sp>
       <p:sp>
         <p:nvSpPr>
-          <p:cNvPr id="105" name="text-102"/>
+          <p:cNvPr id="104" name="text-102"/>
           <p:cNvSpPr txBox="1"/>
           <p:nvPr/>
         </p:nvSpPr>
@@ -6118,7 +6091,7 @@
       </p:sp>
       <p:sp>
         <p:nvSpPr>
-          <p:cNvPr id="106" name="text-103"/>
+          <p:cNvPr id="105" name="text-103"/>
           <p:cNvSpPr txBox="1"/>
           <p:nvPr/>
         </p:nvSpPr>
@@ -6202,7 +6175,7 @@
       </p:sp>
       <p:sp>
         <p:nvSpPr>
-          <p:cNvPr id="107" name="stat-104"/>
+          <p:cNvPr id="106" name="stat-104"/>
           <p:cNvSpPr/>
           <p:nvPr/>
         </p:nvSpPr>
@@ -6229,7 +6202,7 @@
       </p:sp>
       <p:sp>
         <p:nvSpPr>
-          <p:cNvPr id="108" name="text-105"/>
+          <p:cNvPr id="107" name="text-105"/>
           <p:cNvSpPr txBox="1"/>
           <p:nvPr/>
         </p:nvSpPr>
@@ -6265,7 +6238,7 @@
       </p:sp>
       <p:sp>
         <p:nvSpPr>
-          <p:cNvPr id="109" name="text-106"/>
+          <p:cNvPr id="108" name="text-106"/>
           <p:cNvSpPr txBox="1"/>
           <p:nvPr/>
         </p:nvSpPr>
@@ -6315,7 +6288,7 @@
       </p:sp>
       <p:sp>
         <p:nvSpPr>
-          <p:cNvPr id="110" name="stat-107"/>
+          <p:cNvPr id="109" name="stat-107"/>
           <p:cNvSpPr/>
           <p:nvPr/>
         </p:nvSpPr>
@@ -6342,7 +6315,7 @@
       </p:sp>
       <p:sp>
         <p:nvSpPr>
-          <p:cNvPr id="111" name="text-108"/>
+          <p:cNvPr id="110" name="text-108"/>
           <p:cNvSpPr txBox="1"/>
           <p:nvPr/>
         </p:nvSpPr>
@@ -6378,7 +6351,7 @@
       </p:sp>
       <p:sp>
         <p:nvSpPr>
-          <p:cNvPr id="112" name="text-109"/>
+          <p:cNvPr id="111" name="text-109"/>
           <p:cNvSpPr txBox="1"/>
           <p:nvPr/>
         </p:nvSpPr>
@@ -6428,7 +6401,7 @@
       </p:sp>
       <p:sp>
         <p:nvSpPr>
-          <p:cNvPr id="113" name="stat-110"/>
+          <p:cNvPr id="112" name="stat-110"/>
           <p:cNvSpPr/>
           <p:nvPr/>
         </p:nvSpPr>
@@ -6455,7 +6428,7 @@
       </p:sp>
       <p:sp>
         <p:nvSpPr>
-          <p:cNvPr id="114" name="text-111"/>
+          <p:cNvPr id="113" name="text-111"/>
           <p:cNvSpPr txBox="1"/>
           <p:nvPr/>
         </p:nvSpPr>
@@ -6491,7 +6464,7 @@
       </p:sp>
       <p:sp>
         <p:nvSpPr>
-          <p:cNvPr id="115" name="text-112"/>
+          <p:cNvPr id="114" name="text-112"/>
           <p:cNvSpPr txBox="1"/>
           <p:nvPr/>
         </p:nvSpPr>
@@ -6541,7 +6514,7 @@
       </p:sp>
       <p:graphicFrame>
         <p:nvGraphicFramePr>
-          <p:cNvPr id="116" name="chart-ic" descr=""/>
+          <p:cNvPr id="115" name="chart-ic" descr=""/>
           <p:cNvGraphicFramePr/>
           <p:nvPr/>
         </p:nvGraphicFramePr>
@@ -6551,13 +6524,13 @@
         </p:xfrm>
         <a:graphic xmlns:a="http://schemas.openxmlformats.org/drawingml/2006/main">
           <a:graphicData uri="http://schemas.openxmlformats.org/drawingml/2006/chart">
-            <c:chart xmlns:c="http://schemas.openxmlformats.org/drawingml/2006/chart" r:id="rId2"/>
+            <c:chart xmlns:c="http://schemas.openxmlformats.org/drawingml/2006/chart" r:id="rId1"/>
           </a:graphicData>
         </a:graphic>
       </p:graphicFrame>
       <p:graphicFrame>
         <p:nvGraphicFramePr>
-          <p:cNvPr id="117" name="chart-window" descr=""/>
+          <p:cNvPr id="116" name="chart-window" descr=""/>
           <p:cNvGraphicFramePr/>
           <p:nvPr/>
         </p:nvGraphicFramePr>
@@ -6567,7 +6540,7 @@
         </p:xfrm>
         <a:graphic xmlns:a="http://schemas.openxmlformats.org/drawingml/2006/main">
           <a:graphicData uri="http://schemas.openxmlformats.org/drawingml/2006/chart">
-            <c:chart xmlns:c="http://schemas.openxmlformats.org/drawingml/2006/chart" r:id="rId3"/>
+            <c:chart xmlns:c="http://schemas.openxmlformats.org/drawingml/2006/chart" r:id="rId2"/>
           </a:graphicData>
         </a:graphic>
       </p:graphicFrame>

--- a/docs/exhibition/패널_B_최고성능.pptx
+++ b/docs/exhibition/패널_B_최고성능.pptx
@@ -107,7 +107,7 @@
   <p:extLst>
     <p:ext uri="{521415D9-36F7-43E2-AB2F-B90AF26B5E84}">
       <p14:sectionLst xmlns:p14="http://schemas.microsoft.com/office/powerpoint/2010/main">
-        <p14:section name="패널" id="{6c02d763-1f0a-9a23-c9ca-e129d5c59e29}">
+        <p14:section name="패널" id="{95792225-341b-6ada-33f9-12952d1b2b86}">
           <p14:sldIdLst>
             <p14:sldId id="256"/>
           </p14:sldIdLst>
@@ -1773,11 +1773,11 @@
         <p:spPr>
           <a:xfrm>
             <a:off x="548640" y="2926080"/>
-            <a:ext cx="6828282" cy="4343400"/>
+            <a:ext cx="6828282" cy="3931920"/>
           </a:xfrm>
           <a:prstGeom prst="roundRect">
             <a:avLst>
-              <a:gd name="adj" fmla="val 3789"/>
+              <a:gd name="adj" fmla="val 4186"/>
             </a:avLst>
           </a:prstGeom>
           <a:solidFill>
@@ -1897,7 +1897,7 @@
         <p:spPr>
           <a:xfrm>
             <a:off x="914400" y="4069080"/>
-            <a:ext cx="6096762" cy="2926080"/>
+            <a:ext cx="6096762" cy="2514600"/>
           </a:xfrm>
           <a:prstGeom prst="rect">
             <a:avLst/>
@@ -2009,7 +2009,7 @@
                   <a:schemeClr val="tx1"/>
                 </a:solidFill>
               </a:rPr>
-              <a:t>뉴스의 의미·감성(주 신호)과 과거 30일 시장 상태(보조 신호)를 결합해 뉴스 발표 후 1일 초과수익률 예측</a:t>
+              <a:t>뉴스의 의미·감성(주 신호)과 과거 30일 시장 상태(보조 신호)를 결합해 1일 초과수익률 예측</a:t>
             </a:r>
             <a:endParaRPr lang="en-US" sz="1900" dirty="0"/>
           </a:p>
@@ -2044,7 +2044,7 @@
                   <a:schemeClr val="tx1"/>
                 </a:solidFill>
               </a:rPr>
-              <a:t>실제 기업 보도자료 6.3만 건, 미래 정보 누수 없는 표본 외 평가</a:t>
+              <a:t>기업 보도자료 6.3만 건, 미래 정보 누수 없는 표본 외 평가</a:t>
             </a:r>
             <a:endParaRPr lang="en-US" sz="1900" dirty="0"/>
           </a:p>
@@ -2058,12 +2058,12 @@
         </p:nvSpPr>
         <p:spPr>
           <a:xfrm>
-            <a:off x="548640" y="7543800"/>
-            <a:ext cx="6828282" cy="5074920"/>
+            <a:off x="548640" y="7132320"/>
+            <a:ext cx="6828282" cy="5486400"/>
           </a:xfrm>
           <a:prstGeom prst="roundRect">
             <a:avLst>
-              <a:gd name="adj" fmla="val 3243"/>
+              <a:gd name="adj" fmla="val 3000"/>
             </a:avLst>
           </a:prstGeom>
           <a:solidFill>
@@ -2085,7 +2085,7 @@
         </p:nvSpPr>
         <p:spPr>
           <a:xfrm>
-            <a:off x="868680" y="7818120"/>
+            <a:off x="868680" y="7406640"/>
             <a:ext cx="621792" cy="621792"/>
           </a:xfrm>
           <a:prstGeom prst="ellipse">
@@ -2110,7 +2110,7 @@
         </p:nvSpPr>
         <p:spPr>
           <a:xfrm>
-            <a:off x="868680" y="7818120"/>
+            <a:off x="868680" y="7406640"/>
             <a:ext cx="621792" cy="621792"/>
           </a:xfrm>
           <a:prstGeom prst="rect">
@@ -2146,7 +2146,7 @@
         </p:nvSpPr>
         <p:spPr>
           <a:xfrm>
-            <a:off x="1645920" y="7818120"/>
+            <a:off x="1645920" y="7406640"/>
             <a:ext cx="5456682" cy="621792"/>
           </a:xfrm>
           <a:prstGeom prst="rect">
@@ -2182,8 +2182,8 @@
         </p:nvSpPr>
         <p:spPr>
           <a:xfrm>
-            <a:off x="914400" y="8686800"/>
-            <a:ext cx="6096762" cy="3657600"/>
+            <a:off x="914400" y="8275320"/>
+            <a:ext cx="6096762" cy="4069080"/>
           </a:xfrm>
           <a:prstGeom prst="rect">
             <a:avLst/>
@@ -2203,7 +2203,7 @@
               <a:buChar char="•"/>
             </a:pPr>
             <a:r>
-              <a:rPr lang="en-US" sz="1700" b="1" dirty="0">
+              <a:rPr lang="en-US" sz="1750" b="1" dirty="0">
                 <a:solidFill>
                   <a:schemeClr val="accent1"/>
                 </a:solidFill>
@@ -2215,19 +2215,19 @@
                 <a:spcPct val="105000"/>
               </a:lnSpc>
               <a:spcAft>
-                <a:spcPts val="400"/>
+                <a:spcPts val="500"/>
               </a:spcAft>
               <a:buNone/>
             </a:pPr>
             <a:r>
-              <a:rPr lang="en-US" sz="1700" dirty="0">
+              <a:rPr lang="en-US" sz="1750" dirty="0">
                 <a:solidFill>
                   <a:schemeClr val="tx1"/>
                 </a:solidFill>
               </a:rPr>
               <a:t>GPT-4o-mini 요약·감성 점수 + 요약문 임베딩(1536차원) → 완전연결층 → 512차원</a:t>
             </a:r>
-            <a:endParaRPr lang="en-US" sz="1700" dirty="0"/>
+            <a:endParaRPr lang="en-US" sz="1750" dirty="0"/>
           </a:p>
           <a:p>
             <a:pPr marL="228600" indent="-228600">
@@ -2238,7 +2238,7 @@
               <a:buChar char="•"/>
             </a:pPr>
             <a:r>
-              <a:rPr lang="en-US" sz="1700" b="1" dirty="0">
+              <a:rPr lang="en-US" sz="1750" b="1" dirty="0">
                 <a:solidFill>
                   <a:schemeClr val="accent1"/>
                 </a:solidFill>
@@ -2250,19 +2250,19 @@
                 <a:spcPct val="105000"/>
               </a:lnSpc>
               <a:spcAft>
-                <a:spcPts val="400"/>
+                <a:spcPts val="500"/>
               </a:spcAft>
               <a:buNone/>
             </a:pPr>
             <a:r>
-              <a:rPr lang="en-US" sz="1700" dirty="0">
+              <a:rPr lang="en-US" sz="1750" dirty="0">
                 <a:solidFill>
                   <a:schemeClr val="tx1"/>
                 </a:solidFill>
               </a:rPr>
-              <a:t>기술적 지표 9종 × 30일 → 인과적 TCN → 시점별 512차원</a:t>
-            </a:r>
-            <a:endParaRPr lang="en-US" sz="1700" dirty="0"/>
+              <a:t>과거 30일 지표 9종을 TCN으로 읽어 하루마다 512차원 벡터로 요약 (미래 정보 차단)</a:t>
+            </a:r>
+            <a:endParaRPr lang="en-US" sz="1750" dirty="0"/>
           </a:p>
           <a:p>
             <a:pPr marL="228600" indent="-228600">
@@ -2273,7 +2273,7 @@
               <a:buChar char="•"/>
             </a:pPr>
             <a:r>
-              <a:rPr lang="en-US" sz="1700" b="1" dirty="0">
+              <a:rPr lang="en-US" sz="1750" b="1" dirty="0">
                 <a:solidFill>
                   <a:schemeClr val="accent1"/>
                 </a:solidFill>
@@ -2285,19 +2285,19 @@
                 <a:spcPct val="105000"/>
               </a:lnSpc>
               <a:spcAft>
-                <a:spcPts val="400"/>
+                <a:spcPts val="500"/>
               </a:spcAft>
               <a:buNone/>
             </a:pPr>
             <a:r>
-              <a:rPr lang="en-US" sz="1700" dirty="0">
+              <a:rPr lang="en-US" sz="1750" dirty="0">
                 <a:solidFill>
                   <a:schemeClr val="tx1"/>
                 </a:solidFill>
               </a:rPr>
-              <a:t>주 신호(Q)로 30개 보조 벡터(K·V)를 softmax 가중 평균</a:t>
-            </a:r>
-            <a:endParaRPr lang="en-US" sz="1700" dirty="0"/>
+              <a:t>뉴스 벡터(Q)와 30일 각 지표 벡터(K)의 관련도를 내적으로 계산 → softmax 가중치(합 1) → 지표 벡터(V)를 가중 평균해 뉴스와 관련 깊은 날을 더 반영. 뉴스 1개가 30일을 한 방향으로만 참조해 '비대칭'</a:t>
+            </a:r>
+            <a:endParaRPr lang="en-US" sz="1750" dirty="0"/>
           </a:p>
           <a:p>
             <a:pPr marL="228600" indent="-228600">
@@ -2308,7 +2308,7 @@
               <a:buChar char="•"/>
             </a:pPr>
             <a:r>
-              <a:rPr lang="en-US" sz="1700" b="1" dirty="0">
+              <a:rPr lang="en-US" sz="1750" b="1" dirty="0">
                 <a:solidFill>
                   <a:schemeClr val="accent1"/>
                 </a:solidFill>
@@ -2320,19 +2320,19 @@
                 <a:spcPct val="105000"/>
               </a:lnSpc>
               <a:spcAft>
-                <a:spcPts val="400"/>
+                <a:spcPts val="500"/>
               </a:spcAft>
               <a:buNone/>
             </a:pPr>
             <a:r>
-              <a:rPr lang="en-US" sz="1700" dirty="0">
+              <a:rPr lang="en-US" sz="1750" dirty="0">
                 <a:solidFill>
                   <a:schemeClr val="tx1"/>
                 </a:solidFill>
               </a:rPr>
-              <a:t>h = p + σ(W[p; c]) ⊙ c, 보조 정보 반영 정도를 학습</a:t>
-            </a:r>
-            <a:endParaRPr lang="en-US" sz="1700" dirty="0"/>
+              <a:t>h = p + σ(W[p; c]) ⊙ c, 보조 정보 반영 정도 학습</a:t>
+            </a:r>
+            <a:endParaRPr lang="en-US" sz="1750" dirty="0"/>
           </a:p>
           <a:p>
             <a:pPr marL="228600" indent="-228600">
@@ -2343,7 +2343,7 @@
               <a:buChar char="•"/>
             </a:pPr>
             <a:r>
-              <a:rPr lang="en-US" sz="1700" b="1" dirty="0">
+              <a:rPr lang="en-US" sz="1750" b="1" dirty="0">
                 <a:solidFill>
                   <a:schemeClr val="accent1"/>
                 </a:solidFill>
@@ -2355,19 +2355,19 @@
                 <a:spcPct val="105000"/>
               </a:lnSpc>
               <a:spcAft>
-                <a:spcPts val="400"/>
+                <a:spcPts val="500"/>
               </a:spcAft>
               <a:buNone/>
             </a:pPr>
             <a:r>
-              <a:rPr lang="en-US" sz="1700" dirty="0">
+              <a:rPr lang="en-US" sz="1750" dirty="0">
                 <a:solidFill>
                   <a:schemeClr val="tx1"/>
                 </a:solidFill>
               </a:rPr>
               <a:t>MLP 512 → 256 → 64 → 1</a:t>
             </a:r>
-            <a:endParaRPr lang="en-US" sz="1700" dirty="0"/>
+            <a:endParaRPr lang="en-US" sz="1750" dirty="0"/>
           </a:p>
           <a:p>
             <a:pPr marL="228600" indent="-228600">
@@ -2378,7 +2378,7 @@
               <a:buChar char="•"/>
             </a:pPr>
             <a:r>
-              <a:rPr lang="en-US" sz="1700" b="1" dirty="0">
+              <a:rPr lang="en-US" sz="1750" b="1" dirty="0">
                 <a:solidFill>
                   <a:schemeClr val="accent1"/>
                 </a:solidFill>
@@ -2390,19 +2390,19 @@
                 <a:spcPct val="105000"/>
               </a:lnSpc>
               <a:spcAft>
-                <a:spcPts val="400"/>
+                <a:spcPts val="500"/>
               </a:spcAft>
               <a:buNone/>
             </a:pPr>
             <a:r>
-              <a:rPr lang="en-US" sz="1700" dirty="0">
+              <a:rPr lang="en-US" sz="1750" dirty="0">
                 <a:solidFill>
                   <a:schemeClr val="tx1"/>
                 </a:solidFill>
               </a:rPr>
               <a:t>이벤트 27종·순위 손실 추가, 12개 모델 검증 가중 앙상블</a:t>
             </a:r>
-            <a:endParaRPr lang="en-US" sz="1700" dirty="0"/>
+            <a:endParaRPr lang="en-US" sz="1750" dirty="0"/>
           </a:p>
         </p:txBody>
       </p:sp>
